--- a/slides/block1.pptx
+++ b/slides/block1.pptx
@@ -31,6 +31,7 @@
     <p:sldId id="279" r:id="rId31"/>
     <p:sldId id="280" r:id="rId32"/>
     <p:sldId id="281" r:id="rId33"/>
+    <p:sldId id="282" r:id="rId34"/>
   </p:sldIdLst>
   <p:sldSz cx="12192000" cy="6858000" type="screen4x3"/>
   <p:notesSz cx="6858000" cy="9144000"/>
@@ -1087,7 +1088,7 @@
           <a:lstStyle/>
           <a:p>
             <a:r>
-              <a:t>Note the vaccine price doing all the work: cost-saving at $0.15, still highly cost-effective at $7.00. Price is almost always the most influential parameter in a vaccine evaluation, which previews one-way sensitivity analysis in Block 3.</a:t>
+              <a:t>Note the vaccine price doing all the work: cost-saving at $0.15, still highly cost-effective at $7.00. Price is almost always the most influential parameter in a vaccine evaluation, which previews one-way sensitivity analysis in Session 8.</a:t>
             </a:r>
           </a:p>
         </p:txBody>
@@ -1157,7 +1158,7 @@
           <a:lstStyle/>
           <a:p>
             <a:r>
-              <a:t>This is the paper that most directly informs the February 2026 decision, and it is Indian, PGIMER-led, societal perspective, with primary Indian cost and quality-of-life data. Point at those ICERs and ask what they should be compared against. Nobody can answer yet, which is exactly the cliff-hanger into Block 2.</a:t>
+              <a:t>This is the paper that most directly informs the February 2026 decision, and it is Indian, PGIMER-led, societal perspective, with primary Indian cost and quality-of-life data. Point at those ICERs and ask what they should be compared against. Nobody can answer yet, and say that you are leaving it open on purpose: Session 6, after lunch, is where that comparison comes from.</a:t>
             </a:r>
           </a:p>
         </p:txBody>
@@ -1647,7 +1648,7 @@
           <a:lstStyle/>
           <a:p>
             <a:r>
-              <a:t>End on the open question deliberately. It is the hook into Block 2, and it is a genuinely unsettled question in India rather than a teaching device.</a:t>
+              <a:t>Do this in ninety seconds, out loud, as a demonstration of the classification working on a paper nobody would call public health. Then ask each group to do the same two questions on their own paper while the slide is up. Every one of them should land in the same box, and if a group cannot say yes to both questions, that is the most interesting finding of the morning.</a:t>
             </a:r>
           </a:p>
         </p:txBody>
@@ -1717,7 +1718,7 @@
           <a:lstStyle/>
           <a:p>
             <a:r>
-              <a:t>Do not read this out. It is here so that a photographed slide carries a full reference, and so the deck stands alone as a document. The same list, annotated, is in handouts/reading-list.html.</a:t>
+              <a:t>End on the open question deliberately. It is the hook into Session 6, and it is a genuinely unsettled question in India rather than a teaching device. Then say why the day does not go straight there: a threshold applied to a badly framed question gives a confident wrong answer, so Sessions 3 to 5 take the ICER apart first.</a:t>
             </a:r>
           </a:p>
         </p:txBody>
@@ -1787,7 +1788,77 @@
           <a:lstStyle/>
           <a:p>
             <a:r>
-              <a:t>Before the break, set the pre-read: skim the abstract of Chauhan 2020 and come back with a view on whether ₹54,881 per QALY is affordable for India. That primes the threshold discussion.</a:t>
+              <a:t>Do not read this out. It is here so that a photographed slide carries a full reference, and so the deck stands alone as a document. The same list, annotated, is in handouts/reading-list.html.</a:t>
+            </a:r>
+          </a:p>
+        </p:txBody>
+      </p:sp>
+      <p:sp>
+        <p:nvSpPr>
+          <p:cNvPr id="4" name="Slide Number Placeholder 3"/>
+          <p:cNvSpPr>
+            <a:spLocks noGrp="1"/>
+          </p:cNvSpPr>
+          <p:nvPr>
+            <p:ph type="sldNum" idx="5" sz="quarter"/>
+          </p:nvPr>
+        </p:nvSpPr>
+        <p:spPr/>
+      </p:sp>
+    </p:spTree>
+  </p:cSld>
+  <p:clrMapOvr>
+    <a:masterClrMapping/>
+  </p:clrMapOvr>
+</p:notes>
+</file>
+
+<file path=ppt/notesSlides/notesSlide27.xml><?xml version="1.0" encoding="utf-8"?>
+<p:notes xmlns:a="http://schemas.openxmlformats.org/drawingml/2006/main" xmlns:p="http://schemas.openxmlformats.org/presentationml/2006/main" xmlns:r="http://schemas.openxmlformats.org/officeDocument/2006/relationships">
+  <p:cSld>
+    <p:spTree>
+      <p:nvGrpSpPr>
+        <p:cNvPr id="1" name=""/>
+        <p:cNvGrpSpPr/>
+        <p:nvPr/>
+      </p:nvGrpSpPr>
+      <p:grpSpPr>
+        <a:xfrm>
+          <a:off x="0" y="0"/>
+          <a:ext cx="0" cy="0"/>
+          <a:chOff x="0" y="0"/>
+          <a:chExt cx="0" cy="0"/>
+        </a:xfrm>
+      </p:grpSpPr>
+      <p:sp>
+        <p:nvSpPr>
+          <p:cNvPr id="2" name="Slide Image Placeholder 1"/>
+          <p:cNvSpPr>
+            <a:spLocks noGrp="1"/>
+          </p:cNvSpPr>
+          <p:nvPr>
+            <p:ph type="sldImg" idx="2"/>
+          </p:nvPr>
+        </p:nvSpPr>
+        <p:spPr/>
+      </p:sp>
+      <p:sp>
+        <p:nvSpPr>
+          <p:cNvPr id="3" name="Notes Placeholder 2"/>
+          <p:cNvSpPr>
+            <a:spLocks noGrp="1"/>
+          </p:cNvSpPr>
+          <p:nvPr>
+            <p:ph type="body" idx="3" sz="quarter"/>
+          </p:nvPr>
+        </p:nvSpPr>
+        <p:spPr/>
+        <p:txBody>
+          <a:bodyPr/>
+          <a:lstStyle/>
+          <a:p>
+            <a:r>
+              <a:t>Set that pre-read explicitly, it is what Session 3 works on. Keep the threshold question visibly parked: tell them you will come back to ₹54,881 after lunch, once they can take an ICER apart.</a:t>
             </a:r>
           </a:p>
         </p:txBody>
@@ -1997,7 +2068,7 @@
           <a:lstStyle/>
           <a:p>
             <a:r>
-              <a:t>Labour this slide. The commonest flaw in the papers they will read is a bad comparator, usually "do nothing" when the real alternative was something else. We return to it hard in Block 3. For now, plant it: an evaluation is only as good as the alternatives it compared.</a:t>
+              <a:t>Labour this slide. The commonest flaw in the papers they will read is a bad comparator, usually "do nothing" when the real alternative was something else. We return to it hard in Session 3, where choosing the comparator is the whole subject. For now, plant it: an evaluation is only as good as the alternatives it compared.</a:t>
             </a:r>
           </a:p>
         </p:txBody>
@@ -10182,7 +10253,7 @@
                 </a:solidFill>
                 <a:latin typeface="Arial"/>
               </a:rPr>
-              <a:t>By the end of this block</a:t>
+              <a:t>By the end of this session</a:t>
             </a:r>
           </a:p>
         </p:txBody>
@@ -13357,7 +13428,7 @@
                 </a:solidFill>
                 <a:latin typeface="Arial"/>
               </a:rPr>
-              <a:t>Recap</a:t>
+              <a:t>The same two questions, on a drug</a:t>
             </a:r>
           </a:p>
         </p:txBody>
@@ -13370,8 +13441,8 @@
         </p:nvSpPr>
         <p:spPr>
           <a:xfrm>
-            <a:off x="1288703" y="1142050"/>
-            <a:ext cx="10350847" cy="959048"/>
+            <a:off x="552450" y="1142050"/>
+            <a:ext cx="11087100" cy="390823"/>
           </a:xfrm>
           <a:prstGeom prst="rect">
             <a:avLst/>
@@ -13386,7 +13457,7 @@
           <a:p>
             <a:pPr algn="l">
               <a:lnSpc>
-                <a:spcPct val="112500"/>
+                <a:spcPct val="116700"/>
               </a:lnSpc>
               <a:spcAft>
                 <a:spcPts val="0"/>
@@ -13394,218 +13465,252 @@
               <a:buNone/>
             </a:pPr>
             <a:r>
-              <a:rPr sz="2800" b="1" i="0">
-                <a:solidFill>
-                  <a:srgbClr val="10141A"/>
-                </a:solidFill>
-                <a:latin typeface="Arial"/>
-              </a:rPr>
-              <a:t>Opportunity cost</a:t>
-            </a:r>
-            <a:r>
-              <a:rPr sz="2800" b="0" i="0">
-                <a:solidFill>
-                  <a:srgbClr val="10141A"/>
-                </a:solidFill>
-                <a:latin typeface="Arial"/>
-              </a:rPr>
-              <a:t>, the health forgone elsewhere, is why any of this exists</a:t>
-            </a:r>
-          </a:p>
-        </p:txBody>
-      </p:sp>
-      <p:sp>
-        <p:nvSpPr>
-          <p:cNvPr id="5" name="TextBox 4"/>
-          <p:cNvSpPr txBox="1"/>
-          <p:nvPr/>
-        </p:nvSpPr>
-        <p:spPr>
-          <a:xfrm>
-            <a:off x="1288703" y="2243080"/>
-            <a:ext cx="10350847" cy="959048"/>
-          </a:xfrm>
-          <a:prstGeom prst="rect">
-            <a:avLst/>
-          </a:prstGeom>
-          <a:noFill/>
-        </p:spPr>
-        <p:txBody>
-          <a:bodyPr wrap="square" lIns="0" rIns="0" tIns="0" bIns="0">
-            <a:spAutoFit/>
-          </a:bodyPr>
-          <a:lstStyle/>
-          <a:p>
-            <a:pPr algn="l">
-              <a:lnSpc>
-                <a:spcPct val="112500"/>
-              </a:lnSpc>
-              <a:spcAft>
-                <a:spcPts val="0"/>
-              </a:spcAft>
-              <a:buNone/>
-            </a:pPr>
-            <a:r>
-              <a:rPr sz="2800" b="0" i="0">
-                <a:solidFill>
-                  <a:srgbClr val="10141A"/>
-                </a:solidFill>
-                <a:latin typeface="Arial"/>
-              </a:rPr>
-              <a:t>An economic evaluation examines </a:t>
-            </a:r>
-            <a:r>
-              <a:rPr sz="2800" b="1" i="0">
-                <a:solidFill>
-                  <a:srgbClr val="10141A"/>
-                </a:solidFill>
-                <a:latin typeface="Arial"/>
-              </a:rPr>
-              <a:t>both costs and consequences</a:t>
-            </a:r>
-            <a:r>
-              <a:rPr sz="2800" b="0" i="0">
-                <a:solidFill>
-                  <a:srgbClr val="10141A"/>
-                </a:solidFill>
-                <a:latin typeface="Arial"/>
-              </a:rPr>
-              <a:t>, for </a:t>
-            </a:r>
-            <a:r>
-              <a:rPr sz="2800" b="1" i="0">
-                <a:solidFill>
-                  <a:srgbClr val="10141A"/>
-                </a:solidFill>
-                <a:latin typeface="Arial"/>
-              </a:rPr>
-              <a:t>two or more alternatives</a:t>
-            </a:r>
-          </a:p>
-        </p:txBody>
-      </p:sp>
-      <p:sp>
-        <p:nvSpPr>
-          <p:cNvPr id="6" name="TextBox 5"/>
-          <p:cNvSpPr txBox="1"/>
-          <p:nvPr/>
-        </p:nvSpPr>
-        <p:spPr>
-          <a:xfrm>
-            <a:off x="1288703" y="3344111"/>
-            <a:ext cx="10350847" cy="959048"/>
-          </a:xfrm>
-          <a:prstGeom prst="rect">
-            <a:avLst/>
-          </a:prstGeom>
-          <a:noFill/>
-        </p:spPr>
-        <p:txBody>
-          <a:bodyPr wrap="square" lIns="0" rIns="0" tIns="0" bIns="0">
-            <a:spAutoFit/>
-          </a:bodyPr>
-          <a:lstStyle/>
-          <a:p>
-            <a:pPr algn="l">
-              <a:lnSpc>
-                <a:spcPct val="112500"/>
-              </a:lnSpc>
-              <a:spcAft>
-                <a:spcPts val="0"/>
-              </a:spcAft>
-              <a:buNone/>
-            </a:pPr>
-            <a:r>
-              <a:rPr sz="2800" b="0" i="0">
-                <a:solidFill>
-                  <a:srgbClr val="10141A"/>
-                </a:solidFill>
-                <a:latin typeface="Arial"/>
-              </a:rPr>
-              <a:t>The </a:t>
-            </a:r>
-            <a:r>
-              <a:rPr sz="2800" b="1" i="0">
-                <a:solidFill>
-                  <a:srgbClr val="10141A"/>
-                </a:solidFill>
-                <a:latin typeface="Arial"/>
-              </a:rPr>
-              <a:t>two questions</a:t>
-            </a:r>
-            <a:r>
-              <a:rPr sz="2800" b="0" i="0">
-                <a:solidFill>
-                  <a:srgbClr val="10141A"/>
-                </a:solidFill>
-                <a:latin typeface="Arial"/>
-              </a:rPr>
-              <a:t> sort every study into six boxes. Five are partial</a:t>
-            </a:r>
-          </a:p>
-        </p:txBody>
-      </p:sp>
-      <p:sp>
-        <p:nvSpPr>
-          <p:cNvPr id="7" name="TextBox 6"/>
-          <p:cNvSpPr txBox="1"/>
-          <p:nvPr/>
-        </p:nvSpPr>
-        <p:spPr>
-          <a:xfrm>
-            <a:off x="1288703" y="4445141"/>
-            <a:ext cx="10350847" cy="479524"/>
-          </a:xfrm>
-          <a:prstGeom prst="rect">
-            <a:avLst/>
-          </a:prstGeom>
-          <a:noFill/>
-        </p:spPr>
-        <p:txBody>
-          <a:bodyPr wrap="square" lIns="0" rIns="0" tIns="0" bIns="0">
-            <a:spAutoFit/>
-          </a:bodyPr>
-          <a:lstStyle/>
-          <a:p>
-            <a:pPr algn="l">
-              <a:lnSpc>
-                <a:spcPct val="112500"/>
-              </a:lnSpc>
-              <a:spcAft>
-                <a:spcPts val="0"/>
-              </a:spcAft>
-              <a:buNone/>
-            </a:pPr>
-            <a:r>
-              <a:rPr sz="2800" b="0" i="0">
-                <a:solidFill>
-                  <a:srgbClr val="10141A"/>
-                </a:solidFill>
-                <a:latin typeface="Arial"/>
-              </a:rPr>
-              <a:t>The four full types differ only in </a:t>
-            </a:r>
-            <a:r>
-              <a:rPr sz="2800" b="1" i="0">
-                <a:solidFill>
-                  <a:srgbClr val="10141A"/>
-                </a:solidFill>
-                <a:latin typeface="Arial"/>
-              </a:rPr>
-              <a:t>how consequences are valued</a:t>
-            </a:r>
-          </a:p>
-        </p:txBody>
-      </p:sp>
-      <p:sp>
-        <p:nvSpPr>
-          <p:cNvPr id="8" name="Rectangle 7"/>
+              <a:rPr sz="2200" b="0" i="0">
+                <a:solidFill>
+                  <a:srgbClr val="47525F"/>
+                </a:solidFill>
+                <a:latin typeface="Arial"/>
+              </a:rPr>
+              <a:t>Adjuvant trastuzumab versus chemotherapy alone, non-metastatic breast cancer, India.</a:t>
+            </a:r>
+          </a:p>
+        </p:txBody>
+      </p:sp>
+      <p:graphicFrame>
+        <p:nvGraphicFramePr>
+          <p:cNvPr id="5" name="Table 4"/>
+          <p:cNvGraphicFramePr>
+            <a:graphicFrameLocks noGrp="1"/>
+          </p:cNvGraphicFramePr>
+          <p:nvPr/>
+        </p:nvGraphicFramePr>
+        <p:xfrm>
+          <a:off x="552450" y="1692473"/>
+          <a:ext cx="11087100" cy="2524720"/>
+        </p:xfrm>
+        <a:graphic>
+          <a:graphicData uri="http://schemas.openxmlformats.org/drawingml/2006/table">
+            <a:tbl>
+              <a:tblPr firstRow="1">
+                <a:tableStyleId>{5C22544A-7EE6-4342-B048-85BDC9FD1C3A}</a:tableStyleId>
+              </a:tblPr>
+              <a:tblGrid>
+                <a:gridCol w="4194423"/>
+                <a:gridCol w="6892677"/>
+              </a:tblGrid>
+              <a:tr h="841573">
+                <a:tc>
+                  <a:txBody>
+                    <a:bodyPr wrap="square"/>
+                    <a:lstStyle/>
+                    <a:p>
+                      <a:pPr algn="l">
+                        <a:lnSpc>
+                          <a:spcPct val="104000"/>
+                        </a:lnSpc>
+                      </a:pPr>
+                      <a:r>
+                        <a:rPr sz="2100" b="1" i="0">
+                          <a:solidFill>
+                            <a:srgbClr val="FFFFFF"/>
+                          </a:solidFill>
+                          <a:latin typeface="Arial"/>
+                        </a:rPr>
+                        <a:t>Question 1: both costs and consequences?</a:t>
+                      </a:r>
+                    </a:p>
+                  </a:txBody>
+                  <a:tcPr marL="60000" marR="60000" marT="35000" marB="35000" anchor="t">
+                    <a:solidFill>
+                      <a:srgbClr val="162A6C"/>
+                    </a:solidFill>
+                  </a:tcPr>
+                </a:tc>
+                <a:tc>
+                  <a:txBody>
+                    <a:bodyPr wrap="square"/>
+                    <a:lstStyle/>
+                    <a:p>
+                      <a:pPr algn="l">
+                        <a:lnSpc>
+                          <a:spcPct val="104000"/>
+                        </a:lnSpc>
+                      </a:pPr>
+                      <a:r>
+                        <a:rPr sz="2100" b="1" i="0">
+                          <a:solidFill>
+                            <a:srgbClr val="10141A"/>
+                          </a:solidFill>
+                          <a:latin typeface="Arial"/>
+                        </a:rPr>
+                        <a:t>Yes.</a:t>
+                      </a:r>
+                      <a:r>
+                        <a:rPr sz="2100" b="0" i="0">
+                          <a:solidFill>
+                            <a:srgbClr val="10141A"/>
+                          </a:solidFill>
+                          <a:latin typeface="Arial"/>
+                        </a:rPr>
+                        <a:t> Incremental cost, and QALYs gained</a:t>
+                      </a:r>
+                    </a:p>
+                  </a:txBody>
+                  <a:tcPr marL="60000" marR="60000" marT="35000" marB="35000" anchor="t">
+                    <a:noFill/>
+                  </a:tcPr>
+                </a:tc>
+              </a:tr>
+              <a:tr h="841573">
+                <a:tc>
+                  <a:txBody>
+                    <a:bodyPr wrap="square"/>
+                    <a:lstStyle/>
+                    <a:p>
+                      <a:pPr algn="l">
+                        <a:lnSpc>
+                          <a:spcPct val="104000"/>
+                        </a:lnSpc>
+                      </a:pPr>
+                      <a:r>
+                        <a:rPr sz="2100" b="1" i="0">
+                          <a:solidFill>
+                            <a:srgbClr val="FFFFFF"/>
+                          </a:solidFill>
+                          <a:latin typeface="Arial"/>
+                        </a:rPr>
+                        <a:t>Question 2: two or more alternatives?</a:t>
+                      </a:r>
+                    </a:p>
+                  </a:txBody>
+                  <a:tcPr marL="60000" marR="60000" marT="35000" marB="35000" anchor="t">
+                    <a:solidFill>
+                      <a:srgbClr val="162A6C"/>
+                    </a:solidFill>
+                  </a:tcPr>
+                </a:tc>
+                <a:tc>
+                  <a:txBody>
+                    <a:bodyPr wrap="square"/>
+                    <a:lstStyle/>
+                    <a:p>
+                      <a:pPr algn="l">
+                        <a:lnSpc>
+                          <a:spcPct val="104000"/>
+                        </a:lnSpc>
+                      </a:pPr>
+                      <a:r>
+                        <a:rPr sz="2100" b="1" i="0">
+                          <a:solidFill>
+                            <a:srgbClr val="10141A"/>
+                          </a:solidFill>
+                          <a:latin typeface="Arial"/>
+                        </a:rPr>
+                        <a:t>Yes.</a:t>
+                      </a:r>
+                      <a:r>
+                        <a:rPr sz="2100" b="0" i="0">
+                          <a:solidFill>
+                            <a:srgbClr val="10141A"/>
+                          </a:solidFill>
+                          <a:latin typeface="Arial"/>
+                        </a:rPr>
+                        <a:t> Chemotherapy alone, and trastuzumab for a year, six months or nine weeks</a:t>
+                      </a:r>
+                    </a:p>
+                  </a:txBody>
+                  <a:tcPr marL="60000" marR="60000" marT="35000" marB="35000" anchor="t">
+                    <a:solidFill>
+                      <a:srgbClr val="F4F6F9"/>
+                    </a:solidFill>
+                  </a:tcPr>
+                </a:tc>
+              </a:tr>
+              <a:tr h="841574">
+                <a:tc>
+                  <a:txBody>
+                    <a:bodyPr wrap="square"/>
+                    <a:lstStyle/>
+                    <a:p>
+                      <a:pPr algn="l">
+                        <a:lnSpc>
+                          <a:spcPct val="104000"/>
+                        </a:lnSpc>
+                      </a:pPr>
+                      <a:r>
+                        <a:rPr sz="2100" b="1" i="0">
+                          <a:solidFill>
+                            <a:srgbClr val="FFFFFF"/>
+                          </a:solidFill>
+                          <a:latin typeface="Arial"/>
+                        </a:rPr>
+                        <a:t>So which box?</a:t>
+                      </a:r>
+                    </a:p>
+                  </a:txBody>
+                  <a:tcPr marL="60000" marR="60000" marT="35000" marB="35000" anchor="t">
+                    <a:solidFill>
+                      <a:srgbClr val="162A6C"/>
+                    </a:solidFill>
+                  </a:tcPr>
+                </a:tc>
+                <a:tc>
+                  <a:txBody>
+                    <a:bodyPr wrap="square"/>
+                    <a:lstStyle/>
+                    <a:p>
+                      <a:pPr algn="l">
+                        <a:lnSpc>
+                          <a:spcPct val="104000"/>
+                        </a:lnSpc>
+                      </a:pPr>
+                      <a:r>
+                        <a:rPr sz="2100" b="0" i="0">
+                          <a:solidFill>
+                            <a:srgbClr val="10141A"/>
+                          </a:solidFill>
+                          <a:latin typeface="Arial"/>
+                        </a:rPr>
+                        <a:t>Bottom right: a </a:t>
+                      </a:r>
+                      <a:r>
+                        <a:rPr sz="2100" b="1" i="0">
+                          <a:solidFill>
+                            <a:srgbClr val="10141A"/>
+                          </a:solidFill>
+                          <a:latin typeface="Arial"/>
+                        </a:rPr>
+                        <a:t>full economic evaluation</a:t>
+                      </a:r>
+                      <a:r>
+                        <a:rPr sz="2100" b="0" i="0">
+                          <a:solidFill>
+                            <a:srgbClr val="10141A"/>
+                          </a:solidFill>
+                          <a:latin typeface="Arial"/>
+                        </a:rPr>
+                        <a:t>, and a cost-utility analysis</a:t>
+                      </a:r>
+                    </a:p>
+                  </a:txBody>
+                  <a:tcPr marL="60000" marR="60000" marT="35000" marB="35000" anchor="t">
+                    <a:noFill/>
+                  </a:tcPr>
+                </a:tc>
+              </a:tr>
+            </a:tbl>
+          </a:graphicData>
+        </a:graphic>
+      </p:graphicFrame>
+      <p:sp>
+        <p:nvSpPr>
+          <p:cNvPr id="6" name="Rectangle 5"/>
           <p:cNvSpPr/>
           <p:nvPr/>
         </p:nvSpPr>
         <p:spPr>
           <a:xfrm>
-            <a:off x="552450" y="5147965"/>
+            <a:off x="552450" y="4339233"/>
             <a:ext cx="11087100" cy="1032867"/>
           </a:xfrm>
           <a:prstGeom prst="rect">
@@ -13641,20 +13746,20 @@
       </p:sp>
       <p:sp>
         <p:nvSpPr>
-          <p:cNvPr id="9" name="Rectangle 8"/>
+          <p:cNvPr id="7" name="Rectangle 6"/>
           <p:cNvSpPr/>
           <p:nvPr/>
         </p:nvSpPr>
         <p:spPr>
           <a:xfrm>
-            <a:off x="552450" y="5147965"/>
+            <a:off x="552450" y="4339233"/>
             <a:ext cx="57150" cy="1032867"/>
           </a:xfrm>
           <a:prstGeom prst="rect">
             <a:avLst/>
           </a:prstGeom>
           <a:solidFill>
-            <a:srgbClr val="162A6C"/>
+            <a:srgbClr val="17683C"/>
           </a:solidFill>
           <a:ln>
             <a:noFill/>
@@ -13685,13 +13790,13 @@
       </p:sp>
       <p:sp>
         <p:nvSpPr>
-          <p:cNvPr id="10" name="TextBox 9"/>
+          <p:cNvPr id="8" name="TextBox 7"/>
           <p:cNvSpPr txBox="1"/>
           <p:nvPr/>
         </p:nvSpPr>
         <p:spPr>
           <a:xfrm>
-            <a:off x="776189" y="5148305"/>
+            <a:off x="776189" y="4339573"/>
             <a:ext cx="10863361" cy="1012527"/>
           </a:xfrm>
           <a:prstGeom prst="rect">
@@ -13721,7 +13826,155 @@
                 </a:solidFill>
                 <a:latin typeface="Arial"/>
               </a:rPr>
-              <a:t>Nothing so far tells you whether ₹54,881 per QALY is good value.</a:t>
+              <a:t>Same two questions, same box. The unit of decision changed, the method did not.</a:t>
+            </a:r>
+          </a:p>
+        </p:txBody>
+      </p:sp>
+      <p:sp>
+        <p:nvSpPr>
+          <p:cNvPr id="9" name="TextBox 8"/>
+          <p:cNvSpPr txBox="1"/>
+          <p:nvPr/>
+        </p:nvSpPr>
+        <p:spPr>
+          <a:xfrm>
+            <a:off x="552450" y="5392730"/>
+            <a:ext cx="11087100" cy="390823"/>
+          </a:xfrm>
+          <a:prstGeom prst="rect">
+            <a:avLst/>
+          </a:prstGeom>
+          <a:noFill/>
+        </p:spPr>
+        <p:txBody>
+          <a:bodyPr wrap="square" lIns="0" rIns="0" tIns="0" bIns="0">
+            <a:spAutoFit/>
+          </a:bodyPr>
+          <a:lstStyle/>
+          <a:p>
+            <a:pPr algn="l">
+              <a:lnSpc>
+                <a:spcPct val="116700"/>
+              </a:lnSpc>
+              <a:spcAft>
+                <a:spcPts val="0"/>
+              </a:spcAft>
+              <a:buNone/>
+            </a:pPr>
+            <a:r>
+              <a:rPr sz="2200" b="0" i="0">
+                <a:solidFill>
+                  <a:srgbClr val="47525F"/>
+                </a:solidFill>
+                <a:latin typeface="Arial"/>
+              </a:rPr>
+              <a:t>And look at the comparator: four durations of the same drug, not the drug against nothing.</a:t>
+            </a:r>
+          </a:p>
+        </p:txBody>
+      </p:sp>
+      <p:sp>
+        <p:nvSpPr>
+          <p:cNvPr id="10" name="Rectangle 9"/>
+          <p:cNvSpPr/>
+          <p:nvPr/>
+        </p:nvSpPr>
+        <p:spPr>
+          <a:xfrm>
+            <a:off x="552450" y="5927824"/>
+            <a:ext cx="11087100" cy="9525"/>
+          </a:xfrm>
+          <a:prstGeom prst="rect">
+            <a:avLst/>
+          </a:prstGeom>
+          <a:solidFill>
+            <a:srgbClr val="CCD4DD"/>
+          </a:solidFill>
+          <a:ln>
+            <a:noFill/>
+          </a:ln>
+          <a:effectLst/>
+        </p:spPr>
+        <p:style>
+          <a:lnRef idx="1">
+            <a:schemeClr val="accent1"/>
+          </a:lnRef>
+          <a:fillRef idx="3">
+            <a:schemeClr val="accent1"/>
+          </a:fillRef>
+          <a:effectRef idx="2">
+            <a:schemeClr val="accent1"/>
+          </a:effectRef>
+          <a:fontRef idx="minor">
+            <a:schemeClr val="lt1"/>
+          </a:fontRef>
+        </p:style>
+        <p:txBody>
+          <a:bodyPr rtlCol="0" anchor="ctr"/>
+          <a:lstStyle/>
+          <a:p>
+            <a:pPr algn="ctr"/>
+          </a:p>
+        </p:txBody>
+      </p:sp>
+      <p:sp>
+        <p:nvSpPr>
+          <p:cNvPr id="11" name="TextBox 10"/>
+          <p:cNvSpPr txBox="1"/>
+          <p:nvPr/>
+        </p:nvSpPr>
+        <p:spPr>
+          <a:xfrm>
+            <a:off x="552450" y="5996645"/>
+            <a:ext cx="11087100" cy="258098"/>
+          </a:xfrm>
+          <a:prstGeom prst="rect">
+            <a:avLst/>
+          </a:prstGeom>
+          <a:noFill/>
+        </p:spPr>
+        <p:txBody>
+          <a:bodyPr wrap="square" lIns="0" rIns="0" tIns="0" bIns="0">
+            <a:spAutoFit/>
+          </a:bodyPr>
+          <a:lstStyle/>
+          <a:p>
+            <a:pPr algn="l">
+              <a:lnSpc>
+                <a:spcPct val="116700"/>
+              </a:lnSpc>
+              <a:spcAft>
+                <a:spcPts val="0"/>
+              </a:spcAft>
+              <a:buNone/>
+            </a:pPr>
+            <a:r>
+              <a:rPr sz="1400" b="0" i="0">
+                <a:solidFill>
+                  <a:srgbClr val="75808D"/>
+                </a:solidFill>
+                <a:latin typeface="Arial"/>
+              </a:rPr>
+              <a:t>Gupta, Verma, Gupta, Prinja, </a:t>
+            </a:r>
+            <a:r>
+              <a:rPr sz="1400" b="0" i="1">
+                <a:solidFill>
+                  <a:srgbClr val="75808D"/>
+                </a:solidFill>
+                <a:latin typeface="Arial"/>
+              </a:rPr>
+              <a:t>JCO Global Oncology</a:t>
+            </a:r>
+            <a:r>
+              <a:rPr sz="1400" b="0" i="0">
+                <a:solidFill>
+                  <a:srgbClr val="75808D"/>
+                </a:solidFill>
+                <a:latin typeface="Arial"/>
+              </a:rPr>
+              <a:t>, 2020. Open access.</a:t>
             </a:r>
           </a:p>
         </p:txBody>
@@ -13826,7 +14079,7 @@
                 </a:solidFill>
                 <a:latin typeface="Arial"/>
               </a:rPr>
-              <a:t>Sources</a:t>
+              <a:t>Recap</a:t>
             </a:r>
           </a:p>
         </p:txBody>
@@ -13839,8 +14092,8 @@
         </p:nvSpPr>
         <p:spPr>
           <a:xfrm>
-            <a:off x="1111002" y="1142050"/>
-            <a:ext cx="10528548" cy="479524"/>
+            <a:off x="1288703" y="1142050"/>
+            <a:ext cx="10350847" cy="959048"/>
           </a:xfrm>
           <a:prstGeom prst="rect">
             <a:avLst/>
@@ -13863,40 +14116,22 @@
               <a:buNone/>
             </a:pPr>
             <a:r>
-              <a:rPr sz="1400" b="1" i="0">
+              <a:rPr sz="2800" b="1" i="0">
                 <a:solidFill>
                   <a:srgbClr val="10141A"/>
                 </a:solidFill>
                 <a:latin typeface="Arial"/>
               </a:rPr>
-              <a:t>Drummond MF, Sculpher MJ, Claxton K, Stoddart GL, Torrance GW.</a:t>
-            </a:r>
-            <a:r>
-              <a:rPr sz="1400" b="0" i="0">
-                <a:solidFill>
-                  <a:srgbClr val="47525F"/>
-                </a:solidFill>
-                <a:latin typeface="Arial"/>
-              </a:rPr>
-              <a:t> Methods for the Economic Evaluation of Health Care Programmes. 4th ed. Oxford University Press; 2015. </a:t>
-            </a:r>
-            <a:r>
-              <a:rPr sz="1400" b="1" i="0">
+              <a:t>Opportunity cost</a:t>
+            </a:r>
+            <a:r>
+              <a:rPr sz="2800" b="0" i="0">
                 <a:solidFill>
                   <a:srgbClr val="10141A"/>
                 </a:solidFill>
                 <a:latin typeface="Arial"/>
               </a:rPr>
-              <a:t>Chapter 1</a:t>
-            </a:r>
-            <a:r>
-              <a:rPr sz="1400" b="0" i="0">
-                <a:solidFill>
-                  <a:srgbClr val="47525F"/>
-                </a:solidFill>
-                <a:latin typeface="Arial"/>
-              </a:rPr>
-              <a:t>, pp. 1–19.</a:t>
+              <a:t>, the health forgone elsewhere, is why any of this exists</a:t>
             </a:r>
           </a:p>
         </p:txBody>
@@ -13909,8 +14144,8 @@
         </p:nvSpPr>
         <p:spPr>
           <a:xfrm>
-            <a:off x="1111002" y="1710276"/>
-            <a:ext cx="10528548" cy="479524"/>
+            <a:off x="1288703" y="2243080"/>
+            <a:ext cx="10350847" cy="959048"/>
           </a:xfrm>
           <a:prstGeom prst="rect">
             <a:avLst/>
@@ -13933,22 +14168,40 @@
               <a:buNone/>
             </a:pPr>
             <a:r>
-              <a:rPr sz="1400" b="1" i="0">
+              <a:rPr sz="2800" b="0" i="0">
                 <a:solidFill>
                   <a:srgbClr val="10141A"/>
                 </a:solidFill>
                 <a:latin typeface="Arial"/>
               </a:rPr>
-              <a:t>Press Information Bureau, Government of India.</a:t>
-            </a:r>
-            <a:r>
-              <a:rPr sz="1400" b="0" i="0">
-                <a:solidFill>
-                  <a:srgbClr val="47525F"/>
-                </a:solidFill>
-                <a:latin typeface="Arial"/>
-              </a:rPr>
-              <a:t> Cervical Cancer Vaccination Campaign launched. 28 February 2026. Burden figures from GLOBOCAN 2022.</a:t>
+              <a:t>An economic evaluation compares </a:t>
+            </a:r>
+            <a:r>
+              <a:rPr sz="2800" b="1" i="0">
+                <a:solidFill>
+                  <a:srgbClr val="10141A"/>
+                </a:solidFill>
+                <a:latin typeface="Arial"/>
+              </a:rPr>
+              <a:t>costs and consequences</a:t>
+            </a:r>
+            <a:r>
+              <a:rPr sz="2800" b="0" i="0">
+                <a:solidFill>
+                  <a:srgbClr val="10141A"/>
+                </a:solidFill>
+                <a:latin typeface="Arial"/>
+              </a:rPr>
+              <a:t> across </a:t>
+            </a:r>
+            <a:r>
+              <a:rPr sz="2800" b="1" i="0">
+                <a:solidFill>
+                  <a:srgbClr val="10141A"/>
+                </a:solidFill>
+                <a:latin typeface="Arial"/>
+              </a:rPr>
+              <a:t>two or more alternatives</a:t>
             </a:r>
           </a:p>
         </p:txBody>
@@ -13961,8 +14214,8 @@
         </p:nvSpPr>
         <p:spPr>
           <a:xfrm>
-            <a:off x="1111002" y="2278502"/>
-            <a:ext cx="10528548" cy="479524"/>
+            <a:off x="1288703" y="3344111"/>
+            <a:ext cx="10350847" cy="959048"/>
           </a:xfrm>
           <a:prstGeom prst="rect">
             <a:avLst/>
@@ -13985,40 +14238,31 @@
               <a:buNone/>
             </a:pPr>
             <a:r>
-              <a:rPr sz="1400" b="1" i="0">
+              <a:rPr sz="2800" b="0" i="0">
                 <a:solidFill>
                   <a:srgbClr val="10141A"/>
                 </a:solidFill>
                 <a:latin typeface="Arial"/>
               </a:rPr>
-              <a:t>Ramamoorthy T, Kulothungan V, Sathishkumar K, et al.</a:t>
-            </a:r>
-            <a:r>
-              <a:rPr sz="1400" b="0" i="0">
-                <a:solidFill>
-                  <a:srgbClr val="47525F"/>
-                </a:solidFill>
-                <a:latin typeface="Arial"/>
-              </a:rPr>
-              <a:t> Burden of cervical cancer in India: YLL, YLD and DALYs at national and subnational levels. </a:t>
-            </a:r>
-            <a:r>
-              <a:rPr sz="1400" b="0" i="1">
-                <a:solidFill>
-                  <a:srgbClr val="47525F"/>
-                </a:solidFill>
-                <a:latin typeface="Arial"/>
-              </a:rPr>
-              <a:t>Reprod Health</a:t>
-            </a:r>
-            <a:r>
-              <a:rPr sz="1400" b="0" i="0">
-                <a:solidFill>
-                  <a:srgbClr val="47525F"/>
-                </a:solidFill>
-                <a:latin typeface="Arial"/>
-              </a:rPr>
-              <a:t> 2024;21:111. PMID 39075548</a:t>
+              <a:t>The </a:t>
+            </a:r>
+            <a:r>
+              <a:rPr sz="2800" b="1" i="0">
+                <a:solidFill>
+                  <a:srgbClr val="10141A"/>
+                </a:solidFill>
+                <a:latin typeface="Arial"/>
+              </a:rPr>
+              <a:t>two questions</a:t>
+            </a:r>
+            <a:r>
+              <a:rPr sz="2800" b="0" i="0">
+                <a:solidFill>
+                  <a:srgbClr val="10141A"/>
+                </a:solidFill>
+                <a:latin typeface="Arial"/>
+              </a:rPr>
+              <a:t> sort every study into six boxes. Five are partial</a:t>
             </a:r>
           </a:p>
         </p:txBody>
@@ -14031,8 +14275,8 @@
         </p:nvSpPr>
         <p:spPr>
           <a:xfrm>
-            <a:off x="1111002" y="2846727"/>
-            <a:ext cx="10528548" cy="479524"/>
+            <a:off x="1288703" y="4445141"/>
+            <a:ext cx="10350847" cy="479524"/>
           </a:xfrm>
           <a:prstGeom prst="rect">
             <a:avLst/>
@@ -14055,54 +14299,122 @@
               <a:buNone/>
             </a:pPr>
             <a:r>
-              <a:rPr sz="1400" b="1" i="0">
+              <a:rPr sz="2800" b="0" i="0">
                 <a:solidFill>
                   <a:srgbClr val="10141A"/>
                 </a:solidFill>
                 <a:latin typeface="Arial"/>
               </a:rPr>
-              <a:t>Singh MP, Chauhan AS, Rai B, et al.</a:t>
-            </a:r>
-            <a:r>
-              <a:rPr sz="1400" b="0" i="0">
-                <a:solidFill>
-                  <a:srgbClr val="47525F"/>
-                </a:solidFill>
-                <a:latin typeface="Arial"/>
-              </a:rPr>
-              <a:t> Cost of treatment for cervical cancer in India. </a:t>
-            </a:r>
-            <a:r>
-              <a:rPr sz="1400" b="0" i="1">
-                <a:solidFill>
-                  <a:srgbClr val="47525F"/>
-                </a:solidFill>
-                <a:latin typeface="Arial"/>
-              </a:rPr>
-              <a:t>Asian Pac J Cancer Prev</a:t>
-            </a:r>
-            <a:r>
-              <a:rPr sz="1400" b="0" i="0">
-                <a:solidFill>
-                  <a:srgbClr val="47525F"/>
-                </a:solidFill>
-                <a:latin typeface="Arial"/>
-              </a:rPr>
-              <a:t> 2020;21(9):2639–46. PMID 32986363</a:t>
-            </a:r>
-          </a:p>
-        </p:txBody>
-      </p:sp>
-      <p:sp>
-        <p:nvSpPr>
-          <p:cNvPr id="8" name="TextBox 7"/>
+              <a:t>The four full types differ only in </a:t>
+            </a:r>
+            <a:r>
+              <a:rPr sz="2800" b="1" i="0">
+                <a:solidFill>
+                  <a:srgbClr val="10141A"/>
+                </a:solidFill>
+                <a:latin typeface="Arial"/>
+              </a:rPr>
+              <a:t>how consequences are valued</a:t>
+            </a:r>
+          </a:p>
+        </p:txBody>
+      </p:sp>
+      <p:sp>
+        <p:nvSpPr>
+          <p:cNvPr id="8" name="Rectangle 7"/>
+          <p:cNvSpPr/>
+          <p:nvPr/>
+        </p:nvSpPr>
+        <p:spPr>
+          <a:xfrm>
+            <a:off x="552450" y="5086648"/>
+            <a:ext cx="11087100" cy="1032867"/>
+          </a:xfrm>
+          <a:prstGeom prst="rect">
+            <a:avLst/>
+          </a:prstGeom>
+          <a:noFill/>
+          <a:ln>
+            <a:noFill/>
+          </a:ln>
+          <a:effectLst/>
+        </p:spPr>
+        <p:style>
+          <a:lnRef idx="1">
+            <a:schemeClr val="accent1"/>
+          </a:lnRef>
+          <a:fillRef idx="3">
+            <a:schemeClr val="accent1"/>
+          </a:fillRef>
+          <a:effectRef idx="2">
+            <a:schemeClr val="accent1"/>
+          </a:effectRef>
+          <a:fontRef idx="minor">
+            <a:schemeClr val="lt1"/>
+          </a:fontRef>
+        </p:style>
+        <p:txBody>
+          <a:bodyPr rtlCol="0" anchor="ctr"/>
+          <a:lstStyle/>
+          <a:p>
+            <a:pPr algn="ctr"/>
+          </a:p>
+        </p:txBody>
+      </p:sp>
+      <p:sp>
+        <p:nvSpPr>
+          <p:cNvPr id="9" name="Rectangle 8"/>
+          <p:cNvSpPr/>
+          <p:nvPr/>
+        </p:nvSpPr>
+        <p:spPr>
+          <a:xfrm>
+            <a:off x="552450" y="5086648"/>
+            <a:ext cx="57150" cy="1032867"/>
+          </a:xfrm>
+          <a:prstGeom prst="rect">
+            <a:avLst/>
+          </a:prstGeom>
+          <a:solidFill>
+            <a:srgbClr val="162A6C"/>
+          </a:solidFill>
+          <a:ln>
+            <a:noFill/>
+          </a:ln>
+          <a:effectLst/>
+        </p:spPr>
+        <p:style>
+          <a:lnRef idx="1">
+            <a:schemeClr val="accent1"/>
+          </a:lnRef>
+          <a:fillRef idx="3">
+            <a:schemeClr val="accent1"/>
+          </a:fillRef>
+          <a:effectRef idx="2">
+            <a:schemeClr val="accent1"/>
+          </a:effectRef>
+          <a:fontRef idx="minor">
+            <a:schemeClr val="lt1"/>
+          </a:fontRef>
+        </p:style>
+        <p:txBody>
+          <a:bodyPr rtlCol="0" anchor="ctr"/>
+          <a:lstStyle/>
+          <a:p>
+            <a:pPr algn="ctr"/>
+          </a:p>
+        </p:txBody>
+      </p:sp>
+      <p:sp>
+        <p:nvSpPr>
+          <p:cNvPr id="10" name="TextBox 9"/>
           <p:cNvSpPr txBox="1"/>
           <p:nvPr/>
         </p:nvSpPr>
         <p:spPr>
           <a:xfrm>
-            <a:off x="1111002" y="3414953"/>
-            <a:ext cx="10528548" cy="479524"/>
+            <a:off x="776189" y="5086988"/>
+            <a:ext cx="10863361" cy="1012527"/>
           </a:xfrm>
           <a:prstGeom prst="rect">
             <a:avLst/>
@@ -14117,7 +14429,7 @@
           <a:p>
             <a:pPr algn="l">
               <a:lnSpc>
-                <a:spcPct val="112500"/>
+                <a:spcPct val="101700"/>
               </a:lnSpc>
               <a:spcAft>
                 <a:spcPts val="0"/>
@@ -14125,54 +14437,27 @@
               <a:buNone/>
             </a:pPr>
             <a:r>
-              <a:rPr sz="1400" b="1" i="0">
+              <a:rPr sz="3200" b="1" i="0" spc="-32">
                 <a:solidFill>
                   <a:srgbClr val="10141A"/>
                 </a:solidFill>
                 <a:latin typeface="Arial"/>
               </a:rPr>
-              <a:t>Sankaranarayanan R, Nene BM, Shastri SS, et al.</a:t>
-            </a:r>
-            <a:r>
-              <a:rPr sz="1400" b="0" i="0">
-                <a:solidFill>
-                  <a:srgbClr val="47525F"/>
-                </a:solidFill>
-                <a:latin typeface="Arial"/>
-              </a:rPr>
-              <a:t> HPV screening for cervical cancer in rural India. </a:t>
-            </a:r>
-            <a:r>
-              <a:rPr sz="1400" b="0" i="1">
-                <a:solidFill>
-                  <a:srgbClr val="47525F"/>
-                </a:solidFill>
-                <a:latin typeface="Arial"/>
-              </a:rPr>
-              <a:t>N Engl J Med</a:t>
-            </a:r>
-            <a:r>
-              <a:rPr sz="1400" b="0" i="0">
-                <a:solidFill>
-                  <a:srgbClr val="47525F"/>
-                </a:solidFill>
-                <a:latin typeface="Arial"/>
-              </a:rPr>
-              <a:t> 2009;360:1385–94. PMID 19339719</a:t>
-            </a:r>
-          </a:p>
-        </p:txBody>
-      </p:sp>
-      <p:sp>
-        <p:nvSpPr>
-          <p:cNvPr id="9" name="TextBox 8"/>
+              <a:t>Nothing so far tells you whether ₹54,881 per QALY is good value.</a:t>
+            </a:r>
+          </a:p>
+        </p:txBody>
+      </p:sp>
+      <p:sp>
+        <p:nvSpPr>
+          <p:cNvPr id="11" name="TextBox 10"/>
           <p:cNvSpPr txBox="1"/>
           <p:nvPr/>
         </p:nvSpPr>
         <p:spPr>
           <a:xfrm>
-            <a:off x="1111002" y="3983179"/>
-            <a:ext cx="10528548" cy="479524"/>
+            <a:off x="552450" y="6140145"/>
+            <a:ext cx="11087100" cy="390823"/>
           </a:xfrm>
           <a:prstGeom prst="rect">
             <a:avLst/>
@@ -14187,7 +14472,7 @@
           <a:p>
             <a:pPr algn="l">
               <a:lnSpc>
-                <a:spcPct val="112500"/>
+                <a:spcPct val="116700"/>
               </a:lnSpc>
               <a:spcAft>
                 <a:spcPts val="0"/>
@@ -14195,250 +14480,13 @@
               <a:buNone/>
             </a:pPr>
             <a:r>
-              <a:rPr sz="1400" b="1" i="0">
-                <a:solidFill>
-                  <a:srgbClr val="10141A"/>
-                </a:solidFill>
-                <a:latin typeface="Arial"/>
-              </a:rPr>
-              <a:t>Chauhan AS, Prinja S, Srinivasan R, et al.</a:t>
-            </a:r>
-            <a:r>
-              <a:rPr sz="1400" b="0" i="0">
+              <a:rPr sz="2200" b="0" i="0">
                 <a:solidFill>
                   <a:srgbClr val="47525F"/>
                 </a:solidFill>
                 <a:latin typeface="Arial"/>
               </a:rPr>
-              <a:t> Cost effectiveness of strategies for cervical cancer prevention in India. </a:t>
-            </a:r>
-            <a:r>
-              <a:rPr sz="1400" b="0" i="1">
-                <a:solidFill>
-                  <a:srgbClr val="47525F"/>
-                </a:solidFill>
-                <a:latin typeface="Arial"/>
-              </a:rPr>
-              <a:t>PLoS One</a:t>
-            </a:r>
-            <a:r>
-              <a:rPr sz="1400" b="0" i="0">
-                <a:solidFill>
-                  <a:srgbClr val="47525F"/>
-                </a:solidFill>
-                <a:latin typeface="Arial"/>
-              </a:rPr>
-              <a:t> 2020;15(9):e0238291. PMID 32870941</a:t>
-            </a:r>
-          </a:p>
-        </p:txBody>
-      </p:sp>
-      <p:sp>
-        <p:nvSpPr>
-          <p:cNvPr id="10" name="TextBox 9"/>
-          <p:cNvSpPr txBox="1"/>
-          <p:nvPr/>
-        </p:nvSpPr>
-        <p:spPr>
-          <a:xfrm>
-            <a:off x="1111002" y="4551405"/>
-            <a:ext cx="10528548" cy="479524"/>
-          </a:xfrm>
-          <a:prstGeom prst="rect">
-            <a:avLst/>
-          </a:prstGeom>
-          <a:noFill/>
-        </p:spPr>
-        <p:txBody>
-          <a:bodyPr wrap="square" lIns="0" rIns="0" tIns="0" bIns="0">
-            <a:spAutoFit/>
-          </a:bodyPr>
-          <a:lstStyle/>
-          <a:p>
-            <a:pPr algn="l">
-              <a:lnSpc>
-                <a:spcPct val="112500"/>
-              </a:lnSpc>
-              <a:spcAft>
-                <a:spcPts val="0"/>
-              </a:spcAft>
-              <a:buNone/>
-            </a:pPr>
-            <a:r>
-              <a:rPr sz="1400" b="1" i="0">
-                <a:solidFill>
-                  <a:srgbClr val="10141A"/>
-                </a:solidFill>
-                <a:latin typeface="Arial"/>
-              </a:rPr>
-              <a:t>Minakaran N, Morjaria P, Frick KD, Gilbert C.</a:t>
-            </a:r>
-            <a:r>
-              <a:rPr sz="1400" b="0" i="0">
-                <a:solidFill>
-                  <a:srgbClr val="47525F"/>
-                </a:solidFill>
-                <a:latin typeface="Arial"/>
-              </a:rPr>
-              <a:t> Cost-minimisation analysis from a non-inferiority trial of ready-made versus custom-made spectacles for school children in India. </a:t>
-            </a:r>
-            <a:r>
-              <a:rPr sz="1400" b="0" i="1">
-                <a:solidFill>
-                  <a:srgbClr val="47525F"/>
-                </a:solidFill>
-                <a:latin typeface="Arial"/>
-              </a:rPr>
-              <a:t>Ophthalmic Epidemiol</a:t>
-            </a:r>
-            <a:r>
-              <a:rPr sz="1400" b="0" i="0">
-                <a:solidFill>
-                  <a:srgbClr val="47525F"/>
-                </a:solidFill>
-                <a:latin typeface="Arial"/>
-              </a:rPr>
-              <a:t> 2021;28(5):383–91. PMID 33256485</a:t>
-            </a:r>
-          </a:p>
-        </p:txBody>
-      </p:sp>
-      <p:sp>
-        <p:nvSpPr>
-          <p:cNvPr id="11" name="TextBox 10"/>
-          <p:cNvSpPr txBox="1"/>
-          <p:nvPr/>
-        </p:nvSpPr>
-        <p:spPr>
-          <a:xfrm>
-            <a:off x="1111002" y="5119630"/>
-            <a:ext cx="10528548" cy="479524"/>
-          </a:xfrm>
-          <a:prstGeom prst="rect">
-            <a:avLst/>
-          </a:prstGeom>
-          <a:noFill/>
-        </p:spPr>
-        <p:txBody>
-          <a:bodyPr wrap="square" lIns="0" rIns="0" tIns="0" bIns="0">
-            <a:spAutoFit/>
-          </a:bodyPr>
-          <a:lstStyle/>
-          <a:p>
-            <a:pPr algn="l">
-              <a:lnSpc>
-                <a:spcPct val="112500"/>
-              </a:lnSpc>
-              <a:spcAft>
-                <a:spcPts val="0"/>
-              </a:spcAft>
-              <a:buNone/>
-            </a:pPr>
-            <a:r>
-              <a:rPr sz="1400" b="1" i="0">
-                <a:solidFill>
-                  <a:srgbClr val="10141A"/>
-                </a:solidFill>
-                <a:latin typeface="Arial"/>
-              </a:rPr>
-              <a:t>Esposito DH, Tate JE, Kang G, Parashar UD.</a:t>
-            </a:r>
-            <a:r>
-              <a:rPr sz="1400" b="0" i="0">
-                <a:solidFill>
-                  <a:srgbClr val="47525F"/>
-                </a:solidFill>
-                <a:latin typeface="Arial"/>
-              </a:rPr>
-              <a:t> Projected impact and cost-effectiveness of a rotavirus vaccination program in India, 2008. </a:t>
-            </a:r>
-            <a:r>
-              <a:rPr sz="1400" b="0" i="1">
-                <a:solidFill>
-                  <a:srgbClr val="47525F"/>
-                </a:solidFill>
-                <a:latin typeface="Arial"/>
-              </a:rPr>
-              <a:t>Clin Infect Dis</a:t>
-            </a:r>
-            <a:r>
-              <a:rPr sz="1400" b="0" i="0">
-                <a:solidFill>
-                  <a:srgbClr val="47525F"/>
-                </a:solidFill>
-                <a:latin typeface="Arial"/>
-              </a:rPr>
-              <a:t> 2011;52(2):171–7. PMID 21288839</a:t>
-            </a:r>
-          </a:p>
-        </p:txBody>
-      </p:sp>
-      <p:sp>
-        <p:nvSpPr>
-          <p:cNvPr id="12" name="TextBox 11"/>
-          <p:cNvSpPr txBox="1"/>
-          <p:nvPr/>
-        </p:nvSpPr>
-        <p:spPr>
-          <a:xfrm>
-            <a:off x="1111002" y="5687856"/>
-            <a:ext cx="10528548" cy="479524"/>
-          </a:xfrm>
-          <a:prstGeom prst="rect">
-            <a:avLst/>
-          </a:prstGeom>
-          <a:noFill/>
-        </p:spPr>
-        <p:txBody>
-          <a:bodyPr wrap="square" lIns="0" rIns="0" tIns="0" bIns="0">
-            <a:spAutoFit/>
-          </a:bodyPr>
-          <a:lstStyle/>
-          <a:p>
-            <a:pPr algn="l">
-              <a:lnSpc>
-                <a:spcPct val="112500"/>
-              </a:lnSpc>
-              <a:spcAft>
-                <a:spcPts val="0"/>
-              </a:spcAft>
-              <a:buNone/>
-            </a:pPr>
-            <a:r>
-              <a:rPr sz="1400" b="1" i="0">
-                <a:solidFill>
-                  <a:srgbClr val="10141A"/>
-                </a:solidFill>
-                <a:latin typeface="Arial"/>
-              </a:rPr>
-              <a:t>Prinja S, Chauhan AS, Angell B, et al.</a:t>
-            </a:r>
-            <a:r>
-              <a:rPr sz="1400" b="0" i="0">
-                <a:solidFill>
-                  <a:srgbClr val="47525F"/>
-                </a:solidFill>
-                <a:latin typeface="Arial"/>
-              </a:rPr>
-              <a:t> A systematic review of the state of economic evaluation for health care in India. </a:t>
-            </a:r>
-            <a:r>
-              <a:rPr sz="1400" b="0" i="1">
-                <a:solidFill>
-                  <a:srgbClr val="47525F"/>
-                </a:solidFill>
-                <a:latin typeface="Arial"/>
-              </a:rPr>
-              <a:t>Appl Health Econ Health Policy</a:t>
-            </a:r>
-            <a:r>
-              <a:rPr sz="1400" b="0" i="0">
-                <a:solidFill>
-                  <a:srgbClr val="47525F"/>
-                </a:solidFill>
-                <a:latin typeface="Arial"/>
-              </a:rPr>
-              <a:t> 2015;13(6):595–613. PMID 26449485</a:t>
+              <a:t>Hold it until after lunch. First, was that the right question?</a:t>
             </a:r>
           </a:p>
         </p:txBody>
@@ -14463,6 +14511,723 @@
       <p:grpSpPr/>
       <p:sp>
         <p:nvSpPr>
+          <p:cNvPr id="2" name="Rectangle 1"/>
+          <p:cNvSpPr/>
+          <p:nvPr/>
+        </p:nvSpPr>
+        <p:spPr>
+          <a:xfrm>
+            <a:off x="0" y="0"/>
+            <a:ext cx="12192000" cy="876300"/>
+          </a:xfrm>
+          <a:prstGeom prst="rect">
+            <a:avLst/>
+          </a:prstGeom>
+          <a:solidFill>
+            <a:srgbClr val="162A6C"/>
+          </a:solidFill>
+          <a:ln>
+            <a:noFill/>
+          </a:ln>
+          <a:effectLst/>
+        </p:spPr>
+        <p:style>
+          <a:lnRef idx="1">
+            <a:schemeClr val="accent1"/>
+          </a:lnRef>
+          <a:fillRef idx="3">
+            <a:schemeClr val="accent1"/>
+          </a:fillRef>
+          <a:effectRef idx="2">
+            <a:schemeClr val="accent1"/>
+          </a:effectRef>
+          <a:fontRef idx="minor">
+            <a:schemeClr val="lt1"/>
+          </a:fontRef>
+        </p:style>
+        <p:txBody>
+          <a:bodyPr rtlCol="0" anchor="ctr"/>
+          <a:lstStyle/>
+          <a:p>
+            <a:pPr algn="ctr"/>
+          </a:p>
+        </p:txBody>
+      </p:sp>
+      <p:sp>
+        <p:nvSpPr>
+          <p:cNvPr id="3" name="TextBox 2"/>
+          <p:cNvSpPr txBox="1"/>
+          <p:nvPr/>
+        </p:nvSpPr>
+        <p:spPr>
+          <a:xfrm>
+            <a:off x="552450" y="0"/>
+            <a:ext cx="11087100" cy="876300"/>
+          </a:xfrm>
+          <a:prstGeom prst="rect">
+            <a:avLst/>
+          </a:prstGeom>
+          <a:noFill/>
+        </p:spPr>
+        <p:txBody>
+          <a:bodyPr wrap="square" lIns="0" rIns="0" tIns="0" bIns="0" anchor="ctr">
+            <a:spAutoFit/>
+          </a:bodyPr>
+          <a:lstStyle/>
+          <a:p>
+            <a:pPr algn="l">
+              <a:lnSpc>
+                <a:spcPct val="93300"/>
+              </a:lnSpc>
+              <a:spcAft>
+                <a:spcPts val="0"/>
+              </a:spcAft>
+              <a:buNone/>
+            </a:pPr>
+            <a:r>
+              <a:rPr sz="3000" b="1" i="0" spc="-15">
+                <a:solidFill>
+                  <a:srgbClr val="FFFFFF"/>
+                </a:solidFill>
+                <a:latin typeface="Arial"/>
+              </a:rPr>
+              <a:t>Sources</a:t>
+            </a:r>
+          </a:p>
+        </p:txBody>
+      </p:sp>
+      <p:sp>
+        <p:nvSpPr>
+          <p:cNvPr id="4" name="TextBox 3"/>
+          <p:cNvSpPr txBox="1"/>
+          <p:nvPr/>
+        </p:nvSpPr>
+        <p:spPr>
+          <a:xfrm>
+            <a:off x="1111002" y="1142050"/>
+            <a:ext cx="10528548" cy="479524"/>
+          </a:xfrm>
+          <a:prstGeom prst="rect">
+            <a:avLst/>
+          </a:prstGeom>
+          <a:noFill/>
+        </p:spPr>
+        <p:txBody>
+          <a:bodyPr wrap="square" lIns="0" rIns="0" tIns="0" bIns="0">
+            <a:spAutoFit/>
+          </a:bodyPr>
+          <a:lstStyle/>
+          <a:p>
+            <a:pPr algn="l">
+              <a:lnSpc>
+                <a:spcPct val="112500"/>
+              </a:lnSpc>
+              <a:spcAft>
+                <a:spcPts val="0"/>
+              </a:spcAft>
+              <a:buNone/>
+            </a:pPr>
+            <a:r>
+              <a:rPr sz="1400" b="1" i="0">
+                <a:solidFill>
+                  <a:srgbClr val="10141A"/>
+                </a:solidFill>
+                <a:latin typeface="Arial"/>
+              </a:rPr>
+              <a:t>Drummond MF, Sculpher MJ, Claxton K, Stoddart GL, Torrance GW.</a:t>
+            </a:r>
+            <a:r>
+              <a:rPr sz="1400" b="0" i="0">
+                <a:solidFill>
+                  <a:srgbClr val="47525F"/>
+                </a:solidFill>
+                <a:latin typeface="Arial"/>
+              </a:rPr>
+              <a:t> Methods for the Economic Evaluation of Health Care Programmes. 4th ed. Oxford University Press; 2015. </a:t>
+            </a:r>
+            <a:r>
+              <a:rPr sz="1400" b="1" i="0">
+                <a:solidFill>
+                  <a:srgbClr val="10141A"/>
+                </a:solidFill>
+                <a:latin typeface="Arial"/>
+              </a:rPr>
+              <a:t>Chapter 1</a:t>
+            </a:r>
+            <a:r>
+              <a:rPr sz="1400" b="0" i="0">
+                <a:solidFill>
+                  <a:srgbClr val="47525F"/>
+                </a:solidFill>
+                <a:latin typeface="Arial"/>
+              </a:rPr>
+              <a:t>, pp. 1–19.</a:t>
+            </a:r>
+          </a:p>
+        </p:txBody>
+      </p:sp>
+      <p:sp>
+        <p:nvSpPr>
+          <p:cNvPr id="5" name="TextBox 4"/>
+          <p:cNvSpPr txBox="1"/>
+          <p:nvPr/>
+        </p:nvSpPr>
+        <p:spPr>
+          <a:xfrm>
+            <a:off x="1111002" y="1710276"/>
+            <a:ext cx="10528548" cy="479524"/>
+          </a:xfrm>
+          <a:prstGeom prst="rect">
+            <a:avLst/>
+          </a:prstGeom>
+          <a:noFill/>
+        </p:spPr>
+        <p:txBody>
+          <a:bodyPr wrap="square" lIns="0" rIns="0" tIns="0" bIns="0">
+            <a:spAutoFit/>
+          </a:bodyPr>
+          <a:lstStyle/>
+          <a:p>
+            <a:pPr algn="l">
+              <a:lnSpc>
+                <a:spcPct val="112500"/>
+              </a:lnSpc>
+              <a:spcAft>
+                <a:spcPts val="0"/>
+              </a:spcAft>
+              <a:buNone/>
+            </a:pPr>
+            <a:r>
+              <a:rPr sz="1400" b="1" i="0">
+                <a:solidFill>
+                  <a:srgbClr val="10141A"/>
+                </a:solidFill>
+                <a:latin typeface="Arial"/>
+              </a:rPr>
+              <a:t>Press Information Bureau, Government of India.</a:t>
+            </a:r>
+            <a:r>
+              <a:rPr sz="1400" b="0" i="0">
+                <a:solidFill>
+                  <a:srgbClr val="47525F"/>
+                </a:solidFill>
+                <a:latin typeface="Arial"/>
+              </a:rPr>
+              <a:t> Cervical Cancer Vaccination Campaign launched. 28 February 2026. Burden figures from GLOBOCAN 2022.</a:t>
+            </a:r>
+          </a:p>
+        </p:txBody>
+      </p:sp>
+      <p:sp>
+        <p:nvSpPr>
+          <p:cNvPr id="6" name="TextBox 5"/>
+          <p:cNvSpPr txBox="1"/>
+          <p:nvPr/>
+        </p:nvSpPr>
+        <p:spPr>
+          <a:xfrm>
+            <a:off x="1111002" y="2278502"/>
+            <a:ext cx="10528548" cy="479524"/>
+          </a:xfrm>
+          <a:prstGeom prst="rect">
+            <a:avLst/>
+          </a:prstGeom>
+          <a:noFill/>
+        </p:spPr>
+        <p:txBody>
+          <a:bodyPr wrap="square" lIns="0" rIns="0" tIns="0" bIns="0">
+            <a:spAutoFit/>
+          </a:bodyPr>
+          <a:lstStyle/>
+          <a:p>
+            <a:pPr algn="l">
+              <a:lnSpc>
+                <a:spcPct val="112500"/>
+              </a:lnSpc>
+              <a:spcAft>
+                <a:spcPts val="0"/>
+              </a:spcAft>
+              <a:buNone/>
+            </a:pPr>
+            <a:r>
+              <a:rPr sz="1400" b="1" i="0">
+                <a:solidFill>
+                  <a:srgbClr val="10141A"/>
+                </a:solidFill>
+                <a:latin typeface="Arial"/>
+              </a:rPr>
+              <a:t>Ramamoorthy T, Kulothungan V, Sathishkumar K, et al.</a:t>
+            </a:r>
+            <a:r>
+              <a:rPr sz="1400" b="0" i="0">
+                <a:solidFill>
+                  <a:srgbClr val="47525F"/>
+                </a:solidFill>
+                <a:latin typeface="Arial"/>
+              </a:rPr>
+              <a:t> Burden of cervical cancer in India: YLL, YLD and DALYs at national and subnational levels. </a:t>
+            </a:r>
+            <a:r>
+              <a:rPr sz="1400" b="0" i="1">
+                <a:solidFill>
+                  <a:srgbClr val="47525F"/>
+                </a:solidFill>
+                <a:latin typeface="Arial"/>
+              </a:rPr>
+              <a:t>Reprod Health</a:t>
+            </a:r>
+            <a:r>
+              <a:rPr sz="1400" b="0" i="0">
+                <a:solidFill>
+                  <a:srgbClr val="47525F"/>
+                </a:solidFill>
+                <a:latin typeface="Arial"/>
+              </a:rPr>
+              <a:t> 2024;21:111. PMID 39075548</a:t>
+            </a:r>
+          </a:p>
+        </p:txBody>
+      </p:sp>
+      <p:sp>
+        <p:nvSpPr>
+          <p:cNvPr id="7" name="TextBox 6"/>
+          <p:cNvSpPr txBox="1"/>
+          <p:nvPr/>
+        </p:nvSpPr>
+        <p:spPr>
+          <a:xfrm>
+            <a:off x="1111002" y="2846727"/>
+            <a:ext cx="10528548" cy="479524"/>
+          </a:xfrm>
+          <a:prstGeom prst="rect">
+            <a:avLst/>
+          </a:prstGeom>
+          <a:noFill/>
+        </p:spPr>
+        <p:txBody>
+          <a:bodyPr wrap="square" lIns="0" rIns="0" tIns="0" bIns="0">
+            <a:spAutoFit/>
+          </a:bodyPr>
+          <a:lstStyle/>
+          <a:p>
+            <a:pPr algn="l">
+              <a:lnSpc>
+                <a:spcPct val="112500"/>
+              </a:lnSpc>
+              <a:spcAft>
+                <a:spcPts val="0"/>
+              </a:spcAft>
+              <a:buNone/>
+            </a:pPr>
+            <a:r>
+              <a:rPr sz="1400" b="1" i="0">
+                <a:solidFill>
+                  <a:srgbClr val="10141A"/>
+                </a:solidFill>
+                <a:latin typeface="Arial"/>
+              </a:rPr>
+              <a:t>Singh MP, Chauhan AS, Rai B, et al.</a:t>
+            </a:r>
+            <a:r>
+              <a:rPr sz="1400" b="0" i="0">
+                <a:solidFill>
+                  <a:srgbClr val="47525F"/>
+                </a:solidFill>
+                <a:latin typeface="Arial"/>
+              </a:rPr>
+              <a:t> Cost of treatment for cervical cancer in India. </a:t>
+            </a:r>
+            <a:r>
+              <a:rPr sz="1400" b="0" i="1">
+                <a:solidFill>
+                  <a:srgbClr val="47525F"/>
+                </a:solidFill>
+                <a:latin typeface="Arial"/>
+              </a:rPr>
+              <a:t>Asian Pac J Cancer Prev</a:t>
+            </a:r>
+            <a:r>
+              <a:rPr sz="1400" b="0" i="0">
+                <a:solidFill>
+                  <a:srgbClr val="47525F"/>
+                </a:solidFill>
+                <a:latin typeface="Arial"/>
+              </a:rPr>
+              <a:t> 2020;21(9):2639–46. PMID 32986363</a:t>
+            </a:r>
+          </a:p>
+        </p:txBody>
+      </p:sp>
+      <p:sp>
+        <p:nvSpPr>
+          <p:cNvPr id="8" name="TextBox 7"/>
+          <p:cNvSpPr txBox="1"/>
+          <p:nvPr/>
+        </p:nvSpPr>
+        <p:spPr>
+          <a:xfrm>
+            <a:off x="1111002" y="3414953"/>
+            <a:ext cx="10528548" cy="479524"/>
+          </a:xfrm>
+          <a:prstGeom prst="rect">
+            <a:avLst/>
+          </a:prstGeom>
+          <a:noFill/>
+        </p:spPr>
+        <p:txBody>
+          <a:bodyPr wrap="square" lIns="0" rIns="0" tIns="0" bIns="0">
+            <a:spAutoFit/>
+          </a:bodyPr>
+          <a:lstStyle/>
+          <a:p>
+            <a:pPr algn="l">
+              <a:lnSpc>
+                <a:spcPct val="112500"/>
+              </a:lnSpc>
+              <a:spcAft>
+                <a:spcPts val="0"/>
+              </a:spcAft>
+              <a:buNone/>
+            </a:pPr>
+            <a:r>
+              <a:rPr sz="1400" b="1" i="0">
+                <a:solidFill>
+                  <a:srgbClr val="10141A"/>
+                </a:solidFill>
+                <a:latin typeface="Arial"/>
+              </a:rPr>
+              <a:t>Sankaranarayanan R, Nene BM, Shastri SS, et al.</a:t>
+            </a:r>
+            <a:r>
+              <a:rPr sz="1400" b="0" i="0">
+                <a:solidFill>
+                  <a:srgbClr val="47525F"/>
+                </a:solidFill>
+                <a:latin typeface="Arial"/>
+              </a:rPr>
+              <a:t> HPV screening for cervical cancer in rural India. </a:t>
+            </a:r>
+            <a:r>
+              <a:rPr sz="1400" b="0" i="1">
+                <a:solidFill>
+                  <a:srgbClr val="47525F"/>
+                </a:solidFill>
+                <a:latin typeface="Arial"/>
+              </a:rPr>
+              <a:t>N Engl J Med</a:t>
+            </a:r>
+            <a:r>
+              <a:rPr sz="1400" b="0" i="0">
+                <a:solidFill>
+                  <a:srgbClr val="47525F"/>
+                </a:solidFill>
+                <a:latin typeface="Arial"/>
+              </a:rPr>
+              <a:t> 2009;360:1385–94. PMID 19339719</a:t>
+            </a:r>
+          </a:p>
+        </p:txBody>
+      </p:sp>
+      <p:sp>
+        <p:nvSpPr>
+          <p:cNvPr id="9" name="TextBox 8"/>
+          <p:cNvSpPr txBox="1"/>
+          <p:nvPr/>
+        </p:nvSpPr>
+        <p:spPr>
+          <a:xfrm>
+            <a:off x="1111002" y="3983179"/>
+            <a:ext cx="10528548" cy="479524"/>
+          </a:xfrm>
+          <a:prstGeom prst="rect">
+            <a:avLst/>
+          </a:prstGeom>
+          <a:noFill/>
+        </p:spPr>
+        <p:txBody>
+          <a:bodyPr wrap="square" lIns="0" rIns="0" tIns="0" bIns="0">
+            <a:spAutoFit/>
+          </a:bodyPr>
+          <a:lstStyle/>
+          <a:p>
+            <a:pPr algn="l">
+              <a:lnSpc>
+                <a:spcPct val="112500"/>
+              </a:lnSpc>
+              <a:spcAft>
+                <a:spcPts val="0"/>
+              </a:spcAft>
+              <a:buNone/>
+            </a:pPr>
+            <a:r>
+              <a:rPr sz="1400" b="1" i="0">
+                <a:solidFill>
+                  <a:srgbClr val="10141A"/>
+                </a:solidFill>
+                <a:latin typeface="Arial"/>
+              </a:rPr>
+              <a:t>Chauhan AS, Prinja S, Srinivasan R, et al.</a:t>
+            </a:r>
+            <a:r>
+              <a:rPr sz="1400" b="0" i="0">
+                <a:solidFill>
+                  <a:srgbClr val="47525F"/>
+                </a:solidFill>
+                <a:latin typeface="Arial"/>
+              </a:rPr>
+              <a:t> Cost effectiveness of strategies for cervical cancer prevention in India. </a:t>
+            </a:r>
+            <a:r>
+              <a:rPr sz="1400" b="0" i="1">
+                <a:solidFill>
+                  <a:srgbClr val="47525F"/>
+                </a:solidFill>
+                <a:latin typeface="Arial"/>
+              </a:rPr>
+              <a:t>PLoS One</a:t>
+            </a:r>
+            <a:r>
+              <a:rPr sz="1400" b="0" i="0">
+                <a:solidFill>
+                  <a:srgbClr val="47525F"/>
+                </a:solidFill>
+                <a:latin typeface="Arial"/>
+              </a:rPr>
+              <a:t> 2020;15(9):e0238291. PMID 32870941</a:t>
+            </a:r>
+          </a:p>
+        </p:txBody>
+      </p:sp>
+      <p:sp>
+        <p:nvSpPr>
+          <p:cNvPr id="10" name="TextBox 9"/>
+          <p:cNvSpPr txBox="1"/>
+          <p:nvPr/>
+        </p:nvSpPr>
+        <p:spPr>
+          <a:xfrm>
+            <a:off x="1111002" y="4551405"/>
+            <a:ext cx="10528548" cy="479524"/>
+          </a:xfrm>
+          <a:prstGeom prst="rect">
+            <a:avLst/>
+          </a:prstGeom>
+          <a:noFill/>
+        </p:spPr>
+        <p:txBody>
+          <a:bodyPr wrap="square" lIns="0" rIns="0" tIns="0" bIns="0">
+            <a:spAutoFit/>
+          </a:bodyPr>
+          <a:lstStyle/>
+          <a:p>
+            <a:pPr algn="l">
+              <a:lnSpc>
+                <a:spcPct val="112500"/>
+              </a:lnSpc>
+              <a:spcAft>
+                <a:spcPts val="0"/>
+              </a:spcAft>
+              <a:buNone/>
+            </a:pPr>
+            <a:r>
+              <a:rPr sz="1400" b="1" i="0">
+                <a:solidFill>
+                  <a:srgbClr val="10141A"/>
+                </a:solidFill>
+                <a:latin typeface="Arial"/>
+              </a:rPr>
+              <a:t>Minakaran N, Morjaria P, Frick KD, Gilbert C.</a:t>
+            </a:r>
+            <a:r>
+              <a:rPr sz="1400" b="0" i="0">
+                <a:solidFill>
+                  <a:srgbClr val="47525F"/>
+                </a:solidFill>
+                <a:latin typeface="Arial"/>
+              </a:rPr>
+              <a:t> Cost-minimisation analysis from a non-inferiority trial of ready-made versus custom-made spectacles for school children in India. </a:t>
+            </a:r>
+            <a:r>
+              <a:rPr sz="1400" b="0" i="1">
+                <a:solidFill>
+                  <a:srgbClr val="47525F"/>
+                </a:solidFill>
+                <a:latin typeface="Arial"/>
+              </a:rPr>
+              <a:t>Ophthalmic Epidemiol</a:t>
+            </a:r>
+            <a:r>
+              <a:rPr sz="1400" b="0" i="0">
+                <a:solidFill>
+                  <a:srgbClr val="47525F"/>
+                </a:solidFill>
+                <a:latin typeface="Arial"/>
+              </a:rPr>
+              <a:t> 2021;28(5):383–91. PMID 33256485</a:t>
+            </a:r>
+          </a:p>
+        </p:txBody>
+      </p:sp>
+      <p:sp>
+        <p:nvSpPr>
+          <p:cNvPr id="11" name="TextBox 10"/>
+          <p:cNvSpPr txBox="1"/>
+          <p:nvPr/>
+        </p:nvSpPr>
+        <p:spPr>
+          <a:xfrm>
+            <a:off x="1111002" y="5119630"/>
+            <a:ext cx="10528548" cy="479524"/>
+          </a:xfrm>
+          <a:prstGeom prst="rect">
+            <a:avLst/>
+          </a:prstGeom>
+          <a:noFill/>
+        </p:spPr>
+        <p:txBody>
+          <a:bodyPr wrap="square" lIns="0" rIns="0" tIns="0" bIns="0">
+            <a:spAutoFit/>
+          </a:bodyPr>
+          <a:lstStyle/>
+          <a:p>
+            <a:pPr algn="l">
+              <a:lnSpc>
+                <a:spcPct val="112500"/>
+              </a:lnSpc>
+              <a:spcAft>
+                <a:spcPts val="0"/>
+              </a:spcAft>
+              <a:buNone/>
+            </a:pPr>
+            <a:r>
+              <a:rPr sz="1400" b="1" i="0">
+                <a:solidFill>
+                  <a:srgbClr val="10141A"/>
+                </a:solidFill>
+                <a:latin typeface="Arial"/>
+              </a:rPr>
+              <a:t>Esposito DH, Tate JE, Kang G, Parashar UD.</a:t>
+            </a:r>
+            <a:r>
+              <a:rPr sz="1400" b="0" i="0">
+                <a:solidFill>
+                  <a:srgbClr val="47525F"/>
+                </a:solidFill>
+                <a:latin typeface="Arial"/>
+              </a:rPr>
+              <a:t> Projected impact and cost-effectiveness of a rotavirus vaccination program in India, 2008. </a:t>
+            </a:r>
+            <a:r>
+              <a:rPr sz="1400" b="0" i="1">
+                <a:solidFill>
+                  <a:srgbClr val="47525F"/>
+                </a:solidFill>
+                <a:latin typeface="Arial"/>
+              </a:rPr>
+              <a:t>Clin Infect Dis</a:t>
+            </a:r>
+            <a:r>
+              <a:rPr sz="1400" b="0" i="0">
+                <a:solidFill>
+                  <a:srgbClr val="47525F"/>
+                </a:solidFill>
+                <a:latin typeface="Arial"/>
+              </a:rPr>
+              <a:t> 2011;52(2):171–7. PMID 21288839</a:t>
+            </a:r>
+          </a:p>
+        </p:txBody>
+      </p:sp>
+      <p:sp>
+        <p:nvSpPr>
+          <p:cNvPr id="12" name="TextBox 11"/>
+          <p:cNvSpPr txBox="1"/>
+          <p:nvPr/>
+        </p:nvSpPr>
+        <p:spPr>
+          <a:xfrm>
+            <a:off x="1111002" y="5687856"/>
+            <a:ext cx="10528548" cy="479524"/>
+          </a:xfrm>
+          <a:prstGeom prst="rect">
+            <a:avLst/>
+          </a:prstGeom>
+          <a:noFill/>
+        </p:spPr>
+        <p:txBody>
+          <a:bodyPr wrap="square" lIns="0" rIns="0" tIns="0" bIns="0">
+            <a:spAutoFit/>
+          </a:bodyPr>
+          <a:lstStyle/>
+          <a:p>
+            <a:pPr algn="l">
+              <a:lnSpc>
+                <a:spcPct val="112500"/>
+              </a:lnSpc>
+              <a:spcAft>
+                <a:spcPts val="0"/>
+              </a:spcAft>
+              <a:buNone/>
+            </a:pPr>
+            <a:r>
+              <a:rPr sz="1400" b="1" i="0">
+                <a:solidFill>
+                  <a:srgbClr val="10141A"/>
+                </a:solidFill>
+                <a:latin typeface="Arial"/>
+              </a:rPr>
+              <a:t>Prinja S, Chauhan AS, Angell B, et al.</a:t>
+            </a:r>
+            <a:r>
+              <a:rPr sz="1400" b="0" i="0">
+                <a:solidFill>
+                  <a:srgbClr val="47525F"/>
+                </a:solidFill>
+                <a:latin typeface="Arial"/>
+              </a:rPr>
+              <a:t> A systematic review of the state of economic evaluation for health care in India. </a:t>
+            </a:r>
+            <a:r>
+              <a:rPr sz="1400" b="0" i="1">
+                <a:solidFill>
+                  <a:srgbClr val="47525F"/>
+                </a:solidFill>
+                <a:latin typeface="Arial"/>
+              </a:rPr>
+              <a:t>Appl Health Econ Health Policy</a:t>
+            </a:r>
+            <a:r>
+              <a:rPr sz="1400" b="0" i="0">
+                <a:solidFill>
+                  <a:srgbClr val="47525F"/>
+                </a:solidFill>
+                <a:latin typeface="Arial"/>
+              </a:rPr>
+              <a:t> 2015;13(6):595–613. PMID 26449485</a:t>
+            </a:r>
+          </a:p>
+        </p:txBody>
+      </p:sp>
+    </p:spTree>
+  </p:cSld>
+  <p:clrMapOvr>
+    <a:masterClrMapping/>
+  </p:clrMapOvr>
+</p:sld>
+</file>
+
+<file path=ppt/slides/slide27.xml><?xml version="1.0" encoding="utf-8"?>
+<p:sld xmlns:a="http://schemas.openxmlformats.org/drawingml/2006/main" xmlns:p="http://schemas.openxmlformats.org/presentationml/2006/main" xmlns:r="http://schemas.openxmlformats.org/officeDocument/2006/relationships">
+  <p:cSld>
+    <p:spTree>
+      <p:nvGrpSpPr>
+        <p:cNvPr id="1" name=""/>
+        <p:cNvGrpSpPr/>
+        <p:nvPr/>
+      </p:nvGrpSpPr>
+      <p:grpSpPr/>
+      <p:sp>
+        <p:nvSpPr>
           <p:cNvPr id="2" name="TextBox 1"/>
           <p:cNvSpPr txBox="1"/>
           <p:nvPr/>
@@ -14499,7 +15264,7 @@
                 </a:solidFill>
                 <a:latin typeface="Arial"/>
               </a:rPr>
-              <a:t>FACULTY WORKSHOP · SESSION 3 · DRUMMOND 4TH ED., CHAPTER 2</a:t>
+              <a:t>FACULTY WORKSHOP · SESSION 3 · DRUMMOND 4TH ED., CHAPTER 4</a:t>
             </a:r>
           </a:p>
         </p:txBody>
@@ -14542,7 +15307,7 @@
                 </a:solidFill>
                 <a:latin typeface="Arial"/>
               </a:rPr>
-              <a:t>Making decisions</a:t>
+              <a:t>Framing</a:t>
             </a:r>
           </a:p>
           <a:p>
@@ -14562,7 +15327,7 @@
                 </a:solidFill>
                 <a:latin typeface="Arial"/>
               </a:rPr>
-              <a:t>in health care</a:t>
+              <a:t>the question</a:t>
             </a:r>
           </a:p>
         </p:txBody>
@@ -14576,7 +15341,7 @@
         <p:spPr>
           <a:xfrm>
             <a:off x="914400" y="2207808"/>
-            <a:ext cx="10363200" cy="1028105"/>
+            <a:ext cx="10363200" cy="1542157"/>
           </a:xfrm>
           <a:prstGeom prst="rect">
             <a:avLst/>
@@ -14605,7 +15370,50 @@
                 </a:solidFill>
                 <a:latin typeface="Arial"/>
               </a:rPr>
-              <a:t>Budgets, thresholds, and who actually decides. NICE, HTAIn, and the number that turns an ICER into a policy.</a:t>
+              <a:t>The decision problem, the comparator, the perspective, the time horizon. Four choices made before any arithmetic, and each one can decide the answer.</a:t>
+            </a:r>
+          </a:p>
+        </p:txBody>
+      </p:sp>
+      <p:sp>
+        <p:nvSpPr>
+          <p:cNvPr id="5" name="TextBox 4"/>
+          <p:cNvSpPr txBox="1"/>
+          <p:nvPr/>
+        </p:nvSpPr>
+        <p:spPr>
+          <a:xfrm>
+            <a:off x="914400" y="4029167"/>
+            <a:ext cx="10363200" cy="781645"/>
+          </a:xfrm>
+          <a:prstGeom prst="rect">
+            <a:avLst/>
+          </a:prstGeom>
+          <a:noFill/>
+        </p:spPr>
+        <p:txBody>
+          <a:bodyPr wrap="square" lIns="0" rIns="0" tIns="0" bIns="0">
+            <a:spAutoFit/>
+          </a:bodyPr>
+          <a:lstStyle/>
+          <a:p>
+            <a:pPr algn="l">
+              <a:lnSpc>
+                <a:spcPct val="116700"/>
+              </a:lnSpc>
+              <a:spcAft>
+                <a:spcPts val="0"/>
+              </a:spcAft>
+              <a:buNone/>
+            </a:pPr>
+            <a:r>
+              <a:rPr sz="2200" b="0" i="0">
+                <a:solidFill>
+                  <a:srgbClr val="75808D"/>
+                </a:solidFill>
+                <a:latin typeface="Arial"/>
+              </a:rPr>
+              <a:t>Before the next session: skim the methods of your group's paper and note its perspective, time horizon and discount rate.</a:t>
             </a:r>
           </a:p>
         </p:txBody>

--- a/slides/block1.pptx
+++ b/slides/block1.pptx
@@ -32,6 +32,7 @@
     <p:sldId id="280" r:id="rId32"/>
     <p:sldId id="281" r:id="rId33"/>
     <p:sldId id="282" r:id="rId34"/>
+    <p:sldId id="283" r:id="rId35"/>
   </p:sldIdLst>
   <p:sldSz cx="12192000" cy="6858000" type="screen4x3"/>
   <p:notesSz cx="6858000" cy="9144000"/>
@@ -1438,7 +1439,7 @@
           <a:lstStyle/>
           <a:p>
             <a:r>
-              <a:t>This slide exists because they will otherwise conflate the two for the rest of their careers. Concretely: Arora 2024 reports cost per DALY averted, Chauhan 2020 reports cost per QALY gained. Same disease, same country, different currency of health. Those two numbers cannot go in the same league table.</a:t>
+              <a:t>Ninety seconds, no more. The term is used from Session 3 onwards and it should not arrive undefined. The one sentence that must land is the claim line: an ICER belongs to a comparison, not to a programme. Every misuse they will meet today follows from forgetting that. Resist the urge to write the formula with subscripts or to explain dominance; that is Session 5's work and it needs the material.</a:t>
             </a:r>
           </a:p>
         </p:txBody>
@@ -1508,7 +1509,7 @@
           <a:lstStyle/>
           <a:p>
             <a:r>
-              <a:t>Tell them plainly: they will meet all three in journal club within the year, and probably in a pharmaceutical presentation within the month. Naming the error politely and precisely is a professional skill.</a:t>
+              <a:t>This slide exists because they will otherwise conflate the two for the rest of their careers. Concretely: Arora 2024 reports cost per DALY averted, Chauhan 2020 reports cost per QALY gained. Same disease, same country, different currency of health. Those two numbers cannot go in the same league table.</a:t>
             </a:r>
           </a:p>
         </p:txBody>
@@ -1578,7 +1579,7 @@
           <a:lstStyle/>
           <a:p>
             <a:r>
-              <a:t>Make it concrete. Ask who has sat on a purchase or a drug and therapeutics committee, or worked on a State PIP. Get them to describe a choice they saw made and what evidence, if any, supported it.</a:t>
+              <a:t>Tell them plainly: they will meet all three in journal club within the year, and probably in a pharmaceutical presentation within the month. Naming the error politely and precisely is a professional skill.</a:t>
             </a:r>
           </a:p>
         </p:txBody>
@@ -1648,7 +1649,7 @@
           <a:lstStyle/>
           <a:p>
             <a:r>
-              <a:t>Do this in ninety seconds, out loud, as a demonstration of the classification working on a paper nobody would call public health. Then ask each group to do the same two questions on their own paper while the slide is up. Every one of them should land in the same box, and if a group cannot say yes to both questions, that is the most interesting finding of the morning.</a:t>
+              <a:t>Make it concrete. Ask who has sat on a purchase or a drug and therapeutics committee, or worked on a State PIP. Get them to describe a choice they saw made and what evidence, if any, supported it.</a:t>
             </a:r>
           </a:p>
         </p:txBody>
@@ -1718,7 +1719,7 @@
           <a:lstStyle/>
           <a:p>
             <a:r>
-              <a:t>End on the open question deliberately. It is the hook into Session 6, and it is a genuinely unsettled question in India rather than a teaching device. Then say why the day does not go straight there: a threshold applied to a badly framed question gives a confident wrong answer, so Sessions 3 to 5 take the ICER apart first.</a:t>
+              <a:t>Do this in ninety seconds, out loud, as a demonstration of the classification working on a paper nobody would call public health. Then ask each group to do the same two questions on their own paper while the slide is up. Every one of them should land in the same box, and if a group cannot say yes to both questions, that is the most interesting finding of the morning.</a:t>
             </a:r>
           </a:p>
         </p:txBody>
@@ -1788,7 +1789,7 @@
           <a:lstStyle/>
           <a:p>
             <a:r>
-              <a:t>Do not read this out. It is here so that a photographed slide carries a full reference, and so the deck stands alone as a document. The same list, annotated, is in handouts/reading-list.html.</a:t>
+              <a:t>End on the open question deliberately. It is the hook into Session 6, and it is a genuinely unsettled question in India rather than a teaching device. Then say why the day does not go straight there: a threshold applied to a badly framed question gives a confident wrong answer, so Sessions 3 to 5 take the ICER apart first.</a:t>
             </a:r>
           </a:p>
         </p:txBody>
@@ -1814,6 +1815,76 @@
 </file>
 
 <file path=ppt/notesSlides/notesSlide27.xml><?xml version="1.0" encoding="utf-8"?>
+<p:notes xmlns:a="http://schemas.openxmlformats.org/drawingml/2006/main" xmlns:p="http://schemas.openxmlformats.org/presentationml/2006/main" xmlns:r="http://schemas.openxmlformats.org/officeDocument/2006/relationships">
+  <p:cSld>
+    <p:spTree>
+      <p:nvGrpSpPr>
+        <p:cNvPr id="1" name=""/>
+        <p:cNvGrpSpPr/>
+        <p:nvPr/>
+      </p:nvGrpSpPr>
+      <p:grpSpPr>
+        <a:xfrm>
+          <a:off x="0" y="0"/>
+          <a:ext cx="0" cy="0"/>
+          <a:chOff x="0" y="0"/>
+          <a:chExt cx="0" cy="0"/>
+        </a:xfrm>
+      </p:grpSpPr>
+      <p:sp>
+        <p:nvSpPr>
+          <p:cNvPr id="2" name="Slide Image Placeholder 1"/>
+          <p:cNvSpPr>
+            <a:spLocks noGrp="1"/>
+          </p:cNvSpPr>
+          <p:nvPr>
+            <p:ph type="sldImg" idx="2"/>
+          </p:nvPr>
+        </p:nvSpPr>
+        <p:spPr/>
+      </p:sp>
+      <p:sp>
+        <p:nvSpPr>
+          <p:cNvPr id="3" name="Notes Placeholder 2"/>
+          <p:cNvSpPr>
+            <a:spLocks noGrp="1"/>
+          </p:cNvSpPr>
+          <p:nvPr>
+            <p:ph type="body" idx="3" sz="quarter"/>
+          </p:nvPr>
+        </p:nvSpPr>
+        <p:spPr/>
+        <p:txBody>
+          <a:bodyPr/>
+          <a:lstStyle/>
+          <a:p>
+            <a:r>
+              <a:t>Do not read this out. It is here so that a photographed slide carries a full reference, and so the deck stands alone as a document. The same list, annotated, is in handouts/reading-list.html.</a:t>
+            </a:r>
+          </a:p>
+        </p:txBody>
+      </p:sp>
+      <p:sp>
+        <p:nvSpPr>
+          <p:cNvPr id="4" name="Slide Number Placeholder 3"/>
+          <p:cNvSpPr>
+            <a:spLocks noGrp="1"/>
+          </p:cNvSpPr>
+          <p:nvPr>
+            <p:ph type="sldNum" idx="5" sz="quarter"/>
+          </p:nvPr>
+        </p:nvSpPr>
+        <p:spPr/>
+      </p:sp>
+    </p:spTree>
+  </p:cSld>
+  <p:clrMapOvr>
+    <a:masterClrMapping/>
+  </p:clrMapOvr>
+</p:notes>
+</file>
+
+<file path=ppt/notesSlides/notesSlide28.xml><?xml version="1.0" encoding="utf-8"?>
 <p:notes xmlns:a="http://schemas.openxmlformats.org/drawingml/2006/main" xmlns:p="http://schemas.openxmlformats.org/presentationml/2006/main" xmlns:r="http://schemas.openxmlformats.org/officeDocument/2006/relationships">
   <p:cSld>
     <p:spTree>
@@ -7312,7 +7383,7 @@
         <p:spPr>
           <a:xfrm>
             <a:off x="552450" y="1162050"/>
-            <a:ext cx="11106150" cy="4114800"/>
+            <a:ext cx="11106150" cy="3733800"/>
           </a:xfrm>
           <a:prstGeom prst="rect">
             <a:avLst/>
@@ -7327,7 +7398,7 @@
         </p:nvSpPr>
         <p:spPr>
           <a:xfrm>
-            <a:off x="552450" y="5316828"/>
+            <a:off x="552450" y="4935828"/>
             <a:ext cx="11087100" cy="781645"/>
           </a:xfrm>
           <a:prstGeom prst="rect">
@@ -7406,7 +7477,7 @@
         </p:nvSpPr>
         <p:spPr>
           <a:xfrm>
-            <a:off x="552450" y="6258074"/>
+            <a:off x="552450" y="5950595"/>
             <a:ext cx="11087100" cy="9525"/>
           </a:xfrm>
           <a:prstGeom prst="rect">
@@ -7450,8 +7521,8 @@
         </p:nvSpPr>
         <p:spPr>
           <a:xfrm>
-            <a:off x="552450" y="6326894"/>
-            <a:ext cx="11087100" cy="258098"/>
+            <a:off x="552450" y="6196551"/>
+            <a:ext cx="10420350" cy="248692"/>
           </a:xfrm>
           <a:prstGeom prst="rect">
             <a:avLst/>
@@ -7503,6 +7574,30 @@
           </a:p>
         </p:txBody>
       </p:sp>
+      <p:pic>
+        <p:nvPicPr>
+          <p:cNvPr id="8" name="Picture 7" descr="block1-14-1.png"/>
+          <p:cNvPicPr>
+            <a:picLocks noChangeAspect="1"/>
+          </p:cNvPicPr>
+          <p:nvPr/>
+        </p:nvPicPr>
+        <p:blipFill>
+          <a:blip r:embed="rId3"/>
+          <a:stretch>
+            <a:fillRect/>
+          </a:stretch>
+        </p:blipFill>
+        <p:spPr>
+          <a:xfrm>
+            <a:off x="11144250" y="6137672"/>
+            <a:ext cx="495300" cy="495300"/>
+          </a:xfrm>
+          <a:prstGeom prst="rect">
+            <a:avLst/>
+          </a:prstGeom>
+        </p:spPr>
+      </p:pic>
     </p:spTree>
   </p:cSld>
   <p:clrMapOvr>
@@ -11459,21 +11554,106 @@
                 </a:solidFill>
                 <a:latin typeface="Arial"/>
               </a:rPr>
-              <a:t>A warning: QALYs are not DALYs</a:t>
-            </a:r>
-          </a:p>
-        </p:txBody>
-      </p:sp>
-      <p:sp>
-        <p:nvSpPr>
-          <p:cNvPr id="4" name="Rectangle 3"/>
+              <a:t>That "₹ per unit" column has a name</a:t>
+            </a:r>
+          </a:p>
+        </p:txBody>
+      </p:sp>
+      <p:pic>
+        <p:nvPicPr>
+          <p:cNvPr id="4" name="Picture 3" descr="block1-21-0.png"/>
+          <p:cNvPicPr>
+            <a:picLocks noChangeAspect="1"/>
+          </p:cNvPicPr>
+          <p:nvPr/>
+        </p:nvPicPr>
+        <p:blipFill>
+          <a:blip r:embed="rId2"/>
+          <a:stretch>
+            <a:fillRect/>
+          </a:stretch>
+        </p:blipFill>
+        <p:spPr>
+          <a:xfrm>
+            <a:off x="552450" y="1162050"/>
+            <a:ext cx="11087100" cy="1339155"/>
+          </a:xfrm>
+          <a:prstGeom prst="rect">
+            <a:avLst/>
+          </a:prstGeom>
+        </p:spPr>
+      </p:pic>
+      <p:sp>
+        <p:nvSpPr>
+          <p:cNvPr id="5" name="TextBox 4"/>
+          <p:cNvSpPr txBox="1"/>
+          <p:nvPr/>
+        </p:nvSpPr>
+        <p:spPr>
+          <a:xfrm>
+            <a:off x="552450" y="2570651"/>
+            <a:ext cx="11087100" cy="716161"/>
+          </a:xfrm>
+          <a:prstGeom prst="rect">
+            <a:avLst/>
+          </a:prstGeom>
+          <a:noFill/>
+        </p:spPr>
+        <p:txBody>
+          <a:bodyPr wrap="square" lIns="0" rIns="0" tIns="0" bIns="0">
+            <a:spAutoFit/>
+          </a:bodyPr>
+          <a:lstStyle/>
+          <a:p>
+            <a:pPr algn="ctr">
+              <a:lnSpc>
+                <a:spcPct val="116700"/>
+              </a:lnSpc>
+              <a:spcAft>
+                <a:spcPts val="0"/>
+              </a:spcAft>
+              <a:buNone/>
+            </a:pPr>
+            <a:r>
+              <a:rPr sz="2010" b="0" i="0">
+                <a:solidFill>
+                  <a:srgbClr val="47525F"/>
+                </a:solidFill>
+                <a:latin typeface="Arial"/>
+              </a:rPr>
+              <a:t>The </a:t>
+            </a:r>
+            <a:r>
+              <a:rPr sz="2010" b="1" i="0">
+                <a:solidFill>
+                  <a:srgbClr val="10141A"/>
+                </a:solidFill>
+                <a:latin typeface="Arial"/>
+              </a:rPr>
+              <a:t>incremental cost-effectiveness ratio</a:t>
+            </a:r>
+            <a:r>
+              <a:rPr sz="2010" b="0" i="0">
+                <a:solidFill>
+                  <a:srgbClr val="47525F"/>
+                </a:solidFill>
+                <a:latin typeface="Arial"/>
+              </a:rPr>
+              <a:t>. Extra compared with the next best alternative, not with nothing.</a:t>
+            </a:r>
+          </a:p>
+        </p:txBody>
+      </p:sp>
+      <p:sp>
+        <p:nvSpPr>
+          <p:cNvPr id="6" name="Rectangle 5"/>
           <p:cNvSpPr/>
           <p:nvPr/>
         </p:nvSpPr>
         <p:spPr>
           <a:xfrm>
-            <a:off x="552450" y="1162050"/>
-            <a:ext cx="5463629" cy="2285256"/>
+            <a:off x="552450" y="3413373"/>
+            <a:ext cx="5463629" cy="1094333"/>
           </a:xfrm>
           <a:prstGeom prst="rect">
             <a:avLst/>
@@ -11512,20 +11692,20 @@
       </p:sp>
       <p:sp>
         <p:nvSpPr>
-          <p:cNvPr id="5" name="Rectangle 4"/>
+          <p:cNvPr id="7" name="Rectangle 6"/>
           <p:cNvSpPr/>
           <p:nvPr/>
         </p:nvSpPr>
         <p:spPr>
           <a:xfrm>
-            <a:off x="552450" y="1162050"/>
-            <a:ext cx="38100" cy="2285256"/>
+            <a:off x="552450" y="3413373"/>
+            <a:ext cx="38100" cy="1094333"/>
           </a:xfrm>
           <a:prstGeom prst="rect">
             <a:avLst/>
           </a:prstGeom>
           <a:solidFill>
-            <a:srgbClr val="17683C"/>
+            <a:srgbClr val="162A6C"/>
           </a:solidFill>
           <a:ln>
             <a:noFill/>
@@ -11556,14 +11736,14 @@
       </p:sp>
       <p:sp>
         <p:nvSpPr>
-          <p:cNvPr id="6" name="TextBox 5"/>
+          <p:cNvPr id="8" name="TextBox 7"/>
           <p:cNvSpPr txBox="1"/>
           <p:nvPr/>
         </p:nvSpPr>
         <p:spPr>
           <a:xfrm>
-            <a:off x="803672" y="1311416"/>
-            <a:ext cx="4989761" cy="294829"/>
+            <a:off x="765620" y="3553250"/>
+            <a:ext cx="5037290" cy="934456"/>
           </a:xfrm>
           <a:prstGeom prst="rect">
             <a:avLst/>
@@ -11581,93 +11761,52 @@
                 <a:spcPct val="83300"/>
               </a:lnSpc>
               <a:spcAft>
-                <a:spcPts val="0"/>
+                <a:spcPts val="400"/>
               </a:spcAft>
               <a:buNone/>
             </a:pPr>
             <a:r>
-              <a:rPr sz="2320" b="1" i="0" spc="-23">
-                <a:solidFill>
-                  <a:srgbClr val="1B3E8F"/>
-                </a:solidFill>
-                <a:latin typeface="Arial"/>
-              </a:rPr>
-              <a:t>QALY, gained</a:t>
-            </a:r>
-          </a:p>
-        </p:txBody>
-      </p:sp>
-      <p:sp>
-        <p:nvSpPr>
-          <p:cNvPr id="7" name="TextBox 6"/>
-          <p:cNvSpPr txBox="1"/>
-          <p:nvPr/>
-        </p:nvSpPr>
-        <p:spPr>
-          <a:xfrm>
-            <a:off x="803672" y="1694649"/>
-            <a:ext cx="4989761" cy="1563291"/>
-          </a:xfrm>
-          <a:prstGeom prst="rect">
-            <a:avLst/>
-          </a:prstGeom>
-          <a:noFill/>
-        </p:spPr>
-        <p:txBody>
-          <a:bodyPr wrap="square" lIns="0" rIns="0" tIns="0" bIns="0">
-            <a:spAutoFit/>
-          </a:bodyPr>
-          <a:lstStyle/>
+              <a:rPr sz="2800" b="1" i="0">
+                <a:solidFill>
+                  <a:srgbClr val="10141A"/>
+                </a:solidFill>
+                <a:latin typeface="Arial"/>
+              </a:rPr>
+              <a:t>US$662.94 per life saved</a:t>
+            </a:r>
+          </a:p>
           <a:p>
             <a:pPr algn="l">
               <a:lnSpc>
-                <a:spcPct val="116700"/>
+                <a:spcPct val="83300"/>
               </a:lnSpc>
               <a:spcAft>
-                <a:spcPts val="0"/>
+                <a:spcPts val="400"/>
               </a:spcAft>
               <a:buNone/>
             </a:pPr>
             <a:r>
               <a:rPr sz="2200" b="0" i="0">
                 <a:solidFill>
-                  <a:srgbClr val="10141A"/>
-                </a:solidFill>
-                <a:latin typeface="Arial"/>
-              </a:rPr>
-              <a:t>Health </a:t>
-            </a:r>
-            <a:r>
-              <a:rPr sz="2200" b="0" i="1">
-                <a:solidFill>
-                  <a:srgbClr val="10141A"/>
-                </a:solidFill>
-                <a:latin typeface="Arial"/>
-              </a:rPr>
-              <a:t>gained</a:t>
-            </a:r>
-            <a:r>
-              <a:rPr sz="2200" b="0" i="0">
-                <a:solidFill>
-                  <a:srgbClr val="10141A"/>
-                </a:solidFill>
-                <a:latin typeface="Arial"/>
-              </a:rPr>
-              <a:t>. Preference-based utility weights, 1 for full health and 0 for dead, usually elicited from the general public. You maximise it.</a:t>
-            </a:r>
-          </a:p>
-        </p:txBody>
-      </p:sp>
-      <p:sp>
-        <p:nvSpPr>
-          <p:cNvPr id="8" name="Rectangle 7"/>
+                  <a:srgbClr val="47525F"/>
+                </a:solidFill>
+                <a:latin typeface="Arial"/>
+              </a:rPr>
+              <a:t>Rotavirus, two slides ago</a:t>
+            </a:r>
+          </a:p>
+        </p:txBody>
+      </p:sp>
+      <p:sp>
+        <p:nvSpPr>
+          <p:cNvPr id="9" name="Rectangle 8"/>
           <p:cNvSpPr/>
           <p:nvPr/>
         </p:nvSpPr>
         <p:spPr>
           <a:xfrm>
-            <a:off x="6175921" y="1162050"/>
-            <a:ext cx="5463629" cy="2285256"/>
+            <a:off x="6175921" y="3413373"/>
+            <a:ext cx="5463629" cy="1094333"/>
           </a:xfrm>
           <a:prstGeom prst="rect">
             <a:avLst/>
@@ -11706,20 +11845,20 @@
       </p:sp>
       <p:sp>
         <p:nvSpPr>
-          <p:cNvPr id="9" name="Rectangle 8"/>
+          <p:cNvPr id="10" name="Rectangle 9"/>
           <p:cNvSpPr/>
           <p:nvPr/>
         </p:nvSpPr>
         <p:spPr>
           <a:xfrm>
-            <a:off x="6175921" y="1162050"/>
-            <a:ext cx="38100" cy="2285256"/>
+            <a:off x="6175921" y="3413373"/>
+            <a:ext cx="38100" cy="1094333"/>
           </a:xfrm>
           <a:prstGeom prst="rect">
             <a:avLst/>
           </a:prstGeom>
           <a:solidFill>
-            <a:srgbClr val="A32217"/>
+            <a:srgbClr val="162A6C"/>
           </a:solidFill>
           <a:ln>
             <a:noFill/>
@@ -11750,14 +11889,14 @@
       </p:sp>
       <p:sp>
         <p:nvSpPr>
-          <p:cNvPr id="10" name="TextBox 9"/>
+          <p:cNvPr id="11" name="TextBox 10"/>
           <p:cNvSpPr txBox="1"/>
           <p:nvPr/>
         </p:nvSpPr>
         <p:spPr>
           <a:xfrm>
-            <a:off x="6427143" y="1311416"/>
-            <a:ext cx="4989761" cy="294829"/>
+            <a:off x="6389090" y="3553250"/>
+            <a:ext cx="5037290" cy="934456"/>
           </a:xfrm>
           <a:prstGeom prst="rect">
             <a:avLst/>
@@ -11775,32 +11914,199 @@
                 <a:spcPct val="83300"/>
               </a:lnSpc>
               <a:spcAft>
+                <a:spcPts val="400"/>
+              </a:spcAft>
+              <a:buNone/>
+            </a:pPr>
+            <a:r>
+              <a:rPr sz="2800" b="1" i="0">
+                <a:solidFill>
+                  <a:srgbClr val="10141A"/>
+                </a:solidFill>
+                <a:latin typeface="Arial"/>
+              </a:rPr>
+              <a:t>₹54,881 per QALY gained</a:t>
+            </a:r>
+          </a:p>
+          <a:p>
+            <a:pPr algn="l">
+              <a:lnSpc>
+                <a:spcPct val="83300"/>
+              </a:lnSpc>
+              <a:spcAft>
+                <a:spcPts val="400"/>
+              </a:spcAft>
+              <a:buNone/>
+            </a:pPr>
+            <a:r>
+              <a:rPr sz="2200" b="0" i="0">
+                <a:solidFill>
+                  <a:srgbClr val="47525F"/>
+                </a:solidFill>
+                <a:latin typeface="Arial"/>
+              </a:rPr>
+              <a:t>VIA screening, last slide</a:t>
+            </a:r>
+          </a:p>
+        </p:txBody>
+      </p:sp>
+      <p:sp>
+        <p:nvSpPr>
+          <p:cNvPr id="12" name="Rectangle 11"/>
+          <p:cNvSpPr/>
+          <p:nvPr/>
+        </p:nvSpPr>
+        <p:spPr>
+          <a:xfrm>
+            <a:off x="552450" y="4649986"/>
+            <a:ext cx="11087100" cy="1032867"/>
+          </a:xfrm>
+          <a:prstGeom prst="rect">
+            <a:avLst/>
+          </a:prstGeom>
+          <a:noFill/>
+          <a:ln>
+            <a:noFill/>
+          </a:ln>
+          <a:effectLst/>
+        </p:spPr>
+        <p:style>
+          <a:lnRef idx="1">
+            <a:schemeClr val="accent1"/>
+          </a:lnRef>
+          <a:fillRef idx="3">
+            <a:schemeClr val="accent1"/>
+          </a:fillRef>
+          <a:effectRef idx="2">
+            <a:schemeClr val="accent1"/>
+          </a:effectRef>
+          <a:fontRef idx="minor">
+            <a:schemeClr val="lt1"/>
+          </a:fontRef>
+        </p:style>
+        <p:txBody>
+          <a:bodyPr rtlCol="0" anchor="ctr"/>
+          <a:lstStyle/>
+          <a:p>
+            <a:pPr algn="ctr"/>
+          </a:p>
+        </p:txBody>
+      </p:sp>
+      <p:sp>
+        <p:nvSpPr>
+          <p:cNvPr id="13" name="Rectangle 12"/>
+          <p:cNvSpPr/>
+          <p:nvPr/>
+        </p:nvSpPr>
+        <p:spPr>
+          <a:xfrm>
+            <a:off x="552450" y="4649986"/>
+            <a:ext cx="57150" cy="1032867"/>
+          </a:xfrm>
+          <a:prstGeom prst="rect">
+            <a:avLst/>
+          </a:prstGeom>
+          <a:solidFill>
+            <a:srgbClr val="8A5A00"/>
+          </a:solidFill>
+          <a:ln>
+            <a:noFill/>
+          </a:ln>
+          <a:effectLst/>
+        </p:spPr>
+        <p:style>
+          <a:lnRef idx="1">
+            <a:schemeClr val="accent1"/>
+          </a:lnRef>
+          <a:fillRef idx="3">
+            <a:schemeClr val="accent1"/>
+          </a:fillRef>
+          <a:effectRef idx="2">
+            <a:schemeClr val="accent1"/>
+          </a:effectRef>
+          <a:fontRef idx="minor">
+            <a:schemeClr val="lt1"/>
+          </a:fontRef>
+        </p:style>
+        <p:txBody>
+          <a:bodyPr rtlCol="0" anchor="ctr"/>
+          <a:lstStyle/>
+          <a:p>
+            <a:pPr algn="ctr"/>
+          </a:p>
+        </p:txBody>
+      </p:sp>
+      <p:sp>
+        <p:nvSpPr>
+          <p:cNvPr id="14" name="TextBox 13"/>
+          <p:cNvSpPr txBox="1"/>
+          <p:nvPr/>
+        </p:nvSpPr>
+        <p:spPr>
+          <a:xfrm>
+            <a:off x="776189" y="4650326"/>
+            <a:ext cx="10863361" cy="1012527"/>
+          </a:xfrm>
+          <a:prstGeom prst="rect">
+            <a:avLst/>
+          </a:prstGeom>
+          <a:noFill/>
+        </p:spPr>
+        <p:txBody>
+          <a:bodyPr wrap="square" lIns="0" rIns="0" tIns="0" bIns="0">
+            <a:spAutoFit/>
+          </a:bodyPr>
+          <a:lstStyle/>
+          <a:p>
+            <a:pPr algn="l">
+              <a:lnSpc>
+                <a:spcPct val="101700"/>
+              </a:lnSpc>
+              <a:spcAft>
                 <a:spcPts val="0"/>
               </a:spcAft>
               <a:buNone/>
             </a:pPr>
             <a:r>
-              <a:rPr sz="2320" b="1" i="0" spc="-23">
-                <a:solidFill>
-                  <a:srgbClr val="1B3E8F"/>
-                </a:solidFill>
-                <a:latin typeface="Arial"/>
-              </a:rPr>
-              <a:t>DALY, averted</a:t>
-            </a:r>
-          </a:p>
-        </p:txBody>
-      </p:sp>
-      <p:sp>
-        <p:nvSpPr>
-          <p:cNvPr id="11" name="TextBox 10"/>
+              <a:rPr sz="3200" b="1" i="0" spc="-32">
+                <a:solidFill>
+                  <a:srgbClr val="10141A"/>
+                </a:solidFill>
+                <a:latin typeface="Arial"/>
+              </a:rPr>
+              <a:t>An ICER is a statement about </a:t>
+            </a:r>
+            <a:r>
+              <a:rPr sz="3200" b="1" i="1" spc="-32">
+                <a:solidFill>
+                  <a:srgbClr val="10141A"/>
+                </a:solidFill>
+                <a:latin typeface="Arial"/>
+              </a:rPr>
+              <a:t>two</a:t>
+            </a:r>
+            <a:r>
+              <a:rPr sz="3200" b="1" i="0" spc="-32">
+                <a:solidFill>
+                  <a:srgbClr val="10141A"/>
+                </a:solidFill>
+                <a:latin typeface="Arial"/>
+              </a:rPr>
+              <a:t> options. No single programme has one of its own.</a:t>
+            </a:r>
+          </a:p>
+        </p:txBody>
+      </p:sp>
+      <p:sp>
+        <p:nvSpPr>
+          <p:cNvPr id="15" name="TextBox 14"/>
           <p:cNvSpPr txBox="1"/>
           <p:nvPr/>
         </p:nvSpPr>
         <p:spPr>
           <a:xfrm>
-            <a:off x="6427143" y="1694649"/>
-            <a:ext cx="4989761" cy="1172468"/>
+            <a:off x="552450" y="5703483"/>
+            <a:ext cx="11087100" cy="390823"/>
           </a:xfrm>
           <a:prstGeom prst="rect">
             <a:avLst/>
@@ -11825,201 +12131,11 @@
             <a:r>
               <a:rPr sz="2200" b="0" i="0">
                 <a:solidFill>
-                  <a:srgbClr val="10141A"/>
-                </a:solidFill>
-                <a:latin typeface="Arial"/>
-              </a:rPr>
-              <a:t>Health </a:t>
-            </a:r>
-            <a:r>
-              <a:rPr sz="2200" b="0" i="1">
-                <a:solidFill>
-                  <a:srgbClr val="10141A"/>
-                </a:solidFill>
-                <a:latin typeface="Arial"/>
-              </a:rPr>
-              <a:t>lost</a:t>
-            </a:r>
-            <a:r>
-              <a:rPr sz="2200" b="0" i="0">
-                <a:solidFill>
-                  <a:srgbClr val="10141A"/>
-                </a:solidFill>
-                <a:latin typeface="Arial"/>
-              </a:rPr>
-              <a:t>. Disability weights plus years of life lost against a reference life expectancy. You minimise it.</a:t>
-            </a:r>
-          </a:p>
-        </p:txBody>
-      </p:sp>
-      <p:sp>
-        <p:nvSpPr>
-          <p:cNvPr id="12" name="Rectangle 11"/>
-          <p:cNvSpPr/>
-          <p:nvPr/>
-        </p:nvSpPr>
-        <p:spPr>
-          <a:xfrm>
-            <a:off x="552450" y="3650605"/>
-            <a:ext cx="11087100" cy="1032867"/>
-          </a:xfrm>
-          <a:prstGeom prst="rect">
-            <a:avLst/>
-          </a:prstGeom>
-          <a:noFill/>
-          <a:ln>
-            <a:noFill/>
-          </a:ln>
-          <a:effectLst/>
-        </p:spPr>
-        <p:style>
-          <a:lnRef idx="1">
-            <a:schemeClr val="accent1"/>
-          </a:lnRef>
-          <a:fillRef idx="3">
-            <a:schemeClr val="accent1"/>
-          </a:fillRef>
-          <a:effectRef idx="2">
-            <a:schemeClr val="accent1"/>
-          </a:effectRef>
-          <a:fontRef idx="minor">
-            <a:schemeClr val="lt1"/>
-          </a:fontRef>
-        </p:style>
-        <p:txBody>
-          <a:bodyPr rtlCol="0" anchor="ctr"/>
-          <a:lstStyle/>
-          <a:p>
-            <a:pPr algn="ctr"/>
-          </a:p>
-        </p:txBody>
-      </p:sp>
-      <p:sp>
-        <p:nvSpPr>
-          <p:cNvPr id="13" name="Rectangle 12"/>
-          <p:cNvSpPr/>
-          <p:nvPr/>
-        </p:nvSpPr>
-        <p:spPr>
-          <a:xfrm>
-            <a:off x="552450" y="3650605"/>
-            <a:ext cx="57150" cy="1032867"/>
-          </a:xfrm>
-          <a:prstGeom prst="rect">
-            <a:avLst/>
-          </a:prstGeom>
-          <a:solidFill>
-            <a:srgbClr val="8A5A00"/>
-          </a:solidFill>
-          <a:ln>
-            <a:noFill/>
-          </a:ln>
-          <a:effectLst/>
-        </p:spPr>
-        <p:style>
-          <a:lnRef idx="1">
-            <a:schemeClr val="accent1"/>
-          </a:lnRef>
-          <a:fillRef idx="3">
-            <a:schemeClr val="accent1"/>
-          </a:fillRef>
-          <a:effectRef idx="2">
-            <a:schemeClr val="accent1"/>
-          </a:effectRef>
-          <a:fontRef idx="minor">
-            <a:schemeClr val="lt1"/>
-          </a:fontRef>
-        </p:style>
-        <p:txBody>
-          <a:bodyPr rtlCol="0" anchor="ctr"/>
-          <a:lstStyle/>
-          <a:p>
-            <a:pPr algn="ctr"/>
-          </a:p>
-        </p:txBody>
-      </p:sp>
-      <p:sp>
-        <p:nvSpPr>
-          <p:cNvPr id="14" name="TextBox 13"/>
-          <p:cNvSpPr txBox="1"/>
-          <p:nvPr/>
-        </p:nvSpPr>
-        <p:spPr>
-          <a:xfrm>
-            <a:off x="776189" y="3650945"/>
-            <a:ext cx="10863361" cy="1012527"/>
-          </a:xfrm>
-          <a:prstGeom prst="rect">
-            <a:avLst/>
-          </a:prstGeom>
-          <a:noFill/>
-        </p:spPr>
-        <p:txBody>
-          <a:bodyPr wrap="square" lIns="0" rIns="0" tIns="0" bIns="0">
-            <a:spAutoFit/>
-          </a:bodyPr>
-          <a:lstStyle/>
-          <a:p>
-            <a:pPr algn="l">
-              <a:lnSpc>
-                <a:spcPct val="101700"/>
-              </a:lnSpc>
-              <a:spcAft>
-                <a:spcPts val="0"/>
-              </a:spcAft>
-              <a:buNone/>
-            </a:pPr>
-            <a:r>
-              <a:rPr sz="3200" b="1" i="0" spc="-32">
-                <a:solidFill>
-                  <a:srgbClr val="10141A"/>
-                </a:solidFill>
-                <a:latin typeface="Arial"/>
-              </a:rPr>
-              <a:t>They are not interchangeable, and one is not the arithmetic negative of the other.</a:t>
-            </a:r>
-          </a:p>
-        </p:txBody>
-      </p:sp>
-      <p:sp>
-        <p:nvSpPr>
-          <p:cNvPr id="15" name="TextBox 14"/>
-          <p:cNvSpPr txBox="1"/>
-          <p:nvPr/>
-        </p:nvSpPr>
-        <p:spPr>
-          <a:xfrm>
-            <a:off x="552450" y="4846531"/>
-            <a:ext cx="11087100" cy="1172468"/>
-          </a:xfrm>
-          <a:prstGeom prst="rect">
-            <a:avLst/>
-          </a:prstGeom>
-          <a:noFill/>
-        </p:spPr>
-        <p:txBody>
-          <a:bodyPr wrap="square" lIns="0" rIns="0" tIns="0" bIns="0">
-            <a:spAutoFit/>
-          </a:bodyPr>
-          <a:lstStyle/>
-          <a:p>
-            <a:pPr algn="l">
-              <a:lnSpc>
-                <a:spcPct val="116700"/>
-              </a:lnSpc>
-              <a:spcAft>
-                <a:spcPts val="0"/>
-              </a:spcAft>
-              <a:buNone/>
-            </a:pPr>
-            <a:r>
-              <a:rPr sz="2200" b="0" i="0">
-                <a:solidFill>
                   <a:srgbClr val="47525F"/>
                 </a:solidFill>
                 <a:latin typeface="Arial"/>
               </a:rPr>
-              <a:t>You met DALYs first, through burden-of-disease teaching. Most Indian HTA work now reports QALYs, because the Indian Reference Case asks for them. Watch which one a paper uses.</a:t>
+              <a:t>Session 5 computes them, ranks five options, and shows the three ways they go wrong.</a:t>
             </a:r>
           </a:p>
         </p:txBody>
@@ -12124,21 +12240,111 @@
                 </a:solidFill>
                 <a:latin typeface="Arial"/>
               </a:rPr>
-              <a:t>Three errors we will keep catching</a:t>
-            </a:r>
-          </a:p>
-        </p:txBody>
-      </p:sp>
-      <p:sp>
-        <p:nvSpPr>
-          <p:cNvPr id="4" name="TextBox 3"/>
+              <a:t>A warning: QALYs are not DALYs</a:t>
+            </a:r>
+          </a:p>
+        </p:txBody>
+      </p:sp>
+      <p:sp>
+        <p:nvSpPr>
+          <p:cNvPr id="4" name="Rectangle 3"/>
+          <p:cNvSpPr/>
+          <p:nvPr/>
+        </p:nvSpPr>
+        <p:spPr>
+          <a:xfrm>
+            <a:off x="552450" y="1162050"/>
+            <a:ext cx="5463629" cy="2285256"/>
+          </a:xfrm>
+          <a:prstGeom prst="rect">
+            <a:avLst/>
+          </a:prstGeom>
+          <a:solidFill>
+            <a:srgbClr val="F4F6F9"/>
+          </a:solidFill>
+          <a:ln w="9525">
+            <a:solidFill>
+              <a:srgbClr val="CCD4DD"/>
+            </a:solidFill>
+          </a:ln>
+          <a:effectLst/>
+        </p:spPr>
+        <p:style>
+          <a:lnRef idx="1">
+            <a:schemeClr val="accent1"/>
+          </a:lnRef>
+          <a:fillRef idx="3">
+            <a:schemeClr val="accent1"/>
+          </a:fillRef>
+          <a:effectRef idx="2">
+            <a:schemeClr val="accent1"/>
+          </a:effectRef>
+          <a:fontRef idx="minor">
+            <a:schemeClr val="lt1"/>
+          </a:fontRef>
+        </p:style>
+        <p:txBody>
+          <a:bodyPr rtlCol="0" anchor="ctr"/>
+          <a:lstStyle/>
+          <a:p>
+            <a:pPr algn="ctr"/>
+          </a:p>
+        </p:txBody>
+      </p:sp>
+      <p:sp>
+        <p:nvSpPr>
+          <p:cNvPr id="5" name="Rectangle 4"/>
+          <p:cNvSpPr/>
+          <p:nvPr/>
+        </p:nvSpPr>
+        <p:spPr>
+          <a:xfrm>
+            <a:off x="552450" y="1162050"/>
+            <a:ext cx="38100" cy="2285256"/>
+          </a:xfrm>
+          <a:prstGeom prst="rect">
+            <a:avLst/>
+          </a:prstGeom>
+          <a:solidFill>
+            <a:srgbClr val="17683C"/>
+          </a:solidFill>
+          <a:ln>
+            <a:noFill/>
+          </a:ln>
+          <a:effectLst/>
+        </p:spPr>
+        <p:style>
+          <a:lnRef idx="1">
+            <a:schemeClr val="accent1"/>
+          </a:lnRef>
+          <a:fillRef idx="3">
+            <a:schemeClr val="accent1"/>
+          </a:fillRef>
+          <a:effectRef idx="2">
+            <a:schemeClr val="accent1"/>
+          </a:effectRef>
+          <a:fontRef idx="minor">
+            <a:schemeClr val="lt1"/>
+          </a:fontRef>
+        </p:style>
+        <p:txBody>
+          <a:bodyPr rtlCol="0" anchor="ctr"/>
+          <a:lstStyle/>
+          <a:p>
+            <a:pPr algn="ctr"/>
+          </a:p>
+        </p:txBody>
+      </p:sp>
+      <p:sp>
+        <p:nvSpPr>
+          <p:cNvPr id="6" name="TextBox 5"/>
           <p:cNvSpPr txBox="1"/>
           <p:nvPr/>
         </p:nvSpPr>
         <p:spPr>
           <a:xfrm>
-            <a:off x="1288703" y="1142050"/>
-            <a:ext cx="10350847" cy="959048"/>
+            <a:off x="803672" y="1311416"/>
+            <a:ext cx="4989761" cy="294829"/>
           </a:xfrm>
           <a:prstGeom prst="rect">
             <a:avLst/>
@@ -12153,7 +12359,7 @@
           <a:p>
             <a:pPr algn="l">
               <a:lnSpc>
-                <a:spcPct val="112500"/>
+                <a:spcPct val="83300"/>
               </a:lnSpc>
               <a:spcAft>
                 <a:spcPts val="0"/>
@@ -12161,36 +12367,27 @@
               <a:buNone/>
             </a:pPr>
             <a:r>
-              <a:rPr sz="2800" b="1" i="0">
-                <a:solidFill>
-                  <a:srgbClr val="10141A"/>
-                </a:solidFill>
-                <a:latin typeface="Arial"/>
-              </a:rPr>
-              <a:t>Calling a costing study a CEA.</a:t>
-            </a:r>
-            <a:r>
-              <a:rPr sz="2800" b="0" i="0">
-                <a:solidFill>
-                  <a:srgbClr val="10141A"/>
-                </a:solidFill>
-                <a:latin typeface="Arial"/>
-              </a:rPr>
-              <a:t> "Cost" in the title does not make it an economic evaluation. Ask Question 1.</a:t>
-            </a:r>
-          </a:p>
-        </p:txBody>
-      </p:sp>
-      <p:sp>
-        <p:nvSpPr>
-          <p:cNvPr id="5" name="TextBox 4"/>
+              <a:rPr sz="2320" b="1" i="0" spc="-23">
+                <a:solidFill>
+                  <a:srgbClr val="1B3E8F"/>
+                </a:solidFill>
+                <a:latin typeface="Arial"/>
+              </a:rPr>
+              <a:t>QALY, gained</a:t>
+            </a:r>
+          </a:p>
+        </p:txBody>
+      </p:sp>
+      <p:sp>
+        <p:nvSpPr>
+          <p:cNvPr id="7" name="TextBox 6"/>
           <p:cNvSpPr txBox="1"/>
           <p:nvPr/>
         </p:nvSpPr>
         <p:spPr>
           <a:xfrm>
-            <a:off x="1288703" y="2243080"/>
-            <a:ext cx="10350847" cy="959048"/>
+            <a:off x="803672" y="1694649"/>
+            <a:ext cx="4989761" cy="1563291"/>
           </a:xfrm>
           <a:prstGeom prst="rect">
             <a:avLst/>
@@ -12205,7 +12402,7 @@
           <a:p>
             <a:pPr algn="l">
               <a:lnSpc>
-                <a:spcPct val="112500"/>
+                <a:spcPct val="116700"/>
               </a:lnSpc>
               <a:spcAft>
                 <a:spcPts val="0"/>
@@ -12213,36 +12410,135 @@
               <a:buNone/>
             </a:pPr>
             <a:r>
-              <a:rPr sz="2800" b="1" i="0">
+              <a:rPr sz="2200" b="0" i="0">
                 <a:solidFill>
                   <a:srgbClr val="10141A"/>
                 </a:solidFill>
                 <a:latin typeface="Arial"/>
               </a:rPr>
-              <a:t>Calling a CEA a CUA.</a:t>
-            </a:r>
-            <a:r>
-              <a:rPr sz="2800" b="0" i="0">
+              <a:t>Health </a:t>
+            </a:r>
+            <a:r>
+              <a:rPr sz="2200" b="0" i="1">
                 <a:solidFill>
                   <a:srgbClr val="10141A"/>
                 </a:solidFill>
                 <a:latin typeface="Arial"/>
               </a:rPr>
-              <a:t> Cost per case detected is not cost per QALY. Look at the denominator.</a:t>
-            </a:r>
-          </a:p>
-        </p:txBody>
-      </p:sp>
-      <p:sp>
-        <p:nvSpPr>
-          <p:cNvPr id="6" name="TextBox 5"/>
+              <a:t>gained</a:t>
+            </a:r>
+            <a:r>
+              <a:rPr sz="2200" b="0" i="0">
+                <a:solidFill>
+                  <a:srgbClr val="10141A"/>
+                </a:solidFill>
+                <a:latin typeface="Arial"/>
+              </a:rPr>
+              <a:t>. Preference-based utility weights, 1 for full health and 0 for dead, usually elicited from the general public. You maximise it.</a:t>
+            </a:r>
+          </a:p>
+        </p:txBody>
+      </p:sp>
+      <p:sp>
+        <p:nvSpPr>
+          <p:cNvPr id="8" name="Rectangle 7"/>
+          <p:cNvSpPr/>
+          <p:nvPr/>
+        </p:nvSpPr>
+        <p:spPr>
+          <a:xfrm>
+            <a:off x="6175921" y="1162050"/>
+            <a:ext cx="5463629" cy="2285256"/>
+          </a:xfrm>
+          <a:prstGeom prst="rect">
+            <a:avLst/>
+          </a:prstGeom>
+          <a:solidFill>
+            <a:srgbClr val="F4F6F9"/>
+          </a:solidFill>
+          <a:ln w="9525">
+            <a:solidFill>
+              <a:srgbClr val="CCD4DD"/>
+            </a:solidFill>
+          </a:ln>
+          <a:effectLst/>
+        </p:spPr>
+        <p:style>
+          <a:lnRef idx="1">
+            <a:schemeClr val="accent1"/>
+          </a:lnRef>
+          <a:fillRef idx="3">
+            <a:schemeClr val="accent1"/>
+          </a:fillRef>
+          <a:effectRef idx="2">
+            <a:schemeClr val="accent1"/>
+          </a:effectRef>
+          <a:fontRef idx="minor">
+            <a:schemeClr val="lt1"/>
+          </a:fontRef>
+        </p:style>
+        <p:txBody>
+          <a:bodyPr rtlCol="0" anchor="ctr"/>
+          <a:lstStyle/>
+          <a:p>
+            <a:pPr algn="ctr"/>
+          </a:p>
+        </p:txBody>
+      </p:sp>
+      <p:sp>
+        <p:nvSpPr>
+          <p:cNvPr id="9" name="Rectangle 8"/>
+          <p:cNvSpPr/>
+          <p:nvPr/>
+        </p:nvSpPr>
+        <p:spPr>
+          <a:xfrm>
+            <a:off x="6175921" y="1162050"/>
+            <a:ext cx="38100" cy="2285256"/>
+          </a:xfrm>
+          <a:prstGeom prst="rect">
+            <a:avLst/>
+          </a:prstGeom>
+          <a:solidFill>
+            <a:srgbClr val="A32217"/>
+          </a:solidFill>
+          <a:ln>
+            <a:noFill/>
+          </a:ln>
+          <a:effectLst/>
+        </p:spPr>
+        <p:style>
+          <a:lnRef idx="1">
+            <a:schemeClr val="accent1"/>
+          </a:lnRef>
+          <a:fillRef idx="3">
+            <a:schemeClr val="accent1"/>
+          </a:fillRef>
+          <a:effectRef idx="2">
+            <a:schemeClr val="accent1"/>
+          </a:effectRef>
+          <a:fontRef idx="minor">
+            <a:schemeClr val="lt1"/>
+          </a:fontRef>
+        </p:style>
+        <p:txBody>
+          <a:bodyPr rtlCol="0" anchor="ctr"/>
+          <a:lstStyle/>
+          <a:p>
+            <a:pPr algn="ctr"/>
+          </a:p>
+        </p:txBody>
+      </p:sp>
+      <p:sp>
+        <p:nvSpPr>
+          <p:cNvPr id="10" name="TextBox 9"/>
           <p:cNvSpPr txBox="1"/>
           <p:nvPr/>
         </p:nvSpPr>
         <p:spPr>
           <a:xfrm>
-            <a:off x="1288703" y="3344111"/>
-            <a:ext cx="10350847" cy="959048"/>
+            <a:off x="6427143" y="1311416"/>
+            <a:ext cx="4989761" cy="294829"/>
           </a:xfrm>
           <a:prstGeom prst="rect">
             <a:avLst/>
@@ -12257,7 +12553,7 @@
           <a:p>
             <a:pPr algn="l">
               <a:lnSpc>
-                <a:spcPct val="112500"/>
+                <a:spcPct val="83300"/>
               </a:lnSpc>
               <a:spcAft>
                 <a:spcPts val="0"/>
@@ -12265,35 +12561,87 @@
               <a:buNone/>
             </a:pPr>
             <a:r>
-              <a:rPr sz="2800" b="1" i="0">
+              <a:rPr sz="2320" b="1" i="0" spc="-23">
+                <a:solidFill>
+                  <a:srgbClr val="1B3E8F"/>
+                </a:solidFill>
+                <a:latin typeface="Arial"/>
+              </a:rPr>
+              <a:t>DALY, averted</a:t>
+            </a:r>
+          </a:p>
+        </p:txBody>
+      </p:sp>
+      <p:sp>
+        <p:nvSpPr>
+          <p:cNvPr id="11" name="TextBox 10"/>
+          <p:cNvSpPr txBox="1"/>
+          <p:nvPr/>
+        </p:nvSpPr>
+        <p:spPr>
+          <a:xfrm>
+            <a:off x="6427143" y="1694649"/>
+            <a:ext cx="4989761" cy="1172468"/>
+          </a:xfrm>
+          <a:prstGeom prst="rect">
+            <a:avLst/>
+          </a:prstGeom>
+          <a:noFill/>
+        </p:spPr>
+        <p:txBody>
+          <a:bodyPr wrap="square" lIns="0" rIns="0" tIns="0" bIns="0">
+            <a:spAutoFit/>
+          </a:bodyPr>
+          <a:lstStyle/>
+          <a:p>
+            <a:pPr algn="l">
+              <a:lnSpc>
+                <a:spcPct val="116700"/>
+              </a:lnSpc>
+              <a:spcAft>
+                <a:spcPts val="0"/>
+              </a:spcAft>
+              <a:buNone/>
+            </a:pPr>
+            <a:r>
+              <a:rPr sz="2200" b="0" i="0">
                 <a:solidFill>
                   <a:srgbClr val="10141A"/>
                 </a:solidFill>
                 <a:latin typeface="Arial"/>
               </a:rPr>
-              <a:t>Declaring something cost-effective with no threshold and no comparator.</a:t>
-            </a:r>
-            <a:r>
-              <a:rPr sz="2800" b="0" i="0">
+              <a:t>Health </a:t>
+            </a:r>
+            <a:r>
+              <a:rPr sz="2200" b="0" i="1">
                 <a:solidFill>
                   <a:srgbClr val="10141A"/>
                 </a:solidFill>
                 <a:latin typeface="Arial"/>
               </a:rPr>
-              <a:t> The phrase is empty without both.</a:t>
-            </a:r>
-          </a:p>
-        </p:txBody>
-      </p:sp>
-      <p:sp>
-        <p:nvSpPr>
-          <p:cNvPr id="7" name="Rectangle 6"/>
+              <a:t>lost</a:t>
+            </a:r>
+            <a:r>
+              <a:rPr sz="2200" b="0" i="0">
+                <a:solidFill>
+                  <a:srgbClr val="10141A"/>
+                </a:solidFill>
+                <a:latin typeface="Arial"/>
+              </a:rPr>
+              <a:t>. Disability weights plus years of life lost against a reference life expectancy. You minimise it.</a:t>
+            </a:r>
+          </a:p>
+        </p:txBody>
+      </p:sp>
+      <p:sp>
+        <p:nvSpPr>
+          <p:cNvPr id="12" name="Rectangle 11"/>
           <p:cNvSpPr/>
           <p:nvPr/>
         </p:nvSpPr>
         <p:spPr>
           <a:xfrm>
-            <a:off x="552450" y="4485829"/>
+            <a:off x="552450" y="3650605"/>
             <a:ext cx="11087100" cy="1032867"/>
           </a:xfrm>
           <a:prstGeom prst="rect">
@@ -12329,13 +12677,13 @@
       </p:sp>
       <p:sp>
         <p:nvSpPr>
-          <p:cNvPr id="8" name="Rectangle 7"/>
+          <p:cNvPr id="13" name="Rectangle 12"/>
           <p:cNvSpPr/>
           <p:nvPr/>
         </p:nvSpPr>
         <p:spPr>
           <a:xfrm>
-            <a:off x="552450" y="4485829"/>
+            <a:off x="552450" y="3650605"/>
             <a:ext cx="57150" cy="1032867"/>
           </a:xfrm>
           <a:prstGeom prst="rect">
@@ -12373,13 +12721,13 @@
       </p:sp>
       <p:sp>
         <p:nvSpPr>
-          <p:cNvPr id="9" name="TextBox 8"/>
+          <p:cNvPr id="14" name="TextBox 13"/>
           <p:cNvSpPr txBox="1"/>
           <p:nvPr/>
         </p:nvSpPr>
         <p:spPr>
           <a:xfrm>
-            <a:off x="776189" y="4486168"/>
+            <a:off x="776189" y="3650945"/>
             <a:ext cx="10863361" cy="1012527"/>
           </a:xfrm>
           <a:prstGeom prst="rect">
@@ -12409,65 +12757,21 @@
                 </a:solidFill>
                 <a:latin typeface="Arial"/>
               </a:rPr>
-              <a:t>A systematic review of Indian evaluations found exactly these problems at scale.</a:t>
-            </a:r>
-          </a:p>
-        </p:txBody>
-      </p:sp>
-      <p:sp>
-        <p:nvSpPr>
-          <p:cNvPr id="10" name="Rectangle 9"/>
-          <p:cNvSpPr/>
-          <p:nvPr/>
-        </p:nvSpPr>
-        <p:spPr>
-          <a:xfrm>
-            <a:off x="552450" y="5701754"/>
-            <a:ext cx="11087100" cy="9525"/>
-          </a:xfrm>
-          <a:prstGeom prst="rect">
-            <a:avLst/>
-          </a:prstGeom>
-          <a:solidFill>
-            <a:srgbClr val="CCD4DD"/>
-          </a:solidFill>
-          <a:ln>
-            <a:noFill/>
-          </a:ln>
-          <a:effectLst/>
-        </p:spPr>
-        <p:style>
-          <a:lnRef idx="1">
-            <a:schemeClr val="accent1"/>
-          </a:lnRef>
-          <a:fillRef idx="3">
-            <a:schemeClr val="accent1"/>
-          </a:fillRef>
-          <a:effectRef idx="2">
-            <a:schemeClr val="accent1"/>
-          </a:effectRef>
-          <a:fontRef idx="minor">
-            <a:schemeClr val="lt1"/>
-          </a:fontRef>
-        </p:style>
-        <p:txBody>
-          <a:bodyPr rtlCol="0" anchor="ctr"/>
-          <a:lstStyle/>
-          <a:p>
-            <a:pPr algn="ctr"/>
-          </a:p>
-        </p:txBody>
-      </p:sp>
-      <p:sp>
-        <p:nvSpPr>
-          <p:cNvPr id="11" name="TextBox 10"/>
+              <a:t>They are not interchangeable, and one is not the arithmetic negative of the other.</a:t>
+            </a:r>
+          </a:p>
+        </p:txBody>
+      </p:sp>
+      <p:sp>
+        <p:nvSpPr>
+          <p:cNvPr id="15" name="TextBox 14"/>
           <p:cNvSpPr txBox="1"/>
           <p:nvPr/>
         </p:nvSpPr>
         <p:spPr>
           <a:xfrm>
-            <a:off x="552450" y="5770575"/>
-            <a:ext cx="11087100" cy="258098"/>
+            <a:off x="552450" y="4846531"/>
+            <a:ext cx="11087100" cy="1172468"/>
           </a:xfrm>
           <a:prstGeom prst="rect">
             <a:avLst/>
@@ -12490,31 +12794,13 @@
               <a:buNone/>
             </a:pPr>
             <a:r>
-              <a:rPr sz="1400" b="0" i="0">
-                <a:solidFill>
-                  <a:srgbClr val="75808D"/>
-                </a:solidFill>
-                <a:latin typeface="Arial"/>
-              </a:rPr>
-              <a:t>Prinja et al., </a:t>
-            </a:r>
-            <a:r>
-              <a:rPr sz="1400" b="0" i="1">
-                <a:solidFill>
-                  <a:srgbClr val="75808D"/>
-                </a:solidFill>
-                <a:latin typeface="Arial"/>
-              </a:rPr>
-              <a:t>Applied Health Economics and Health Policy</a:t>
-            </a:r>
-            <a:r>
-              <a:rPr sz="1400" b="0" i="0">
-                <a:solidFill>
-                  <a:srgbClr val="75808D"/>
-                </a:solidFill>
-                <a:latin typeface="Arial"/>
-              </a:rPr>
-              <a:t>, 2015.</a:t>
+              <a:rPr sz="2200" b="0" i="0">
+                <a:solidFill>
+                  <a:srgbClr val="47525F"/>
+                </a:solidFill>
+                <a:latin typeface="Arial"/>
+              </a:rPr>
+              <a:t>You met DALYs first, through burden-of-disease teaching. Most Indian HTA work now reports QALYs, because the Indian Reference Case asks for them. Watch which one a paper uses.</a:t>
             </a:r>
           </a:p>
         </p:txBody>
@@ -12619,7 +12905,502 @@
                 </a:solidFill>
                 <a:latin typeface="Arial"/>
               </a:rPr>
-              <a:t>Why this matters in your job</a:t>
+              <a:t>Three errors we will keep catching</a:t>
+            </a:r>
+          </a:p>
+        </p:txBody>
+      </p:sp>
+      <p:sp>
+        <p:nvSpPr>
+          <p:cNvPr id="4" name="TextBox 3"/>
+          <p:cNvSpPr txBox="1"/>
+          <p:nvPr/>
+        </p:nvSpPr>
+        <p:spPr>
+          <a:xfrm>
+            <a:off x="1288703" y="1142050"/>
+            <a:ext cx="10350847" cy="959048"/>
+          </a:xfrm>
+          <a:prstGeom prst="rect">
+            <a:avLst/>
+          </a:prstGeom>
+          <a:noFill/>
+        </p:spPr>
+        <p:txBody>
+          <a:bodyPr wrap="square" lIns="0" rIns="0" tIns="0" bIns="0">
+            <a:spAutoFit/>
+          </a:bodyPr>
+          <a:lstStyle/>
+          <a:p>
+            <a:pPr algn="l">
+              <a:lnSpc>
+                <a:spcPct val="112500"/>
+              </a:lnSpc>
+              <a:spcAft>
+                <a:spcPts val="0"/>
+              </a:spcAft>
+              <a:buNone/>
+            </a:pPr>
+            <a:r>
+              <a:rPr sz="2800" b="1" i="0">
+                <a:solidFill>
+                  <a:srgbClr val="10141A"/>
+                </a:solidFill>
+                <a:latin typeface="Arial"/>
+              </a:rPr>
+              <a:t>Calling a costing study a CEA.</a:t>
+            </a:r>
+            <a:r>
+              <a:rPr sz="2800" b="0" i="0">
+                <a:solidFill>
+                  <a:srgbClr val="10141A"/>
+                </a:solidFill>
+                <a:latin typeface="Arial"/>
+              </a:rPr>
+              <a:t> "Cost" in the title does not make it an economic evaluation. Ask Question 1.</a:t>
+            </a:r>
+          </a:p>
+        </p:txBody>
+      </p:sp>
+      <p:sp>
+        <p:nvSpPr>
+          <p:cNvPr id="5" name="TextBox 4"/>
+          <p:cNvSpPr txBox="1"/>
+          <p:nvPr/>
+        </p:nvSpPr>
+        <p:spPr>
+          <a:xfrm>
+            <a:off x="1288703" y="2243080"/>
+            <a:ext cx="10350847" cy="959048"/>
+          </a:xfrm>
+          <a:prstGeom prst="rect">
+            <a:avLst/>
+          </a:prstGeom>
+          <a:noFill/>
+        </p:spPr>
+        <p:txBody>
+          <a:bodyPr wrap="square" lIns="0" rIns="0" tIns="0" bIns="0">
+            <a:spAutoFit/>
+          </a:bodyPr>
+          <a:lstStyle/>
+          <a:p>
+            <a:pPr algn="l">
+              <a:lnSpc>
+                <a:spcPct val="112500"/>
+              </a:lnSpc>
+              <a:spcAft>
+                <a:spcPts val="0"/>
+              </a:spcAft>
+              <a:buNone/>
+            </a:pPr>
+            <a:r>
+              <a:rPr sz="2800" b="1" i="0">
+                <a:solidFill>
+                  <a:srgbClr val="10141A"/>
+                </a:solidFill>
+                <a:latin typeface="Arial"/>
+              </a:rPr>
+              <a:t>Calling a CEA a CUA.</a:t>
+            </a:r>
+            <a:r>
+              <a:rPr sz="2800" b="0" i="0">
+                <a:solidFill>
+                  <a:srgbClr val="10141A"/>
+                </a:solidFill>
+                <a:latin typeface="Arial"/>
+              </a:rPr>
+              <a:t> Cost per case detected is not cost per QALY. Look at the denominator.</a:t>
+            </a:r>
+          </a:p>
+        </p:txBody>
+      </p:sp>
+      <p:sp>
+        <p:nvSpPr>
+          <p:cNvPr id="6" name="TextBox 5"/>
+          <p:cNvSpPr txBox="1"/>
+          <p:nvPr/>
+        </p:nvSpPr>
+        <p:spPr>
+          <a:xfrm>
+            <a:off x="1288703" y="3344111"/>
+            <a:ext cx="10350847" cy="959048"/>
+          </a:xfrm>
+          <a:prstGeom prst="rect">
+            <a:avLst/>
+          </a:prstGeom>
+          <a:noFill/>
+        </p:spPr>
+        <p:txBody>
+          <a:bodyPr wrap="square" lIns="0" rIns="0" tIns="0" bIns="0">
+            <a:spAutoFit/>
+          </a:bodyPr>
+          <a:lstStyle/>
+          <a:p>
+            <a:pPr algn="l">
+              <a:lnSpc>
+                <a:spcPct val="112500"/>
+              </a:lnSpc>
+              <a:spcAft>
+                <a:spcPts val="0"/>
+              </a:spcAft>
+              <a:buNone/>
+            </a:pPr>
+            <a:r>
+              <a:rPr sz="2800" b="1" i="0">
+                <a:solidFill>
+                  <a:srgbClr val="10141A"/>
+                </a:solidFill>
+                <a:latin typeface="Arial"/>
+              </a:rPr>
+              <a:t>Declaring something cost-effective with no threshold and no comparator.</a:t>
+            </a:r>
+            <a:r>
+              <a:rPr sz="2800" b="0" i="0">
+                <a:solidFill>
+                  <a:srgbClr val="10141A"/>
+                </a:solidFill>
+                <a:latin typeface="Arial"/>
+              </a:rPr>
+              <a:t> The phrase is empty without both.</a:t>
+            </a:r>
+          </a:p>
+        </p:txBody>
+      </p:sp>
+      <p:sp>
+        <p:nvSpPr>
+          <p:cNvPr id="7" name="Rectangle 6"/>
+          <p:cNvSpPr/>
+          <p:nvPr/>
+        </p:nvSpPr>
+        <p:spPr>
+          <a:xfrm>
+            <a:off x="552450" y="4485829"/>
+            <a:ext cx="11087100" cy="1032867"/>
+          </a:xfrm>
+          <a:prstGeom prst="rect">
+            <a:avLst/>
+          </a:prstGeom>
+          <a:noFill/>
+          <a:ln>
+            <a:noFill/>
+          </a:ln>
+          <a:effectLst/>
+        </p:spPr>
+        <p:style>
+          <a:lnRef idx="1">
+            <a:schemeClr val="accent1"/>
+          </a:lnRef>
+          <a:fillRef idx="3">
+            <a:schemeClr val="accent1"/>
+          </a:fillRef>
+          <a:effectRef idx="2">
+            <a:schemeClr val="accent1"/>
+          </a:effectRef>
+          <a:fontRef idx="minor">
+            <a:schemeClr val="lt1"/>
+          </a:fontRef>
+        </p:style>
+        <p:txBody>
+          <a:bodyPr rtlCol="0" anchor="ctr"/>
+          <a:lstStyle/>
+          <a:p>
+            <a:pPr algn="ctr"/>
+          </a:p>
+        </p:txBody>
+      </p:sp>
+      <p:sp>
+        <p:nvSpPr>
+          <p:cNvPr id="8" name="Rectangle 7"/>
+          <p:cNvSpPr/>
+          <p:nvPr/>
+        </p:nvSpPr>
+        <p:spPr>
+          <a:xfrm>
+            <a:off x="552450" y="4485829"/>
+            <a:ext cx="57150" cy="1032867"/>
+          </a:xfrm>
+          <a:prstGeom prst="rect">
+            <a:avLst/>
+          </a:prstGeom>
+          <a:solidFill>
+            <a:srgbClr val="8A5A00"/>
+          </a:solidFill>
+          <a:ln>
+            <a:noFill/>
+          </a:ln>
+          <a:effectLst/>
+        </p:spPr>
+        <p:style>
+          <a:lnRef idx="1">
+            <a:schemeClr val="accent1"/>
+          </a:lnRef>
+          <a:fillRef idx="3">
+            <a:schemeClr val="accent1"/>
+          </a:fillRef>
+          <a:effectRef idx="2">
+            <a:schemeClr val="accent1"/>
+          </a:effectRef>
+          <a:fontRef idx="minor">
+            <a:schemeClr val="lt1"/>
+          </a:fontRef>
+        </p:style>
+        <p:txBody>
+          <a:bodyPr rtlCol="0" anchor="ctr"/>
+          <a:lstStyle/>
+          <a:p>
+            <a:pPr algn="ctr"/>
+          </a:p>
+        </p:txBody>
+      </p:sp>
+      <p:sp>
+        <p:nvSpPr>
+          <p:cNvPr id="9" name="TextBox 8"/>
+          <p:cNvSpPr txBox="1"/>
+          <p:nvPr/>
+        </p:nvSpPr>
+        <p:spPr>
+          <a:xfrm>
+            <a:off x="776189" y="4486168"/>
+            <a:ext cx="10863361" cy="1012527"/>
+          </a:xfrm>
+          <a:prstGeom prst="rect">
+            <a:avLst/>
+          </a:prstGeom>
+          <a:noFill/>
+        </p:spPr>
+        <p:txBody>
+          <a:bodyPr wrap="square" lIns="0" rIns="0" tIns="0" bIns="0">
+            <a:spAutoFit/>
+          </a:bodyPr>
+          <a:lstStyle/>
+          <a:p>
+            <a:pPr algn="l">
+              <a:lnSpc>
+                <a:spcPct val="101700"/>
+              </a:lnSpc>
+              <a:spcAft>
+                <a:spcPts val="0"/>
+              </a:spcAft>
+              <a:buNone/>
+            </a:pPr>
+            <a:r>
+              <a:rPr sz="3200" b="1" i="0" spc="-32">
+                <a:solidFill>
+                  <a:srgbClr val="10141A"/>
+                </a:solidFill>
+                <a:latin typeface="Arial"/>
+              </a:rPr>
+              <a:t>A systematic review of Indian evaluations found exactly these problems at scale.</a:t>
+            </a:r>
+          </a:p>
+        </p:txBody>
+      </p:sp>
+      <p:sp>
+        <p:nvSpPr>
+          <p:cNvPr id="10" name="Rectangle 9"/>
+          <p:cNvSpPr/>
+          <p:nvPr/>
+        </p:nvSpPr>
+        <p:spPr>
+          <a:xfrm>
+            <a:off x="552450" y="5701754"/>
+            <a:ext cx="11087100" cy="9525"/>
+          </a:xfrm>
+          <a:prstGeom prst="rect">
+            <a:avLst/>
+          </a:prstGeom>
+          <a:solidFill>
+            <a:srgbClr val="CCD4DD"/>
+          </a:solidFill>
+          <a:ln>
+            <a:noFill/>
+          </a:ln>
+          <a:effectLst/>
+        </p:spPr>
+        <p:style>
+          <a:lnRef idx="1">
+            <a:schemeClr val="accent1"/>
+          </a:lnRef>
+          <a:fillRef idx="3">
+            <a:schemeClr val="accent1"/>
+          </a:fillRef>
+          <a:effectRef idx="2">
+            <a:schemeClr val="accent1"/>
+          </a:effectRef>
+          <a:fontRef idx="minor">
+            <a:schemeClr val="lt1"/>
+          </a:fontRef>
+        </p:style>
+        <p:txBody>
+          <a:bodyPr rtlCol="0" anchor="ctr"/>
+          <a:lstStyle/>
+          <a:p>
+            <a:pPr algn="ctr"/>
+          </a:p>
+        </p:txBody>
+      </p:sp>
+      <p:sp>
+        <p:nvSpPr>
+          <p:cNvPr id="11" name="TextBox 10"/>
+          <p:cNvSpPr txBox="1"/>
+          <p:nvPr/>
+        </p:nvSpPr>
+        <p:spPr>
+          <a:xfrm>
+            <a:off x="552450" y="5770575"/>
+            <a:ext cx="11087100" cy="258098"/>
+          </a:xfrm>
+          <a:prstGeom prst="rect">
+            <a:avLst/>
+          </a:prstGeom>
+          <a:noFill/>
+        </p:spPr>
+        <p:txBody>
+          <a:bodyPr wrap="square" lIns="0" rIns="0" tIns="0" bIns="0">
+            <a:spAutoFit/>
+          </a:bodyPr>
+          <a:lstStyle/>
+          <a:p>
+            <a:pPr algn="l">
+              <a:lnSpc>
+                <a:spcPct val="116700"/>
+              </a:lnSpc>
+              <a:spcAft>
+                <a:spcPts val="0"/>
+              </a:spcAft>
+              <a:buNone/>
+            </a:pPr>
+            <a:r>
+              <a:rPr sz="1400" b="0" i="0">
+                <a:solidFill>
+                  <a:srgbClr val="75808D"/>
+                </a:solidFill>
+                <a:latin typeface="Arial"/>
+              </a:rPr>
+              <a:t>Prinja et al., </a:t>
+            </a:r>
+            <a:r>
+              <a:rPr sz="1400" b="0" i="1">
+                <a:solidFill>
+                  <a:srgbClr val="75808D"/>
+                </a:solidFill>
+                <a:latin typeface="Arial"/>
+              </a:rPr>
+              <a:t>Applied Health Economics and Health Policy</a:t>
+            </a:r>
+            <a:r>
+              <a:rPr sz="1400" b="0" i="0">
+                <a:solidFill>
+                  <a:srgbClr val="75808D"/>
+                </a:solidFill>
+                <a:latin typeface="Arial"/>
+              </a:rPr>
+              <a:t>, 2015.</a:t>
+            </a:r>
+          </a:p>
+        </p:txBody>
+      </p:sp>
+    </p:spTree>
+  </p:cSld>
+  <p:clrMapOvr>
+    <a:masterClrMapping/>
+  </p:clrMapOvr>
+</p:sld>
+</file>
+
+<file path=ppt/slides/slide24.xml><?xml version="1.0" encoding="utf-8"?>
+<p:sld xmlns:a="http://schemas.openxmlformats.org/drawingml/2006/main" xmlns:p="http://schemas.openxmlformats.org/presentationml/2006/main" xmlns:r="http://schemas.openxmlformats.org/officeDocument/2006/relationships">
+  <p:cSld>
+    <p:spTree>
+      <p:nvGrpSpPr>
+        <p:cNvPr id="1" name=""/>
+        <p:cNvGrpSpPr/>
+        <p:nvPr/>
+      </p:nvGrpSpPr>
+      <p:grpSpPr/>
+      <p:sp>
+        <p:nvSpPr>
+          <p:cNvPr id="2" name="Rectangle 1"/>
+          <p:cNvSpPr/>
+          <p:nvPr/>
+        </p:nvSpPr>
+        <p:spPr>
+          <a:xfrm>
+            <a:off x="0" y="0"/>
+            <a:ext cx="12192000" cy="876300"/>
+          </a:xfrm>
+          <a:prstGeom prst="rect">
+            <a:avLst/>
+          </a:prstGeom>
+          <a:solidFill>
+            <a:srgbClr val="162A6C"/>
+          </a:solidFill>
+          <a:ln>
+            <a:noFill/>
+          </a:ln>
+          <a:effectLst/>
+        </p:spPr>
+        <p:style>
+          <a:lnRef idx="1">
+            <a:schemeClr val="accent1"/>
+          </a:lnRef>
+          <a:fillRef idx="3">
+            <a:schemeClr val="accent1"/>
+          </a:fillRef>
+          <a:effectRef idx="2">
+            <a:schemeClr val="accent1"/>
+          </a:effectRef>
+          <a:fontRef idx="minor">
+            <a:schemeClr val="lt1"/>
+          </a:fontRef>
+        </p:style>
+        <p:txBody>
+          <a:bodyPr rtlCol="0" anchor="ctr"/>
+          <a:lstStyle/>
+          <a:p>
+            <a:pPr algn="ctr"/>
+          </a:p>
+        </p:txBody>
+      </p:sp>
+      <p:sp>
+        <p:nvSpPr>
+          <p:cNvPr id="3" name="TextBox 2"/>
+          <p:cNvSpPr txBox="1"/>
+          <p:nvPr/>
+        </p:nvSpPr>
+        <p:spPr>
+          <a:xfrm>
+            <a:off x="552450" y="0"/>
+            <a:ext cx="11087100" cy="876300"/>
+          </a:xfrm>
+          <a:prstGeom prst="rect">
+            <a:avLst/>
+          </a:prstGeom>
+          <a:noFill/>
+        </p:spPr>
+        <p:txBody>
+          <a:bodyPr wrap="square" lIns="0" rIns="0" tIns="0" bIns="0" anchor="ctr">
+            <a:spAutoFit/>
+          </a:bodyPr>
+          <a:lstStyle/>
+          <a:p>
+            <a:pPr algn="l">
+              <a:lnSpc>
+                <a:spcPct val="93300"/>
+              </a:lnSpc>
+              <a:spcAft>
+                <a:spcPts val="0"/>
+              </a:spcAft>
+              <a:buNone/>
+            </a:pPr>
+            <a:r>
+              <a:rPr sz="3000" b="1" i="0" spc="-15">
+                <a:solidFill>
+                  <a:srgbClr val="FFFFFF"/>
+                </a:solidFill>
+                <a:latin typeface="Arial"/>
+              </a:rPr>
+              <a:t>Where this lands on your desk</a:t>
             </a:r>
           </a:p>
         </p:txBody>
@@ -13336,7 +14117,7 @@
 </p:sld>
 </file>
 
-<file path=ppt/slides/slide24.xml><?xml version="1.0" encoding="utf-8"?>
+<file path=ppt/slides/slide25.xml><?xml version="1.0" encoding="utf-8"?>
 <p:sld xmlns:a="http://schemas.openxmlformats.org/drawingml/2006/main" xmlns:p="http://schemas.openxmlformats.org/presentationml/2006/main" xmlns:r="http://schemas.openxmlformats.org/officeDocument/2006/relationships">
   <p:cSld>
     <p:spTree>
@@ -13987,518 +14768,6 @@
 </p:sld>
 </file>
 
-<file path=ppt/slides/slide25.xml><?xml version="1.0" encoding="utf-8"?>
-<p:sld xmlns:a="http://schemas.openxmlformats.org/drawingml/2006/main" xmlns:p="http://schemas.openxmlformats.org/presentationml/2006/main" xmlns:r="http://schemas.openxmlformats.org/officeDocument/2006/relationships">
-  <p:cSld>
-    <p:spTree>
-      <p:nvGrpSpPr>
-        <p:cNvPr id="1" name=""/>
-        <p:cNvGrpSpPr/>
-        <p:nvPr/>
-      </p:nvGrpSpPr>
-      <p:grpSpPr/>
-      <p:sp>
-        <p:nvSpPr>
-          <p:cNvPr id="2" name="Rectangle 1"/>
-          <p:cNvSpPr/>
-          <p:nvPr/>
-        </p:nvSpPr>
-        <p:spPr>
-          <a:xfrm>
-            <a:off x="0" y="0"/>
-            <a:ext cx="12192000" cy="876300"/>
-          </a:xfrm>
-          <a:prstGeom prst="rect">
-            <a:avLst/>
-          </a:prstGeom>
-          <a:solidFill>
-            <a:srgbClr val="162A6C"/>
-          </a:solidFill>
-          <a:ln>
-            <a:noFill/>
-          </a:ln>
-          <a:effectLst/>
-        </p:spPr>
-        <p:style>
-          <a:lnRef idx="1">
-            <a:schemeClr val="accent1"/>
-          </a:lnRef>
-          <a:fillRef idx="3">
-            <a:schemeClr val="accent1"/>
-          </a:fillRef>
-          <a:effectRef idx="2">
-            <a:schemeClr val="accent1"/>
-          </a:effectRef>
-          <a:fontRef idx="minor">
-            <a:schemeClr val="lt1"/>
-          </a:fontRef>
-        </p:style>
-        <p:txBody>
-          <a:bodyPr rtlCol="0" anchor="ctr"/>
-          <a:lstStyle/>
-          <a:p>
-            <a:pPr algn="ctr"/>
-          </a:p>
-        </p:txBody>
-      </p:sp>
-      <p:sp>
-        <p:nvSpPr>
-          <p:cNvPr id="3" name="TextBox 2"/>
-          <p:cNvSpPr txBox="1"/>
-          <p:nvPr/>
-        </p:nvSpPr>
-        <p:spPr>
-          <a:xfrm>
-            <a:off x="552450" y="0"/>
-            <a:ext cx="11087100" cy="876300"/>
-          </a:xfrm>
-          <a:prstGeom prst="rect">
-            <a:avLst/>
-          </a:prstGeom>
-          <a:noFill/>
-        </p:spPr>
-        <p:txBody>
-          <a:bodyPr wrap="square" lIns="0" rIns="0" tIns="0" bIns="0" anchor="ctr">
-            <a:spAutoFit/>
-          </a:bodyPr>
-          <a:lstStyle/>
-          <a:p>
-            <a:pPr algn="l">
-              <a:lnSpc>
-                <a:spcPct val="93300"/>
-              </a:lnSpc>
-              <a:spcAft>
-                <a:spcPts val="0"/>
-              </a:spcAft>
-              <a:buNone/>
-            </a:pPr>
-            <a:r>
-              <a:rPr sz="3000" b="1" i="0" spc="-15">
-                <a:solidFill>
-                  <a:srgbClr val="FFFFFF"/>
-                </a:solidFill>
-                <a:latin typeface="Arial"/>
-              </a:rPr>
-              <a:t>Recap</a:t>
-            </a:r>
-          </a:p>
-        </p:txBody>
-      </p:sp>
-      <p:sp>
-        <p:nvSpPr>
-          <p:cNvPr id="4" name="TextBox 3"/>
-          <p:cNvSpPr txBox="1"/>
-          <p:nvPr/>
-        </p:nvSpPr>
-        <p:spPr>
-          <a:xfrm>
-            <a:off x="1288703" y="1142050"/>
-            <a:ext cx="10350847" cy="959048"/>
-          </a:xfrm>
-          <a:prstGeom prst="rect">
-            <a:avLst/>
-          </a:prstGeom>
-          <a:noFill/>
-        </p:spPr>
-        <p:txBody>
-          <a:bodyPr wrap="square" lIns="0" rIns="0" tIns="0" bIns="0">
-            <a:spAutoFit/>
-          </a:bodyPr>
-          <a:lstStyle/>
-          <a:p>
-            <a:pPr algn="l">
-              <a:lnSpc>
-                <a:spcPct val="112500"/>
-              </a:lnSpc>
-              <a:spcAft>
-                <a:spcPts val="0"/>
-              </a:spcAft>
-              <a:buNone/>
-            </a:pPr>
-            <a:r>
-              <a:rPr sz="2800" b="1" i="0">
-                <a:solidFill>
-                  <a:srgbClr val="10141A"/>
-                </a:solidFill>
-                <a:latin typeface="Arial"/>
-              </a:rPr>
-              <a:t>Opportunity cost</a:t>
-            </a:r>
-            <a:r>
-              <a:rPr sz="2800" b="0" i="0">
-                <a:solidFill>
-                  <a:srgbClr val="10141A"/>
-                </a:solidFill>
-                <a:latin typeface="Arial"/>
-              </a:rPr>
-              <a:t>, the health forgone elsewhere, is why any of this exists</a:t>
-            </a:r>
-          </a:p>
-        </p:txBody>
-      </p:sp>
-      <p:sp>
-        <p:nvSpPr>
-          <p:cNvPr id="5" name="TextBox 4"/>
-          <p:cNvSpPr txBox="1"/>
-          <p:nvPr/>
-        </p:nvSpPr>
-        <p:spPr>
-          <a:xfrm>
-            <a:off x="1288703" y="2243080"/>
-            <a:ext cx="10350847" cy="959048"/>
-          </a:xfrm>
-          <a:prstGeom prst="rect">
-            <a:avLst/>
-          </a:prstGeom>
-          <a:noFill/>
-        </p:spPr>
-        <p:txBody>
-          <a:bodyPr wrap="square" lIns="0" rIns="0" tIns="0" bIns="0">
-            <a:spAutoFit/>
-          </a:bodyPr>
-          <a:lstStyle/>
-          <a:p>
-            <a:pPr algn="l">
-              <a:lnSpc>
-                <a:spcPct val="112500"/>
-              </a:lnSpc>
-              <a:spcAft>
-                <a:spcPts val="0"/>
-              </a:spcAft>
-              <a:buNone/>
-            </a:pPr>
-            <a:r>
-              <a:rPr sz="2800" b="0" i="0">
-                <a:solidFill>
-                  <a:srgbClr val="10141A"/>
-                </a:solidFill>
-                <a:latin typeface="Arial"/>
-              </a:rPr>
-              <a:t>An economic evaluation compares </a:t>
-            </a:r>
-            <a:r>
-              <a:rPr sz="2800" b="1" i="0">
-                <a:solidFill>
-                  <a:srgbClr val="10141A"/>
-                </a:solidFill>
-                <a:latin typeface="Arial"/>
-              </a:rPr>
-              <a:t>costs and consequences</a:t>
-            </a:r>
-            <a:r>
-              <a:rPr sz="2800" b="0" i="0">
-                <a:solidFill>
-                  <a:srgbClr val="10141A"/>
-                </a:solidFill>
-                <a:latin typeface="Arial"/>
-              </a:rPr>
-              <a:t> across </a:t>
-            </a:r>
-            <a:r>
-              <a:rPr sz="2800" b="1" i="0">
-                <a:solidFill>
-                  <a:srgbClr val="10141A"/>
-                </a:solidFill>
-                <a:latin typeface="Arial"/>
-              </a:rPr>
-              <a:t>two or more alternatives</a:t>
-            </a:r>
-          </a:p>
-        </p:txBody>
-      </p:sp>
-      <p:sp>
-        <p:nvSpPr>
-          <p:cNvPr id="6" name="TextBox 5"/>
-          <p:cNvSpPr txBox="1"/>
-          <p:nvPr/>
-        </p:nvSpPr>
-        <p:spPr>
-          <a:xfrm>
-            <a:off x="1288703" y="3344111"/>
-            <a:ext cx="10350847" cy="959048"/>
-          </a:xfrm>
-          <a:prstGeom prst="rect">
-            <a:avLst/>
-          </a:prstGeom>
-          <a:noFill/>
-        </p:spPr>
-        <p:txBody>
-          <a:bodyPr wrap="square" lIns="0" rIns="0" tIns="0" bIns="0">
-            <a:spAutoFit/>
-          </a:bodyPr>
-          <a:lstStyle/>
-          <a:p>
-            <a:pPr algn="l">
-              <a:lnSpc>
-                <a:spcPct val="112500"/>
-              </a:lnSpc>
-              <a:spcAft>
-                <a:spcPts val="0"/>
-              </a:spcAft>
-              <a:buNone/>
-            </a:pPr>
-            <a:r>
-              <a:rPr sz="2800" b="0" i="0">
-                <a:solidFill>
-                  <a:srgbClr val="10141A"/>
-                </a:solidFill>
-                <a:latin typeface="Arial"/>
-              </a:rPr>
-              <a:t>The </a:t>
-            </a:r>
-            <a:r>
-              <a:rPr sz="2800" b="1" i="0">
-                <a:solidFill>
-                  <a:srgbClr val="10141A"/>
-                </a:solidFill>
-                <a:latin typeface="Arial"/>
-              </a:rPr>
-              <a:t>two questions</a:t>
-            </a:r>
-            <a:r>
-              <a:rPr sz="2800" b="0" i="0">
-                <a:solidFill>
-                  <a:srgbClr val="10141A"/>
-                </a:solidFill>
-                <a:latin typeface="Arial"/>
-              </a:rPr>
-              <a:t> sort every study into six boxes. Five are partial</a:t>
-            </a:r>
-          </a:p>
-        </p:txBody>
-      </p:sp>
-      <p:sp>
-        <p:nvSpPr>
-          <p:cNvPr id="7" name="TextBox 6"/>
-          <p:cNvSpPr txBox="1"/>
-          <p:nvPr/>
-        </p:nvSpPr>
-        <p:spPr>
-          <a:xfrm>
-            <a:off x="1288703" y="4445141"/>
-            <a:ext cx="10350847" cy="479524"/>
-          </a:xfrm>
-          <a:prstGeom prst="rect">
-            <a:avLst/>
-          </a:prstGeom>
-          <a:noFill/>
-        </p:spPr>
-        <p:txBody>
-          <a:bodyPr wrap="square" lIns="0" rIns="0" tIns="0" bIns="0">
-            <a:spAutoFit/>
-          </a:bodyPr>
-          <a:lstStyle/>
-          <a:p>
-            <a:pPr algn="l">
-              <a:lnSpc>
-                <a:spcPct val="112500"/>
-              </a:lnSpc>
-              <a:spcAft>
-                <a:spcPts val="0"/>
-              </a:spcAft>
-              <a:buNone/>
-            </a:pPr>
-            <a:r>
-              <a:rPr sz="2800" b="0" i="0">
-                <a:solidFill>
-                  <a:srgbClr val="10141A"/>
-                </a:solidFill>
-                <a:latin typeface="Arial"/>
-              </a:rPr>
-              <a:t>The four full types differ only in </a:t>
-            </a:r>
-            <a:r>
-              <a:rPr sz="2800" b="1" i="0">
-                <a:solidFill>
-                  <a:srgbClr val="10141A"/>
-                </a:solidFill>
-                <a:latin typeface="Arial"/>
-              </a:rPr>
-              <a:t>how consequences are valued</a:t>
-            </a:r>
-          </a:p>
-        </p:txBody>
-      </p:sp>
-      <p:sp>
-        <p:nvSpPr>
-          <p:cNvPr id="8" name="Rectangle 7"/>
-          <p:cNvSpPr/>
-          <p:nvPr/>
-        </p:nvSpPr>
-        <p:spPr>
-          <a:xfrm>
-            <a:off x="552450" y="5086648"/>
-            <a:ext cx="11087100" cy="1032867"/>
-          </a:xfrm>
-          <a:prstGeom prst="rect">
-            <a:avLst/>
-          </a:prstGeom>
-          <a:noFill/>
-          <a:ln>
-            <a:noFill/>
-          </a:ln>
-          <a:effectLst/>
-        </p:spPr>
-        <p:style>
-          <a:lnRef idx="1">
-            <a:schemeClr val="accent1"/>
-          </a:lnRef>
-          <a:fillRef idx="3">
-            <a:schemeClr val="accent1"/>
-          </a:fillRef>
-          <a:effectRef idx="2">
-            <a:schemeClr val="accent1"/>
-          </a:effectRef>
-          <a:fontRef idx="minor">
-            <a:schemeClr val="lt1"/>
-          </a:fontRef>
-        </p:style>
-        <p:txBody>
-          <a:bodyPr rtlCol="0" anchor="ctr"/>
-          <a:lstStyle/>
-          <a:p>
-            <a:pPr algn="ctr"/>
-          </a:p>
-        </p:txBody>
-      </p:sp>
-      <p:sp>
-        <p:nvSpPr>
-          <p:cNvPr id="9" name="Rectangle 8"/>
-          <p:cNvSpPr/>
-          <p:nvPr/>
-        </p:nvSpPr>
-        <p:spPr>
-          <a:xfrm>
-            <a:off x="552450" y="5086648"/>
-            <a:ext cx="57150" cy="1032867"/>
-          </a:xfrm>
-          <a:prstGeom prst="rect">
-            <a:avLst/>
-          </a:prstGeom>
-          <a:solidFill>
-            <a:srgbClr val="162A6C"/>
-          </a:solidFill>
-          <a:ln>
-            <a:noFill/>
-          </a:ln>
-          <a:effectLst/>
-        </p:spPr>
-        <p:style>
-          <a:lnRef idx="1">
-            <a:schemeClr val="accent1"/>
-          </a:lnRef>
-          <a:fillRef idx="3">
-            <a:schemeClr val="accent1"/>
-          </a:fillRef>
-          <a:effectRef idx="2">
-            <a:schemeClr val="accent1"/>
-          </a:effectRef>
-          <a:fontRef idx="minor">
-            <a:schemeClr val="lt1"/>
-          </a:fontRef>
-        </p:style>
-        <p:txBody>
-          <a:bodyPr rtlCol="0" anchor="ctr"/>
-          <a:lstStyle/>
-          <a:p>
-            <a:pPr algn="ctr"/>
-          </a:p>
-        </p:txBody>
-      </p:sp>
-      <p:sp>
-        <p:nvSpPr>
-          <p:cNvPr id="10" name="TextBox 9"/>
-          <p:cNvSpPr txBox="1"/>
-          <p:nvPr/>
-        </p:nvSpPr>
-        <p:spPr>
-          <a:xfrm>
-            <a:off x="776189" y="5086988"/>
-            <a:ext cx="10863361" cy="1012527"/>
-          </a:xfrm>
-          <a:prstGeom prst="rect">
-            <a:avLst/>
-          </a:prstGeom>
-          <a:noFill/>
-        </p:spPr>
-        <p:txBody>
-          <a:bodyPr wrap="square" lIns="0" rIns="0" tIns="0" bIns="0">
-            <a:spAutoFit/>
-          </a:bodyPr>
-          <a:lstStyle/>
-          <a:p>
-            <a:pPr algn="l">
-              <a:lnSpc>
-                <a:spcPct val="101700"/>
-              </a:lnSpc>
-              <a:spcAft>
-                <a:spcPts val="0"/>
-              </a:spcAft>
-              <a:buNone/>
-            </a:pPr>
-            <a:r>
-              <a:rPr sz="3200" b="1" i="0" spc="-32">
-                <a:solidFill>
-                  <a:srgbClr val="10141A"/>
-                </a:solidFill>
-                <a:latin typeface="Arial"/>
-              </a:rPr>
-              <a:t>Nothing so far tells you whether ₹54,881 per QALY is good value.</a:t>
-            </a:r>
-          </a:p>
-        </p:txBody>
-      </p:sp>
-      <p:sp>
-        <p:nvSpPr>
-          <p:cNvPr id="11" name="TextBox 10"/>
-          <p:cNvSpPr txBox="1"/>
-          <p:nvPr/>
-        </p:nvSpPr>
-        <p:spPr>
-          <a:xfrm>
-            <a:off x="552450" y="6140145"/>
-            <a:ext cx="11087100" cy="390823"/>
-          </a:xfrm>
-          <a:prstGeom prst="rect">
-            <a:avLst/>
-          </a:prstGeom>
-          <a:noFill/>
-        </p:spPr>
-        <p:txBody>
-          <a:bodyPr wrap="square" lIns="0" rIns="0" tIns="0" bIns="0">
-            <a:spAutoFit/>
-          </a:bodyPr>
-          <a:lstStyle/>
-          <a:p>
-            <a:pPr algn="l">
-              <a:lnSpc>
-                <a:spcPct val="116700"/>
-              </a:lnSpc>
-              <a:spcAft>
-                <a:spcPts val="0"/>
-              </a:spcAft>
-              <a:buNone/>
-            </a:pPr>
-            <a:r>
-              <a:rPr sz="2200" b="0" i="0">
-                <a:solidFill>
-                  <a:srgbClr val="47525F"/>
-                </a:solidFill>
-                <a:latin typeface="Arial"/>
-              </a:rPr>
-              <a:t>Hold it until after lunch. First, was that the right question?</a:t>
-            </a:r>
-          </a:p>
-        </p:txBody>
-      </p:sp>
-    </p:spTree>
-  </p:cSld>
-  <p:clrMapOvr>
-    <a:masterClrMapping/>
-  </p:clrMapOvr>
-</p:sld>
-</file>
-
 <file path=ppt/slides/slide26.xml><?xml version="1.0" encoding="utf-8"?>
 <p:sld xmlns:a="http://schemas.openxmlformats.org/drawingml/2006/main" xmlns:p="http://schemas.openxmlformats.org/presentationml/2006/main" xmlns:r="http://schemas.openxmlformats.org/officeDocument/2006/relationships">
   <p:cSld>
@@ -14591,7 +14860,7 @@
                 </a:solidFill>
                 <a:latin typeface="Arial"/>
               </a:rPr>
-              <a:t>Sources</a:t>
+              <a:t>Recap</a:t>
             </a:r>
           </a:p>
         </p:txBody>
@@ -14604,8 +14873,8 @@
         </p:nvSpPr>
         <p:spPr>
           <a:xfrm>
-            <a:off x="1111002" y="1142050"/>
-            <a:ext cx="10528548" cy="479524"/>
+            <a:off x="1288703" y="1142050"/>
+            <a:ext cx="10350847" cy="959048"/>
           </a:xfrm>
           <a:prstGeom prst="rect">
             <a:avLst/>
@@ -14628,40 +14897,22 @@
               <a:buNone/>
             </a:pPr>
             <a:r>
-              <a:rPr sz="1400" b="1" i="0">
+              <a:rPr sz="2800" b="1" i="0">
                 <a:solidFill>
                   <a:srgbClr val="10141A"/>
                 </a:solidFill>
                 <a:latin typeface="Arial"/>
               </a:rPr>
-              <a:t>Drummond MF, Sculpher MJ, Claxton K, Stoddart GL, Torrance GW.</a:t>
-            </a:r>
-            <a:r>
-              <a:rPr sz="1400" b="0" i="0">
-                <a:solidFill>
-                  <a:srgbClr val="47525F"/>
-                </a:solidFill>
-                <a:latin typeface="Arial"/>
-              </a:rPr>
-              <a:t> Methods for the Economic Evaluation of Health Care Programmes. 4th ed. Oxford University Press; 2015. </a:t>
-            </a:r>
-            <a:r>
-              <a:rPr sz="1400" b="1" i="0">
+              <a:t>Opportunity cost</a:t>
+            </a:r>
+            <a:r>
+              <a:rPr sz="2800" b="0" i="0">
                 <a:solidFill>
                   <a:srgbClr val="10141A"/>
                 </a:solidFill>
                 <a:latin typeface="Arial"/>
               </a:rPr>
-              <a:t>Chapter 1</a:t>
-            </a:r>
-            <a:r>
-              <a:rPr sz="1400" b="0" i="0">
-                <a:solidFill>
-                  <a:srgbClr val="47525F"/>
-                </a:solidFill>
-                <a:latin typeface="Arial"/>
-              </a:rPr>
-              <a:t>, pp. 1–19.</a:t>
+              <a:t>, the health forgone elsewhere, is why any of this exists</a:t>
             </a:r>
           </a:p>
         </p:txBody>
@@ -14674,8 +14925,8 @@
         </p:nvSpPr>
         <p:spPr>
           <a:xfrm>
-            <a:off x="1111002" y="1710276"/>
-            <a:ext cx="10528548" cy="479524"/>
+            <a:off x="1288703" y="2243080"/>
+            <a:ext cx="10350847" cy="959048"/>
           </a:xfrm>
           <a:prstGeom prst="rect">
             <a:avLst/>
@@ -14698,22 +14949,40 @@
               <a:buNone/>
             </a:pPr>
             <a:r>
-              <a:rPr sz="1400" b="1" i="0">
+              <a:rPr sz="2800" b="0" i="0">
                 <a:solidFill>
                   <a:srgbClr val="10141A"/>
                 </a:solidFill>
                 <a:latin typeface="Arial"/>
               </a:rPr>
-              <a:t>Press Information Bureau, Government of India.</a:t>
-            </a:r>
-            <a:r>
-              <a:rPr sz="1400" b="0" i="0">
-                <a:solidFill>
-                  <a:srgbClr val="47525F"/>
-                </a:solidFill>
-                <a:latin typeface="Arial"/>
-              </a:rPr>
-              <a:t> Cervical Cancer Vaccination Campaign launched. 28 February 2026. Burden figures from GLOBOCAN 2022.</a:t>
+              <a:t>An economic evaluation compares </a:t>
+            </a:r>
+            <a:r>
+              <a:rPr sz="2800" b="1" i="0">
+                <a:solidFill>
+                  <a:srgbClr val="10141A"/>
+                </a:solidFill>
+                <a:latin typeface="Arial"/>
+              </a:rPr>
+              <a:t>costs and consequences</a:t>
+            </a:r>
+            <a:r>
+              <a:rPr sz="2800" b="0" i="0">
+                <a:solidFill>
+                  <a:srgbClr val="10141A"/>
+                </a:solidFill>
+                <a:latin typeface="Arial"/>
+              </a:rPr>
+              <a:t> across </a:t>
+            </a:r>
+            <a:r>
+              <a:rPr sz="2800" b="1" i="0">
+                <a:solidFill>
+                  <a:srgbClr val="10141A"/>
+                </a:solidFill>
+                <a:latin typeface="Arial"/>
+              </a:rPr>
+              <a:t>two or more alternatives</a:t>
             </a:r>
           </a:p>
         </p:txBody>
@@ -14726,8 +14995,8 @@
         </p:nvSpPr>
         <p:spPr>
           <a:xfrm>
-            <a:off x="1111002" y="2278502"/>
-            <a:ext cx="10528548" cy="479524"/>
+            <a:off x="1288703" y="3344111"/>
+            <a:ext cx="10350847" cy="959048"/>
           </a:xfrm>
           <a:prstGeom prst="rect">
             <a:avLst/>
@@ -14750,40 +15019,31 @@
               <a:buNone/>
             </a:pPr>
             <a:r>
-              <a:rPr sz="1400" b="1" i="0">
+              <a:rPr sz="2800" b="0" i="0">
                 <a:solidFill>
                   <a:srgbClr val="10141A"/>
                 </a:solidFill>
                 <a:latin typeface="Arial"/>
               </a:rPr>
-              <a:t>Ramamoorthy T, Kulothungan V, Sathishkumar K, et al.</a:t>
-            </a:r>
-            <a:r>
-              <a:rPr sz="1400" b="0" i="0">
-                <a:solidFill>
-                  <a:srgbClr val="47525F"/>
-                </a:solidFill>
-                <a:latin typeface="Arial"/>
-              </a:rPr>
-              <a:t> Burden of cervical cancer in India: YLL, YLD and DALYs at national and subnational levels. </a:t>
-            </a:r>
-            <a:r>
-              <a:rPr sz="1400" b="0" i="1">
-                <a:solidFill>
-                  <a:srgbClr val="47525F"/>
-                </a:solidFill>
-                <a:latin typeface="Arial"/>
-              </a:rPr>
-              <a:t>Reprod Health</a:t>
-            </a:r>
-            <a:r>
-              <a:rPr sz="1400" b="0" i="0">
-                <a:solidFill>
-                  <a:srgbClr val="47525F"/>
-                </a:solidFill>
-                <a:latin typeface="Arial"/>
-              </a:rPr>
-              <a:t> 2024;21:111. PMID 39075548</a:t>
+              <a:t>The </a:t>
+            </a:r>
+            <a:r>
+              <a:rPr sz="2800" b="1" i="0">
+                <a:solidFill>
+                  <a:srgbClr val="10141A"/>
+                </a:solidFill>
+                <a:latin typeface="Arial"/>
+              </a:rPr>
+              <a:t>two questions</a:t>
+            </a:r>
+            <a:r>
+              <a:rPr sz="2800" b="0" i="0">
+                <a:solidFill>
+                  <a:srgbClr val="10141A"/>
+                </a:solidFill>
+                <a:latin typeface="Arial"/>
+              </a:rPr>
+              <a:t> sort every study into six boxes. Five are partial</a:t>
             </a:r>
           </a:p>
         </p:txBody>
@@ -14796,8 +15056,8 @@
         </p:nvSpPr>
         <p:spPr>
           <a:xfrm>
-            <a:off x="1111002" y="2846727"/>
-            <a:ext cx="10528548" cy="479524"/>
+            <a:off x="1288703" y="4445141"/>
+            <a:ext cx="10350847" cy="479524"/>
           </a:xfrm>
           <a:prstGeom prst="rect">
             <a:avLst/>
@@ -14820,54 +15080,122 @@
               <a:buNone/>
             </a:pPr>
             <a:r>
-              <a:rPr sz="1400" b="1" i="0">
+              <a:rPr sz="2800" b="0" i="0">
                 <a:solidFill>
                   <a:srgbClr val="10141A"/>
                 </a:solidFill>
                 <a:latin typeface="Arial"/>
               </a:rPr>
-              <a:t>Singh MP, Chauhan AS, Rai B, et al.</a:t>
-            </a:r>
-            <a:r>
-              <a:rPr sz="1400" b="0" i="0">
-                <a:solidFill>
-                  <a:srgbClr val="47525F"/>
-                </a:solidFill>
-                <a:latin typeface="Arial"/>
-              </a:rPr>
-              <a:t> Cost of treatment for cervical cancer in India. </a:t>
-            </a:r>
-            <a:r>
-              <a:rPr sz="1400" b="0" i="1">
-                <a:solidFill>
-                  <a:srgbClr val="47525F"/>
-                </a:solidFill>
-                <a:latin typeface="Arial"/>
-              </a:rPr>
-              <a:t>Asian Pac J Cancer Prev</a:t>
-            </a:r>
-            <a:r>
-              <a:rPr sz="1400" b="0" i="0">
-                <a:solidFill>
-                  <a:srgbClr val="47525F"/>
-                </a:solidFill>
-                <a:latin typeface="Arial"/>
-              </a:rPr>
-              <a:t> 2020;21(9):2639–46. PMID 32986363</a:t>
-            </a:r>
-          </a:p>
-        </p:txBody>
-      </p:sp>
-      <p:sp>
-        <p:nvSpPr>
-          <p:cNvPr id="8" name="TextBox 7"/>
+              <a:t>The four full types differ only in </a:t>
+            </a:r>
+            <a:r>
+              <a:rPr sz="2800" b="1" i="0">
+                <a:solidFill>
+                  <a:srgbClr val="10141A"/>
+                </a:solidFill>
+                <a:latin typeface="Arial"/>
+              </a:rPr>
+              <a:t>how consequences are valued</a:t>
+            </a:r>
+          </a:p>
+        </p:txBody>
+      </p:sp>
+      <p:sp>
+        <p:nvSpPr>
+          <p:cNvPr id="8" name="Rectangle 7"/>
+          <p:cNvSpPr/>
+          <p:nvPr/>
+        </p:nvSpPr>
+        <p:spPr>
+          <a:xfrm>
+            <a:off x="552450" y="5086648"/>
+            <a:ext cx="11087100" cy="1032867"/>
+          </a:xfrm>
+          <a:prstGeom prst="rect">
+            <a:avLst/>
+          </a:prstGeom>
+          <a:noFill/>
+          <a:ln>
+            <a:noFill/>
+          </a:ln>
+          <a:effectLst/>
+        </p:spPr>
+        <p:style>
+          <a:lnRef idx="1">
+            <a:schemeClr val="accent1"/>
+          </a:lnRef>
+          <a:fillRef idx="3">
+            <a:schemeClr val="accent1"/>
+          </a:fillRef>
+          <a:effectRef idx="2">
+            <a:schemeClr val="accent1"/>
+          </a:effectRef>
+          <a:fontRef idx="minor">
+            <a:schemeClr val="lt1"/>
+          </a:fontRef>
+        </p:style>
+        <p:txBody>
+          <a:bodyPr rtlCol="0" anchor="ctr"/>
+          <a:lstStyle/>
+          <a:p>
+            <a:pPr algn="ctr"/>
+          </a:p>
+        </p:txBody>
+      </p:sp>
+      <p:sp>
+        <p:nvSpPr>
+          <p:cNvPr id="9" name="Rectangle 8"/>
+          <p:cNvSpPr/>
+          <p:nvPr/>
+        </p:nvSpPr>
+        <p:spPr>
+          <a:xfrm>
+            <a:off x="552450" y="5086648"/>
+            <a:ext cx="57150" cy="1032867"/>
+          </a:xfrm>
+          <a:prstGeom prst="rect">
+            <a:avLst/>
+          </a:prstGeom>
+          <a:solidFill>
+            <a:srgbClr val="162A6C"/>
+          </a:solidFill>
+          <a:ln>
+            <a:noFill/>
+          </a:ln>
+          <a:effectLst/>
+        </p:spPr>
+        <p:style>
+          <a:lnRef idx="1">
+            <a:schemeClr val="accent1"/>
+          </a:lnRef>
+          <a:fillRef idx="3">
+            <a:schemeClr val="accent1"/>
+          </a:fillRef>
+          <a:effectRef idx="2">
+            <a:schemeClr val="accent1"/>
+          </a:effectRef>
+          <a:fontRef idx="minor">
+            <a:schemeClr val="lt1"/>
+          </a:fontRef>
+        </p:style>
+        <p:txBody>
+          <a:bodyPr rtlCol="0" anchor="ctr"/>
+          <a:lstStyle/>
+          <a:p>
+            <a:pPr algn="ctr"/>
+          </a:p>
+        </p:txBody>
+      </p:sp>
+      <p:sp>
+        <p:nvSpPr>
+          <p:cNvPr id="10" name="TextBox 9"/>
           <p:cNvSpPr txBox="1"/>
           <p:nvPr/>
         </p:nvSpPr>
         <p:spPr>
           <a:xfrm>
-            <a:off x="1111002" y="3414953"/>
-            <a:ext cx="10528548" cy="479524"/>
+            <a:off x="776189" y="5086988"/>
+            <a:ext cx="10863361" cy="1012527"/>
           </a:xfrm>
           <a:prstGeom prst="rect">
             <a:avLst/>
@@ -14882,7 +15210,7 @@
           <a:p>
             <a:pPr algn="l">
               <a:lnSpc>
-                <a:spcPct val="112500"/>
+                <a:spcPct val="101700"/>
               </a:lnSpc>
               <a:spcAft>
                 <a:spcPts val="0"/>
@@ -14890,54 +15218,27 @@
               <a:buNone/>
             </a:pPr>
             <a:r>
-              <a:rPr sz="1400" b="1" i="0">
+              <a:rPr sz="3200" b="1" i="0" spc="-32">
                 <a:solidFill>
                   <a:srgbClr val="10141A"/>
                 </a:solidFill>
                 <a:latin typeface="Arial"/>
               </a:rPr>
-              <a:t>Sankaranarayanan R, Nene BM, Shastri SS, et al.</a:t>
-            </a:r>
-            <a:r>
-              <a:rPr sz="1400" b="0" i="0">
-                <a:solidFill>
-                  <a:srgbClr val="47525F"/>
-                </a:solidFill>
-                <a:latin typeface="Arial"/>
-              </a:rPr>
-              <a:t> HPV screening for cervical cancer in rural India. </a:t>
-            </a:r>
-            <a:r>
-              <a:rPr sz="1400" b="0" i="1">
-                <a:solidFill>
-                  <a:srgbClr val="47525F"/>
-                </a:solidFill>
-                <a:latin typeface="Arial"/>
-              </a:rPr>
-              <a:t>N Engl J Med</a:t>
-            </a:r>
-            <a:r>
-              <a:rPr sz="1400" b="0" i="0">
-                <a:solidFill>
-                  <a:srgbClr val="47525F"/>
-                </a:solidFill>
-                <a:latin typeface="Arial"/>
-              </a:rPr>
-              <a:t> 2009;360:1385–94. PMID 19339719</a:t>
-            </a:r>
-          </a:p>
-        </p:txBody>
-      </p:sp>
-      <p:sp>
-        <p:nvSpPr>
-          <p:cNvPr id="9" name="TextBox 8"/>
+              <a:t>Nothing so far tells you whether ₹54,881 per QALY is good value.</a:t>
+            </a:r>
+          </a:p>
+        </p:txBody>
+      </p:sp>
+      <p:sp>
+        <p:nvSpPr>
+          <p:cNvPr id="11" name="TextBox 10"/>
           <p:cNvSpPr txBox="1"/>
           <p:nvPr/>
         </p:nvSpPr>
         <p:spPr>
           <a:xfrm>
-            <a:off x="1111002" y="3983179"/>
-            <a:ext cx="10528548" cy="479524"/>
+            <a:off x="552450" y="6140145"/>
+            <a:ext cx="11087100" cy="390823"/>
           </a:xfrm>
           <a:prstGeom prst="rect">
             <a:avLst/>
@@ -14952,7 +15253,7 @@
           <a:p>
             <a:pPr algn="l">
               <a:lnSpc>
-                <a:spcPct val="112500"/>
+                <a:spcPct val="116700"/>
               </a:lnSpc>
               <a:spcAft>
                 <a:spcPts val="0"/>
@@ -14960,250 +15261,13 @@
               <a:buNone/>
             </a:pPr>
             <a:r>
-              <a:rPr sz="1400" b="1" i="0">
-                <a:solidFill>
-                  <a:srgbClr val="10141A"/>
-                </a:solidFill>
-                <a:latin typeface="Arial"/>
-              </a:rPr>
-              <a:t>Chauhan AS, Prinja S, Srinivasan R, et al.</a:t>
-            </a:r>
-            <a:r>
-              <a:rPr sz="1400" b="0" i="0">
+              <a:rPr sz="2200" b="0" i="0">
                 <a:solidFill>
                   <a:srgbClr val="47525F"/>
                 </a:solidFill>
                 <a:latin typeface="Arial"/>
               </a:rPr>
-              <a:t> Cost effectiveness of strategies for cervical cancer prevention in India. </a:t>
-            </a:r>
-            <a:r>
-              <a:rPr sz="1400" b="0" i="1">
-                <a:solidFill>
-                  <a:srgbClr val="47525F"/>
-                </a:solidFill>
-                <a:latin typeface="Arial"/>
-              </a:rPr>
-              <a:t>PLoS One</a:t>
-            </a:r>
-            <a:r>
-              <a:rPr sz="1400" b="0" i="0">
-                <a:solidFill>
-                  <a:srgbClr val="47525F"/>
-                </a:solidFill>
-                <a:latin typeface="Arial"/>
-              </a:rPr>
-              <a:t> 2020;15(9):e0238291. PMID 32870941</a:t>
-            </a:r>
-          </a:p>
-        </p:txBody>
-      </p:sp>
-      <p:sp>
-        <p:nvSpPr>
-          <p:cNvPr id="10" name="TextBox 9"/>
-          <p:cNvSpPr txBox="1"/>
-          <p:nvPr/>
-        </p:nvSpPr>
-        <p:spPr>
-          <a:xfrm>
-            <a:off x="1111002" y="4551405"/>
-            <a:ext cx="10528548" cy="479524"/>
-          </a:xfrm>
-          <a:prstGeom prst="rect">
-            <a:avLst/>
-          </a:prstGeom>
-          <a:noFill/>
-        </p:spPr>
-        <p:txBody>
-          <a:bodyPr wrap="square" lIns="0" rIns="0" tIns="0" bIns="0">
-            <a:spAutoFit/>
-          </a:bodyPr>
-          <a:lstStyle/>
-          <a:p>
-            <a:pPr algn="l">
-              <a:lnSpc>
-                <a:spcPct val="112500"/>
-              </a:lnSpc>
-              <a:spcAft>
-                <a:spcPts val="0"/>
-              </a:spcAft>
-              <a:buNone/>
-            </a:pPr>
-            <a:r>
-              <a:rPr sz="1400" b="1" i="0">
-                <a:solidFill>
-                  <a:srgbClr val="10141A"/>
-                </a:solidFill>
-                <a:latin typeface="Arial"/>
-              </a:rPr>
-              <a:t>Minakaran N, Morjaria P, Frick KD, Gilbert C.</a:t>
-            </a:r>
-            <a:r>
-              <a:rPr sz="1400" b="0" i="0">
-                <a:solidFill>
-                  <a:srgbClr val="47525F"/>
-                </a:solidFill>
-                <a:latin typeface="Arial"/>
-              </a:rPr>
-              <a:t> Cost-minimisation analysis from a non-inferiority trial of ready-made versus custom-made spectacles for school children in India. </a:t>
-            </a:r>
-            <a:r>
-              <a:rPr sz="1400" b="0" i="1">
-                <a:solidFill>
-                  <a:srgbClr val="47525F"/>
-                </a:solidFill>
-                <a:latin typeface="Arial"/>
-              </a:rPr>
-              <a:t>Ophthalmic Epidemiol</a:t>
-            </a:r>
-            <a:r>
-              <a:rPr sz="1400" b="0" i="0">
-                <a:solidFill>
-                  <a:srgbClr val="47525F"/>
-                </a:solidFill>
-                <a:latin typeface="Arial"/>
-              </a:rPr>
-              <a:t> 2021;28(5):383–91. PMID 33256485</a:t>
-            </a:r>
-          </a:p>
-        </p:txBody>
-      </p:sp>
-      <p:sp>
-        <p:nvSpPr>
-          <p:cNvPr id="11" name="TextBox 10"/>
-          <p:cNvSpPr txBox="1"/>
-          <p:nvPr/>
-        </p:nvSpPr>
-        <p:spPr>
-          <a:xfrm>
-            <a:off x="1111002" y="5119630"/>
-            <a:ext cx="10528548" cy="479524"/>
-          </a:xfrm>
-          <a:prstGeom prst="rect">
-            <a:avLst/>
-          </a:prstGeom>
-          <a:noFill/>
-        </p:spPr>
-        <p:txBody>
-          <a:bodyPr wrap="square" lIns="0" rIns="0" tIns="0" bIns="0">
-            <a:spAutoFit/>
-          </a:bodyPr>
-          <a:lstStyle/>
-          <a:p>
-            <a:pPr algn="l">
-              <a:lnSpc>
-                <a:spcPct val="112500"/>
-              </a:lnSpc>
-              <a:spcAft>
-                <a:spcPts val="0"/>
-              </a:spcAft>
-              <a:buNone/>
-            </a:pPr>
-            <a:r>
-              <a:rPr sz="1400" b="1" i="0">
-                <a:solidFill>
-                  <a:srgbClr val="10141A"/>
-                </a:solidFill>
-                <a:latin typeface="Arial"/>
-              </a:rPr>
-              <a:t>Esposito DH, Tate JE, Kang G, Parashar UD.</a:t>
-            </a:r>
-            <a:r>
-              <a:rPr sz="1400" b="0" i="0">
-                <a:solidFill>
-                  <a:srgbClr val="47525F"/>
-                </a:solidFill>
-                <a:latin typeface="Arial"/>
-              </a:rPr>
-              <a:t> Projected impact and cost-effectiveness of a rotavirus vaccination program in India, 2008. </a:t>
-            </a:r>
-            <a:r>
-              <a:rPr sz="1400" b="0" i="1">
-                <a:solidFill>
-                  <a:srgbClr val="47525F"/>
-                </a:solidFill>
-                <a:latin typeface="Arial"/>
-              </a:rPr>
-              <a:t>Clin Infect Dis</a:t>
-            </a:r>
-            <a:r>
-              <a:rPr sz="1400" b="0" i="0">
-                <a:solidFill>
-                  <a:srgbClr val="47525F"/>
-                </a:solidFill>
-                <a:latin typeface="Arial"/>
-              </a:rPr>
-              <a:t> 2011;52(2):171–7. PMID 21288839</a:t>
-            </a:r>
-          </a:p>
-        </p:txBody>
-      </p:sp>
-      <p:sp>
-        <p:nvSpPr>
-          <p:cNvPr id="12" name="TextBox 11"/>
-          <p:cNvSpPr txBox="1"/>
-          <p:nvPr/>
-        </p:nvSpPr>
-        <p:spPr>
-          <a:xfrm>
-            <a:off x="1111002" y="5687856"/>
-            <a:ext cx="10528548" cy="479524"/>
-          </a:xfrm>
-          <a:prstGeom prst="rect">
-            <a:avLst/>
-          </a:prstGeom>
-          <a:noFill/>
-        </p:spPr>
-        <p:txBody>
-          <a:bodyPr wrap="square" lIns="0" rIns="0" tIns="0" bIns="0">
-            <a:spAutoFit/>
-          </a:bodyPr>
-          <a:lstStyle/>
-          <a:p>
-            <a:pPr algn="l">
-              <a:lnSpc>
-                <a:spcPct val="112500"/>
-              </a:lnSpc>
-              <a:spcAft>
-                <a:spcPts val="0"/>
-              </a:spcAft>
-              <a:buNone/>
-            </a:pPr>
-            <a:r>
-              <a:rPr sz="1400" b="1" i="0">
-                <a:solidFill>
-                  <a:srgbClr val="10141A"/>
-                </a:solidFill>
-                <a:latin typeface="Arial"/>
-              </a:rPr>
-              <a:t>Prinja S, Chauhan AS, Angell B, et al.</a:t>
-            </a:r>
-            <a:r>
-              <a:rPr sz="1400" b="0" i="0">
-                <a:solidFill>
-                  <a:srgbClr val="47525F"/>
-                </a:solidFill>
-                <a:latin typeface="Arial"/>
-              </a:rPr>
-              <a:t> A systematic review of the state of economic evaluation for health care in India. </a:t>
-            </a:r>
-            <a:r>
-              <a:rPr sz="1400" b="0" i="1">
-                <a:solidFill>
-                  <a:srgbClr val="47525F"/>
-                </a:solidFill>
-                <a:latin typeface="Arial"/>
-              </a:rPr>
-              <a:t>Appl Health Econ Health Policy</a:t>
-            </a:r>
-            <a:r>
-              <a:rPr sz="1400" b="0" i="0">
-                <a:solidFill>
-                  <a:srgbClr val="47525F"/>
-                </a:solidFill>
-                <a:latin typeface="Arial"/>
-              </a:rPr>
-              <a:t> 2015;13(6):595–613. PMID 26449485</a:t>
+              <a:t>Hold it until after lunch. First, was that the right question?</a:t>
             </a:r>
           </a:p>
         </p:txBody>
@@ -15217,6 +15281,723 @@
 </file>
 
 <file path=ppt/slides/slide27.xml><?xml version="1.0" encoding="utf-8"?>
+<p:sld xmlns:a="http://schemas.openxmlformats.org/drawingml/2006/main" xmlns:p="http://schemas.openxmlformats.org/presentationml/2006/main" xmlns:r="http://schemas.openxmlformats.org/officeDocument/2006/relationships">
+  <p:cSld>
+    <p:spTree>
+      <p:nvGrpSpPr>
+        <p:cNvPr id="1" name=""/>
+        <p:cNvGrpSpPr/>
+        <p:nvPr/>
+      </p:nvGrpSpPr>
+      <p:grpSpPr/>
+      <p:sp>
+        <p:nvSpPr>
+          <p:cNvPr id="2" name="Rectangle 1"/>
+          <p:cNvSpPr/>
+          <p:nvPr/>
+        </p:nvSpPr>
+        <p:spPr>
+          <a:xfrm>
+            <a:off x="0" y="0"/>
+            <a:ext cx="12192000" cy="876300"/>
+          </a:xfrm>
+          <a:prstGeom prst="rect">
+            <a:avLst/>
+          </a:prstGeom>
+          <a:solidFill>
+            <a:srgbClr val="162A6C"/>
+          </a:solidFill>
+          <a:ln>
+            <a:noFill/>
+          </a:ln>
+          <a:effectLst/>
+        </p:spPr>
+        <p:style>
+          <a:lnRef idx="1">
+            <a:schemeClr val="accent1"/>
+          </a:lnRef>
+          <a:fillRef idx="3">
+            <a:schemeClr val="accent1"/>
+          </a:fillRef>
+          <a:effectRef idx="2">
+            <a:schemeClr val="accent1"/>
+          </a:effectRef>
+          <a:fontRef idx="minor">
+            <a:schemeClr val="lt1"/>
+          </a:fontRef>
+        </p:style>
+        <p:txBody>
+          <a:bodyPr rtlCol="0" anchor="ctr"/>
+          <a:lstStyle/>
+          <a:p>
+            <a:pPr algn="ctr"/>
+          </a:p>
+        </p:txBody>
+      </p:sp>
+      <p:sp>
+        <p:nvSpPr>
+          <p:cNvPr id="3" name="TextBox 2"/>
+          <p:cNvSpPr txBox="1"/>
+          <p:nvPr/>
+        </p:nvSpPr>
+        <p:spPr>
+          <a:xfrm>
+            <a:off x="552450" y="0"/>
+            <a:ext cx="11087100" cy="876300"/>
+          </a:xfrm>
+          <a:prstGeom prst="rect">
+            <a:avLst/>
+          </a:prstGeom>
+          <a:noFill/>
+        </p:spPr>
+        <p:txBody>
+          <a:bodyPr wrap="square" lIns="0" rIns="0" tIns="0" bIns="0" anchor="ctr">
+            <a:spAutoFit/>
+          </a:bodyPr>
+          <a:lstStyle/>
+          <a:p>
+            <a:pPr algn="l">
+              <a:lnSpc>
+                <a:spcPct val="93300"/>
+              </a:lnSpc>
+              <a:spcAft>
+                <a:spcPts val="0"/>
+              </a:spcAft>
+              <a:buNone/>
+            </a:pPr>
+            <a:r>
+              <a:rPr sz="3000" b="1" i="0" spc="-15">
+                <a:solidFill>
+                  <a:srgbClr val="FFFFFF"/>
+                </a:solidFill>
+                <a:latin typeface="Arial"/>
+              </a:rPr>
+              <a:t>Sources</a:t>
+            </a:r>
+          </a:p>
+        </p:txBody>
+      </p:sp>
+      <p:sp>
+        <p:nvSpPr>
+          <p:cNvPr id="4" name="TextBox 3"/>
+          <p:cNvSpPr txBox="1"/>
+          <p:nvPr/>
+        </p:nvSpPr>
+        <p:spPr>
+          <a:xfrm>
+            <a:off x="1111002" y="1142050"/>
+            <a:ext cx="10528548" cy="479524"/>
+          </a:xfrm>
+          <a:prstGeom prst="rect">
+            <a:avLst/>
+          </a:prstGeom>
+          <a:noFill/>
+        </p:spPr>
+        <p:txBody>
+          <a:bodyPr wrap="square" lIns="0" rIns="0" tIns="0" bIns="0">
+            <a:spAutoFit/>
+          </a:bodyPr>
+          <a:lstStyle/>
+          <a:p>
+            <a:pPr algn="l">
+              <a:lnSpc>
+                <a:spcPct val="112500"/>
+              </a:lnSpc>
+              <a:spcAft>
+                <a:spcPts val="0"/>
+              </a:spcAft>
+              <a:buNone/>
+            </a:pPr>
+            <a:r>
+              <a:rPr sz="1400" b="1" i="0">
+                <a:solidFill>
+                  <a:srgbClr val="10141A"/>
+                </a:solidFill>
+                <a:latin typeface="Arial"/>
+              </a:rPr>
+              <a:t>Drummond MF, Sculpher MJ, Claxton K, Stoddart GL, Torrance GW.</a:t>
+            </a:r>
+            <a:r>
+              <a:rPr sz="1400" b="0" i="0">
+                <a:solidFill>
+                  <a:srgbClr val="47525F"/>
+                </a:solidFill>
+                <a:latin typeface="Arial"/>
+              </a:rPr>
+              <a:t> Methods for the Economic Evaluation of Health Care Programmes. 4th ed. Oxford University Press; 2015. </a:t>
+            </a:r>
+            <a:r>
+              <a:rPr sz="1400" b="1" i="0">
+                <a:solidFill>
+                  <a:srgbClr val="10141A"/>
+                </a:solidFill>
+                <a:latin typeface="Arial"/>
+              </a:rPr>
+              <a:t>Chapter 1</a:t>
+            </a:r>
+            <a:r>
+              <a:rPr sz="1400" b="0" i="0">
+                <a:solidFill>
+                  <a:srgbClr val="47525F"/>
+                </a:solidFill>
+                <a:latin typeface="Arial"/>
+              </a:rPr>
+              <a:t>, pp. 1–19.</a:t>
+            </a:r>
+          </a:p>
+        </p:txBody>
+      </p:sp>
+      <p:sp>
+        <p:nvSpPr>
+          <p:cNvPr id="5" name="TextBox 4"/>
+          <p:cNvSpPr txBox="1"/>
+          <p:nvPr/>
+        </p:nvSpPr>
+        <p:spPr>
+          <a:xfrm>
+            <a:off x="1111002" y="1710276"/>
+            <a:ext cx="10528548" cy="479524"/>
+          </a:xfrm>
+          <a:prstGeom prst="rect">
+            <a:avLst/>
+          </a:prstGeom>
+          <a:noFill/>
+        </p:spPr>
+        <p:txBody>
+          <a:bodyPr wrap="square" lIns="0" rIns="0" tIns="0" bIns="0">
+            <a:spAutoFit/>
+          </a:bodyPr>
+          <a:lstStyle/>
+          <a:p>
+            <a:pPr algn="l">
+              <a:lnSpc>
+                <a:spcPct val="112500"/>
+              </a:lnSpc>
+              <a:spcAft>
+                <a:spcPts val="0"/>
+              </a:spcAft>
+              <a:buNone/>
+            </a:pPr>
+            <a:r>
+              <a:rPr sz="1400" b="1" i="0">
+                <a:solidFill>
+                  <a:srgbClr val="10141A"/>
+                </a:solidFill>
+                <a:latin typeface="Arial"/>
+              </a:rPr>
+              <a:t>Press Information Bureau, Government of India.</a:t>
+            </a:r>
+            <a:r>
+              <a:rPr sz="1400" b="0" i="0">
+                <a:solidFill>
+                  <a:srgbClr val="47525F"/>
+                </a:solidFill>
+                <a:latin typeface="Arial"/>
+              </a:rPr>
+              <a:t> Cervical Cancer Vaccination Campaign launched. 28 February 2026. Burden figures from GLOBOCAN 2022.</a:t>
+            </a:r>
+          </a:p>
+        </p:txBody>
+      </p:sp>
+      <p:sp>
+        <p:nvSpPr>
+          <p:cNvPr id="6" name="TextBox 5"/>
+          <p:cNvSpPr txBox="1"/>
+          <p:nvPr/>
+        </p:nvSpPr>
+        <p:spPr>
+          <a:xfrm>
+            <a:off x="1111002" y="2278502"/>
+            <a:ext cx="10528548" cy="479524"/>
+          </a:xfrm>
+          <a:prstGeom prst="rect">
+            <a:avLst/>
+          </a:prstGeom>
+          <a:noFill/>
+        </p:spPr>
+        <p:txBody>
+          <a:bodyPr wrap="square" lIns="0" rIns="0" tIns="0" bIns="0">
+            <a:spAutoFit/>
+          </a:bodyPr>
+          <a:lstStyle/>
+          <a:p>
+            <a:pPr algn="l">
+              <a:lnSpc>
+                <a:spcPct val="112500"/>
+              </a:lnSpc>
+              <a:spcAft>
+                <a:spcPts val="0"/>
+              </a:spcAft>
+              <a:buNone/>
+            </a:pPr>
+            <a:r>
+              <a:rPr sz="1400" b="1" i="0">
+                <a:solidFill>
+                  <a:srgbClr val="10141A"/>
+                </a:solidFill>
+                <a:latin typeface="Arial"/>
+              </a:rPr>
+              <a:t>Ramamoorthy T, Kulothungan V, Sathishkumar K, et al.</a:t>
+            </a:r>
+            <a:r>
+              <a:rPr sz="1400" b="0" i="0">
+                <a:solidFill>
+                  <a:srgbClr val="47525F"/>
+                </a:solidFill>
+                <a:latin typeface="Arial"/>
+              </a:rPr>
+              <a:t> Burden of cervical cancer in India: YLL, YLD and DALYs at national and subnational levels. </a:t>
+            </a:r>
+            <a:r>
+              <a:rPr sz="1400" b="0" i="1">
+                <a:solidFill>
+                  <a:srgbClr val="47525F"/>
+                </a:solidFill>
+                <a:latin typeface="Arial"/>
+              </a:rPr>
+              <a:t>Reprod Health</a:t>
+            </a:r>
+            <a:r>
+              <a:rPr sz="1400" b="0" i="0">
+                <a:solidFill>
+                  <a:srgbClr val="47525F"/>
+                </a:solidFill>
+                <a:latin typeface="Arial"/>
+              </a:rPr>
+              <a:t> 2024;21:111. PMID 39075548</a:t>
+            </a:r>
+          </a:p>
+        </p:txBody>
+      </p:sp>
+      <p:sp>
+        <p:nvSpPr>
+          <p:cNvPr id="7" name="TextBox 6"/>
+          <p:cNvSpPr txBox="1"/>
+          <p:nvPr/>
+        </p:nvSpPr>
+        <p:spPr>
+          <a:xfrm>
+            <a:off x="1111002" y="2846727"/>
+            <a:ext cx="10528548" cy="479524"/>
+          </a:xfrm>
+          <a:prstGeom prst="rect">
+            <a:avLst/>
+          </a:prstGeom>
+          <a:noFill/>
+        </p:spPr>
+        <p:txBody>
+          <a:bodyPr wrap="square" lIns="0" rIns="0" tIns="0" bIns="0">
+            <a:spAutoFit/>
+          </a:bodyPr>
+          <a:lstStyle/>
+          <a:p>
+            <a:pPr algn="l">
+              <a:lnSpc>
+                <a:spcPct val="112500"/>
+              </a:lnSpc>
+              <a:spcAft>
+                <a:spcPts val="0"/>
+              </a:spcAft>
+              <a:buNone/>
+            </a:pPr>
+            <a:r>
+              <a:rPr sz="1400" b="1" i="0">
+                <a:solidFill>
+                  <a:srgbClr val="10141A"/>
+                </a:solidFill>
+                <a:latin typeface="Arial"/>
+              </a:rPr>
+              <a:t>Singh MP, Chauhan AS, Rai B, et al.</a:t>
+            </a:r>
+            <a:r>
+              <a:rPr sz="1400" b="0" i="0">
+                <a:solidFill>
+                  <a:srgbClr val="47525F"/>
+                </a:solidFill>
+                <a:latin typeface="Arial"/>
+              </a:rPr>
+              <a:t> Cost of treatment for cervical cancer in India. </a:t>
+            </a:r>
+            <a:r>
+              <a:rPr sz="1400" b="0" i="1">
+                <a:solidFill>
+                  <a:srgbClr val="47525F"/>
+                </a:solidFill>
+                <a:latin typeface="Arial"/>
+              </a:rPr>
+              <a:t>Asian Pac J Cancer Prev</a:t>
+            </a:r>
+            <a:r>
+              <a:rPr sz="1400" b="0" i="0">
+                <a:solidFill>
+                  <a:srgbClr val="47525F"/>
+                </a:solidFill>
+                <a:latin typeface="Arial"/>
+              </a:rPr>
+              <a:t> 2020;21(9):2639–46. PMID 32986363</a:t>
+            </a:r>
+          </a:p>
+        </p:txBody>
+      </p:sp>
+      <p:sp>
+        <p:nvSpPr>
+          <p:cNvPr id="8" name="TextBox 7"/>
+          <p:cNvSpPr txBox="1"/>
+          <p:nvPr/>
+        </p:nvSpPr>
+        <p:spPr>
+          <a:xfrm>
+            <a:off x="1111002" y="3414953"/>
+            <a:ext cx="10528548" cy="479524"/>
+          </a:xfrm>
+          <a:prstGeom prst="rect">
+            <a:avLst/>
+          </a:prstGeom>
+          <a:noFill/>
+        </p:spPr>
+        <p:txBody>
+          <a:bodyPr wrap="square" lIns="0" rIns="0" tIns="0" bIns="0">
+            <a:spAutoFit/>
+          </a:bodyPr>
+          <a:lstStyle/>
+          <a:p>
+            <a:pPr algn="l">
+              <a:lnSpc>
+                <a:spcPct val="112500"/>
+              </a:lnSpc>
+              <a:spcAft>
+                <a:spcPts val="0"/>
+              </a:spcAft>
+              <a:buNone/>
+            </a:pPr>
+            <a:r>
+              <a:rPr sz="1400" b="1" i="0">
+                <a:solidFill>
+                  <a:srgbClr val="10141A"/>
+                </a:solidFill>
+                <a:latin typeface="Arial"/>
+              </a:rPr>
+              <a:t>Sankaranarayanan R, Nene BM, Shastri SS, et al.</a:t>
+            </a:r>
+            <a:r>
+              <a:rPr sz="1400" b="0" i="0">
+                <a:solidFill>
+                  <a:srgbClr val="47525F"/>
+                </a:solidFill>
+                <a:latin typeface="Arial"/>
+              </a:rPr>
+              <a:t> HPV screening for cervical cancer in rural India. </a:t>
+            </a:r>
+            <a:r>
+              <a:rPr sz="1400" b="0" i="1">
+                <a:solidFill>
+                  <a:srgbClr val="47525F"/>
+                </a:solidFill>
+                <a:latin typeface="Arial"/>
+              </a:rPr>
+              <a:t>N Engl J Med</a:t>
+            </a:r>
+            <a:r>
+              <a:rPr sz="1400" b="0" i="0">
+                <a:solidFill>
+                  <a:srgbClr val="47525F"/>
+                </a:solidFill>
+                <a:latin typeface="Arial"/>
+              </a:rPr>
+              <a:t> 2009;360:1385–94. PMID 19339719</a:t>
+            </a:r>
+          </a:p>
+        </p:txBody>
+      </p:sp>
+      <p:sp>
+        <p:nvSpPr>
+          <p:cNvPr id="9" name="TextBox 8"/>
+          <p:cNvSpPr txBox="1"/>
+          <p:nvPr/>
+        </p:nvSpPr>
+        <p:spPr>
+          <a:xfrm>
+            <a:off x="1111002" y="3983179"/>
+            <a:ext cx="10528548" cy="479524"/>
+          </a:xfrm>
+          <a:prstGeom prst="rect">
+            <a:avLst/>
+          </a:prstGeom>
+          <a:noFill/>
+        </p:spPr>
+        <p:txBody>
+          <a:bodyPr wrap="square" lIns="0" rIns="0" tIns="0" bIns="0">
+            <a:spAutoFit/>
+          </a:bodyPr>
+          <a:lstStyle/>
+          <a:p>
+            <a:pPr algn="l">
+              <a:lnSpc>
+                <a:spcPct val="112500"/>
+              </a:lnSpc>
+              <a:spcAft>
+                <a:spcPts val="0"/>
+              </a:spcAft>
+              <a:buNone/>
+            </a:pPr>
+            <a:r>
+              <a:rPr sz="1400" b="1" i="0">
+                <a:solidFill>
+                  <a:srgbClr val="10141A"/>
+                </a:solidFill>
+                <a:latin typeface="Arial"/>
+              </a:rPr>
+              <a:t>Chauhan AS, Prinja S, Srinivasan R, et al.</a:t>
+            </a:r>
+            <a:r>
+              <a:rPr sz="1400" b="0" i="0">
+                <a:solidFill>
+                  <a:srgbClr val="47525F"/>
+                </a:solidFill>
+                <a:latin typeface="Arial"/>
+              </a:rPr>
+              <a:t> Cost effectiveness of strategies for cervical cancer prevention in India. </a:t>
+            </a:r>
+            <a:r>
+              <a:rPr sz="1400" b="0" i="1">
+                <a:solidFill>
+                  <a:srgbClr val="47525F"/>
+                </a:solidFill>
+                <a:latin typeface="Arial"/>
+              </a:rPr>
+              <a:t>PLoS One</a:t>
+            </a:r>
+            <a:r>
+              <a:rPr sz="1400" b="0" i="0">
+                <a:solidFill>
+                  <a:srgbClr val="47525F"/>
+                </a:solidFill>
+                <a:latin typeface="Arial"/>
+              </a:rPr>
+              <a:t> 2020;15(9):e0238291. PMID 32870941</a:t>
+            </a:r>
+          </a:p>
+        </p:txBody>
+      </p:sp>
+      <p:sp>
+        <p:nvSpPr>
+          <p:cNvPr id="10" name="TextBox 9"/>
+          <p:cNvSpPr txBox="1"/>
+          <p:nvPr/>
+        </p:nvSpPr>
+        <p:spPr>
+          <a:xfrm>
+            <a:off x="1111002" y="4551405"/>
+            <a:ext cx="10528548" cy="479524"/>
+          </a:xfrm>
+          <a:prstGeom prst="rect">
+            <a:avLst/>
+          </a:prstGeom>
+          <a:noFill/>
+        </p:spPr>
+        <p:txBody>
+          <a:bodyPr wrap="square" lIns="0" rIns="0" tIns="0" bIns="0">
+            <a:spAutoFit/>
+          </a:bodyPr>
+          <a:lstStyle/>
+          <a:p>
+            <a:pPr algn="l">
+              <a:lnSpc>
+                <a:spcPct val="112500"/>
+              </a:lnSpc>
+              <a:spcAft>
+                <a:spcPts val="0"/>
+              </a:spcAft>
+              <a:buNone/>
+            </a:pPr>
+            <a:r>
+              <a:rPr sz="1400" b="1" i="0">
+                <a:solidFill>
+                  <a:srgbClr val="10141A"/>
+                </a:solidFill>
+                <a:latin typeface="Arial"/>
+              </a:rPr>
+              <a:t>Minakaran N, Morjaria P, Frick KD, Gilbert C.</a:t>
+            </a:r>
+            <a:r>
+              <a:rPr sz="1400" b="0" i="0">
+                <a:solidFill>
+                  <a:srgbClr val="47525F"/>
+                </a:solidFill>
+                <a:latin typeface="Arial"/>
+              </a:rPr>
+              <a:t> Cost-minimisation analysis from a non-inferiority trial of ready-made versus custom-made spectacles for school children in India. </a:t>
+            </a:r>
+            <a:r>
+              <a:rPr sz="1400" b="0" i="1">
+                <a:solidFill>
+                  <a:srgbClr val="47525F"/>
+                </a:solidFill>
+                <a:latin typeface="Arial"/>
+              </a:rPr>
+              <a:t>Ophthalmic Epidemiol</a:t>
+            </a:r>
+            <a:r>
+              <a:rPr sz="1400" b="0" i="0">
+                <a:solidFill>
+                  <a:srgbClr val="47525F"/>
+                </a:solidFill>
+                <a:latin typeface="Arial"/>
+              </a:rPr>
+              <a:t> 2021;28(5):383–91. PMID 33256485</a:t>
+            </a:r>
+          </a:p>
+        </p:txBody>
+      </p:sp>
+      <p:sp>
+        <p:nvSpPr>
+          <p:cNvPr id="11" name="TextBox 10"/>
+          <p:cNvSpPr txBox="1"/>
+          <p:nvPr/>
+        </p:nvSpPr>
+        <p:spPr>
+          <a:xfrm>
+            <a:off x="1111002" y="5119630"/>
+            <a:ext cx="10528548" cy="479524"/>
+          </a:xfrm>
+          <a:prstGeom prst="rect">
+            <a:avLst/>
+          </a:prstGeom>
+          <a:noFill/>
+        </p:spPr>
+        <p:txBody>
+          <a:bodyPr wrap="square" lIns="0" rIns="0" tIns="0" bIns="0">
+            <a:spAutoFit/>
+          </a:bodyPr>
+          <a:lstStyle/>
+          <a:p>
+            <a:pPr algn="l">
+              <a:lnSpc>
+                <a:spcPct val="112500"/>
+              </a:lnSpc>
+              <a:spcAft>
+                <a:spcPts val="0"/>
+              </a:spcAft>
+              <a:buNone/>
+            </a:pPr>
+            <a:r>
+              <a:rPr sz="1400" b="1" i="0">
+                <a:solidFill>
+                  <a:srgbClr val="10141A"/>
+                </a:solidFill>
+                <a:latin typeface="Arial"/>
+              </a:rPr>
+              <a:t>Esposito DH, Tate JE, Kang G, Parashar UD.</a:t>
+            </a:r>
+            <a:r>
+              <a:rPr sz="1400" b="0" i="0">
+                <a:solidFill>
+                  <a:srgbClr val="47525F"/>
+                </a:solidFill>
+                <a:latin typeface="Arial"/>
+              </a:rPr>
+              <a:t> Projected impact and cost-effectiveness of a rotavirus vaccination program in India, 2008. </a:t>
+            </a:r>
+            <a:r>
+              <a:rPr sz="1400" b="0" i="1">
+                <a:solidFill>
+                  <a:srgbClr val="47525F"/>
+                </a:solidFill>
+                <a:latin typeface="Arial"/>
+              </a:rPr>
+              <a:t>Clin Infect Dis</a:t>
+            </a:r>
+            <a:r>
+              <a:rPr sz="1400" b="0" i="0">
+                <a:solidFill>
+                  <a:srgbClr val="47525F"/>
+                </a:solidFill>
+                <a:latin typeface="Arial"/>
+              </a:rPr>
+              <a:t> 2011;52(2):171–7. PMID 21288839</a:t>
+            </a:r>
+          </a:p>
+        </p:txBody>
+      </p:sp>
+      <p:sp>
+        <p:nvSpPr>
+          <p:cNvPr id="12" name="TextBox 11"/>
+          <p:cNvSpPr txBox="1"/>
+          <p:nvPr/>
+        </p:nvSpPr>
+        <p:spPr>
+          <a:xfrm>
+            <a:off x="1111002" y="5687856"/>
+            <a:ext cx="10528548" cy="479524"/>
+          </a:xfrm>
+          <a:prstGeom prst="rect">
+            <a:avLst/>
+          </a:prstGeom>
+          <a:noFill/>
+        </p:spPr>
+        <p:txBody>
+          <a:bodyPr wrap="square" lIns="0" rIns="0" tIns="0" bIns="0">
+            <a:spAutoFit/>
+          </a:bodyPr>
+          <a:lstStyle/>
+          <a:p>
+            <a:pPr algn="l">
+              <a:lnSpc>
+                <a:spcPct val="112500"/>
+              </a:lnSpc>
+              <a:spcAft>
+                <a:spcPts val="0"/>
+              </a:spcAft>
+              <a:buNone/>
+            </a:pPr>
+            <a:r>
+              <a:rPr sz="1400" b="1" i="0">
+                <a:solidFill>
+                  <a:srgbClr val="10141A"/>
+                </a:solidFill>
+                <a:latin typeface="Arial"/>
+              </a:rPr>
+              <a:t>Prinja S, Chauhan AS, Angell B, et al.</a:t>
+            </a:r>
+            <a:r>
+              <a:rPr sz="1400" b="0" i="0">
+                <a:solidFill>
+                  <a:srgbClr val="47525F"/>
+                </a:solidFill>
+                <a:latin typeface="Arial"/>
+              </a:rPr>
+              <a:t> A systematic review of the state of economic evaluation for health care in India. </a:t>
+            </a:r>
+            <a:r>
+              <a:rPr sz="1400" b="0" i="1">
+                <a:solidFill>
+                  <a:srgbClr val="47525F"/>
+                </a:solidFill>
+                <a:latin typeface="Arial"/>
+              </a:rPr>
+              <a:t>Appl Health Econ Health Policy</a:t>
+            </a:r>
+            <a:r>
+              <a:rPr sz="1400" b="0" i="0">
+                <a:solidFill>
+                  <a:srgbClr val="47525F"/>
+                </a:solidFill>
+                <a:latin typeface="Arial"/>
+              </a:rPr>
+              <a:t> 2015;13(6):595–613. PMID 26449485</a:t>
+            </a:r>
+          </a:p>
+        </p:txBody>
+      </p:sp>
+    </p:spTree>
+  </p:cSld>
+  <p:clrMapOvr>
+    <a:masterClrMapping/>
+  </p:clrMapOvr>
+</p:sld>
+</file>
+
+<file path=ppt/slides/slide28.xml><?xml version="1.0" encoding="utf-8"?>
 <p:sld xmlns:a="http://schemas.openxmlformats.org/drawingml/2006/main" xmlns:p="http://schemas.openxmlformats.org/presentationml/2006/main" xmlns:r="http://schemas.openxmlformats.org/officeDocument/2006/relationships">
   <p:cSld>
     <p:spTree>
